--- a/preview_v7/bio/l-bio-b1-u3-2.pptx
+++ b/preview_v7/bio/l-bio-b1-u3-2.pptx
@@ -3142,61 +3142,20 @@
       </p:sp>
       <p:sp>
         <p:nvSpPr>
-          <p:cNvPr id="3" name="TextBox 2"/>
-          <p:cNvSpPr txBox="1"/>
-          <p:nvPr/>
-        </p:nvSpPr>
-        <p:spPr>
-          <a:xfrm>
-            <a:off x="640080" y="640080"/>
-            <a:ext cx="10911535" cy="502920"/>
-          </a:xfrm>
-          <a:prstGeom prst="rect">
-            <a:avLst/>
-          </a:prstGeom>
-          <a:noFill/>
-        </p:spPr>
-        <p:txBody>
-          <a:bodyPr wrap="square" anchor="t" lIns="0" rIns="0" tIns="0" bIns="0">
-            <a:spAutoFit/>
-          </a:bodyPr>
-          <a:lstStyle/>
-          <a:p>
-            <a:pPr algn="l">
-              <a:spcAft>
-                <a:spcPts val="0"/>
-              </a:spcAft>
-            </a:pPr>
-            <a:r>
-              <a:rPr sz="1200" b="1">
-                <a:solidFill>
-                  <a:srgbClr val="B23A2A"/>
-                </a:solidFill>
-                <a:latin typeface="微软雅黑"/>
-                <a:ea typeface="微软雅黑"/>
-                <a:cs typeface="微软雅黑"/>
-              </a:rPr>
-              <a:t>生物 · 必修1 分子与细胞 · 第3单元 细胞的基本结构</a:t>
-            </a:r>
-          </a:p>
-        </p:txBody>
-      </p:sp>
-      <p:sp>
-        <p:nvSpPr>
-          <p:cNvPr id="4" name="Rectangle 3"/>
+          <p:cNvPr id="3" name="Rectangle 2"/>
           <p:cNvSpPr/>
           <p:nvPr/>
         </p:nvSpPr>
         <p:spPr>
           <a:xfrm>
-            <a:off x="640080" y="1207008"/>
-            <a:ext cx="822960" cy="30480"/>
+            <a:off x="0" y="0"/>
+            <a:ext cx="256032" cy="6858000"/>
           </a:xfrm>
           <a:prstGeom prst="rect">
             <a:avLst/>
           </a:prstGeom>
           <a:solidFill>
-            <a:srgbClr val="B23A2A"/>
+            <a:srgbClr val="2E7D6B"/>
           </a:solidFill>
           <a:ln>
             <a:noFill/>
@@ -3227,92 +3186,14 @@
       </p:sp>
       <p:sp>
         <p:nvSpPr>
-          <p:cNvPr id="5" name="TextBox 4"/>
-          <p:cNvSpPr txBox="1"/>
-          <p:nvPr/>
-        </p:nvSpPr>
-        <p:spPr>
-          <a:xfrm>
-            <a:off x="640080" y="1737360"/>
-            <a:ext cx="10911535" cy="2011680"/>
-          </a:xfrm>
-          <a:prstGeom prst="rect">
-            <a:avLst/>
-          </a:prstGeom>
-          <a:noFill/>
-        </p:spPr>
-        <p:txBody>
-          <a:bodyPr wrap="square" anchor="t" lIns="0" rIns="0" tIns="0" bIns="0">
-            <a:spAutoFit/>
-          </a:bodyPr>
-          <a:lstStyle/>
-          <a:p>
-            <a:pPr algn="l">
-              <a:lnSpc>
-                <a:spcPct val="115000"/>
-              </a:lnSpc>
-            </a:pPr>
-            <a:r>
-              <a:rPr sz="4000" b="1">
-                <a:solidFill>
-                  <a:srgbClr val="1C2A33"/>
-                </a:solidFill>
-                <a:latin typeface="楷体"/>
-                <a:ea typeface="楷体"/>
-                <a:cs typeface="楷体"/>
-              </a:rPr>
-              <a:t>细胞器之间的分工</a:t>
-            </a:r>
-          </a:p>
-        </p:txBody>
-      </p:sp>
-      <p:sp>
-        <p:nvSpPr>
-          <p:cNvPr id="6" name="TextBox 5"/>
-          <p:cNvSpPr txBox="1"/>
-          <p:nvPr/>
-        </p:nvSpPr>
-        <p:spPr>
-          <a:xfrm>
-            <a:off x="640080" y="3840480"/>
-            <a:ext cx="10911535" cy="457200"/>
-          </a:xfrm>
-          <a:prstGeom prst="rect">
-            <a:avLst/>
-          </a:prstGeom>
-          <a:noFill/>
-        </p:spPr>
-        <p:txBody>
-          <a:bodyPr wrap="square" anchor="t" lIns="0" rIns="0" tIns="0" bIns="0">
-            <a:spAutoFit/>
-          </a:bodyPr>
-          <a:lstStyle/>
-          <a:p>
-            <a:pPr algn="l"/>
-            <a:r>
-              <a:rPr sz="1700" b="1">
-                <a:solidFill>
-                  <a:srgbClr val="B23A2A"/>
-                </a:solidFill>
-                <a:latin typeface="微软雅黑"/>
-                <a:ea typeface="微软雅黑"/>
-                <a:cs typeface="微软雅黑"/>
-              </a:rPr>
-              <a:t>新课  ·  第9课时  ·  45分钟</a:t>
-            </a:r>
-          </a:p>
-        </p:txBody>
-      </p:sp>
-      <p:sp>
-        <p:nvSpPr>
-          <p:cNvPr id="7" name="Rectangle 6"/>
+          <p:cNvPr id="4" name="Rectangle 3"/>
           <p:cNvSpPr/>
           <p:nvPr/>
         </p:nvSpPr>
         <p:spPr>
           <a:xfrm>
-            <a:off x="640080" y="5394960"/>
-            <a:ext cx="2011680" cy="33020"/>
+            <a:off x="640080" y="1051560"/>
+            <a:ext cx="822960" cy="38100"/>
           </a:xfrm>
           <a:prstGeom prst="rect">
             <a:avLst/>
@@ -3349,14 +3230,14 @@
       </p:sp>
       <p:sp>
         <p:nvSpPr>
-          <p:cNvPr id="8" name="TextBox 7"/>
+          <p:cNvPr id="5" name="TextBox 4"/>
           <p:cNvSpPr txBox="1"/>
           <p:nvPr/>
         </p:nvSpPr>
         <p:spPr>
           <a:xfrm>
-            <a:off x="640080" y="5623560"/>
-            <a:ext cx="10911535" cy="548640"/>
+            <a:off x="640080" y="1234440"/>
+            <a:ext cx="10058400" cy="457200"/>
           </a:xfrm>
           <a:prstGeom prst="rect">
             <a:avLst/>
@@ -3371,22 +3252,215 @@
           <a:p>
             <a:pPr algn="l"/>
             <a:r>
-              <a:rPr sz="1400" b="0">
-                <a:solidFill>
-                  <a:srgbClr val="6B6258"/>
+              <a:rPr sz="1500" b="1">
+                <a:solidFill>
+                  <a:srgbClr val="2E7D6B"/>
                 </a:solidFill>
                 <a:latin typeface="微软雅黑"/>
                 <a:ea typeface="微软雅黑"/>
                 <a:cs typeface="微软雅黑"/>
               </a:rPr>
-              <a:t>学习任务群：    |    年级：高一</a:t>
-            </a:r>
-          </a:p>
-        </p:txBody>
-      </p:sp>
-      <p:sp>
-        <p:nvSpPr>
-          <p:cNvPr id="9" name="TextBox 8"/>
+              <a:t>必修1 分子与细胞 · 第3单元 · 第9课时</a:t>
+            </a:r>
+          </a:p>
+        </p:txBody>
+      </p:sp>
+      <p:sp>
+        <p:nvSpPr>
+          <p:cNvPr id="6" name="TextBox 5"/>
+          <p:cNvSpPr txBox="1"/>
+          <p:nvPr/>
+        </p:nvSpPr>
+        <p:spPr>
+          <a:xfrm>
+            <a:off x="640080" y="1783080"/>
+            <a:ext cx="11155680" cy="1371600"/>
+          </a:xfrm>
+          <a:prstGeom prst="rect">
+            <a:avLst/>
+          </a:prstGeom>
+          <a:noFill/>
+        </p:spPr>
+        <p:txBody>
+          <a:bodyPr wrap="square" anchor="t" lIns="0" rIns="0" tIns="0" bIns="0">
+            <a:spAutoFit/>
+          </a:bodyPr>
+          <a:lstStyle/>
+          <a:p>
+            <a:pPr algn="l"/>
+            <a:r>
+              <a:rPr sz="4600" b="1">
+                <a:solidFill>
+                  <a:srgbClr val="1C2A33"/>
+                </a:solidFill>
+                <a:latin typeface="楷体"/>
+                <a:ea typeface="楷体"/>
+                <a:cs typeface="楷体"/>
+              </a:rPr>
+              <a:t>细胞器之间的分工</a:t>
+            </a:r>
+          </a:p>
+        </p:txBody>
+      </p:sp>
+      <p:sp>
+        <p:nvSpPr>
+          <p:cNvPr id="7" name="TextBox 6"/>
+          <p:cNvSpPr txBox="1"/>
+          <p:nvPr/>
+        </p:nvSpPr>
+        <p:spPr>
+          <a:xfrm>
+            <a:off x="640080" y="2971800"/>
+            <a:ext cx="10972800" cy="640080"/>
+          </a:xfrm>
+          <a:prstGeom prst="rect">
+            <a:avLst/>
+          </a:prstGeom>
+          <a:noFill/>
+        </p:spPr>
+        <p:txBody>
+          <a:bodyPr wrap="square" anchor="t" lIns="0" rIns="0" tIns="0" bIns="0">
+            <a:spAutoFit/>
+          </a:bodyPr>
+          <a:lstStyle/>
+          <a:p>
+            <a:pPr algn="l"/>
+            <a:r>
+              <a:rPr sz="2000" b="1">
+                <a:solidFill>
+                  <a:srgbClr val="2E7D6B"/>
+                </a:solidFill>
+                <a:latin typeface="楷体"/>
+                <a:ea typeface="楷体"/>
+                <a:cs typeface="楷体"/>
+              </a:rPr>
+              <a:t>单元：细胞的基本结构</a:t>
+            </a:r>
+          </a:p>
+        </p:txBody>
+      </p:sp>
+      <p:sp>
+        <p:nvSpPr>
+          <p:cNvPr id="8" name="TextBox 7"/>
+          <p:cNvSpPr txBox="1"/>
+          <p:nvPr/>
+        </p:nvSpPr>
+        <p:spPr>
+          <a:xfrm>
+            <a:off x="640080" y="3794760"/>
+            <a:ext cx="10972800" cy="1188720"/>
+          </a:xfrm>
+          <a:prstGeom prst="rect">
+            <a:avLst/>
+          </a:prstGeom>
+          <a:noFill/>
+        </p:spPr>
+        <p:txBody>
+          <a:bodyPr wrap="square" anchor="t" lIns="0" rIns="0" tIns="0" bIns="0">
+            <a:spAutoFit/>
+          </a:bodyPr>
+          <a:lstStyle/>
+          <a:p>
+            <a:pPr algn="l">
+              <a:lnSpc>
+                <a:spcPct val="150000"/>
+              </a:lnSpc>
+            </a:pPr>
+            <a:r>
+              <a:rPr sz="1500" b="0">
+                <a:solidFill>
+                  <a:srgbClr val="6B6258"/>
+                </a:solidFill>
+                <a:latin typeface="楷体"/>
+                <a:ea typeface="楷体"/>
+                <a:cs typeface="楷体"/>
+              </a:rPr>
+              <a:t>介绍主要细胞器的结构与功能：线粒体（有氧呼吸主场所）、叶绿体（光合）、内质网（加工运输）、高…</a:t>
+            </a:r>
+          </a:p>
+        </p:txBody>
+      </p:sp>
+      <p:sp>
+        <p:nvSpPr>
+          <p:cNvPr id="9" name="Rounded Rectangle 8"/>
+          <p:cNvSpPr/>
+          <p:nvPr/>
+        </p:nvSpPr>
+        <p:spPr>
+          <a:xfrm>
+            <a:off x="640080" y="5532120"/>
+            <a:ext cx="10911535" cy="868680"/>
+          </a:xfrm>
+          <a:prstGeom prst="roundRect">
+            <a:avLst/>
+          </a:prstGeom>
+          <a:solidFill>
+            <a:srgbClr val="1C2A33"/>
+          </a:solidFill>
+          <a:effectLst/>
+        </p:spPr>
+        <p:style>
+          <a:lnRef idx="1">
+            <a:schemeClr val="accent1"/>
+          </a:lnRef>
+          <a:fillRef idx="3">
+            <a:schemeClr val="accent1"/>
+          </a:fillRef>
+          <a:effectRef idx="2">
+            <a:schemeClr val="accent1"/>
+          </a:effectRef>
+          <a:fontRef idx="minor">
+            <a:schemeClr val="lt1"/>
+          </a:fontRef>
+        </p:style>
+        <p:txBody>
+          <a:bodyPr rtlCol="0" anchor="ctr"/>
+          <a:lstStyle/>
+          <a:p>
+            <a:pPr algn="ctr"/>
+          </a:p>
+        </p:txBody>
+      </p:sp>
+      <p:sp>
+        <p:nvSpPr>
+          <p:cNvPr id="10" name="TextBox 9"/>
+          <p:cNvSpPr txBox="1"/>
+          <p:nvPr/>
+        </p:nvSpPr>
+        <p:spPr>
+          <a:xfrm>
+            <a:off x="914400" y="5650992"/>
+            <a:ext cx="10362895" cy="640080"/>
+          </a:xfrm>
+          <a:prstGeom prst="rect">
+            <a:avLst/>
+          </a:prstGeom>
+          <a:noFill/>
+        </p:spPr>
+        <p:txBody>
+          <a:bodyPr wrap="square" anchor="t" lIns="0" rIns="0" tIns="0" bIns="0">
+            <a:spAutoFit/>
+          </a:bodyPr>
+          <a:lstStyle/>
+          <a:p>
+            <a:pPr algn="l"/>
+            <a:r>
+              <a:rPr sz="1300" b="0">
+                <a:solidFill>
+                  <a:srgbClr val="FFFFFF"/>
+                </a:solidFill>
+                <a:latin typeface="微软雅黑"/>
+                <a:ea typeface="微软雅黑"/>
+                <a:cs typeface="微软雅黑"/>
+              </a:rPr>
+              <a:t>线粒体 · 叶绿体 · 内质网 · 高尔基体 · 核糖体</a:t>
+            </a:r>
+          </a:p>
+        </p:txBody>
+      </p:sp>
+      <p:sp>
+        <p:nvSpPr>
+          <p:cNvPr id="11" name="TextBox 10"/>
           <p:cNvSpPr txBox="1"/>
           <p:nvPr/>
         </p:nvSpPr>
@@ -3513,7 +3587,7 @@
             <a:r>
               <a:rPr sz="1300" b="1">
                 <a:solidFill>
-                  <a:srgbClr val="B23A2A"/>
+                  <a:srgbClr val="2E7D6B"/>
                 </a:solidFill>
                 <a:latin typeface="微软雅黑"/>
                 <a:ea typeface="微软雅黑"/>
@@ -3536,6 +3610,338 @@
             <a:ext cx="822960" cy="30480"/>
           </a:xfrm>
           <a:prstGeom prst="rect">
+            <a:avLst/>
+          </a:prstGeom>
+          <a:solidFill>
+            <a:srgbClr val="2E7D6B"/>
+          </a:solidFill>
+          <a:ln>
+            <a:noFill/>
+          </a:ln>
+          <a:effectLst/>
+        </p:spPr>
+        <p:style>
+          <a:lnRef idx="1">
+            <a:schemeClr val="accent1"/>
+          </a:lnRef>
+          <a:fillRef idx="3">
+            <a:schemeClr val="accent1"/>
+          </a:fillRef>
+          <a:effectRef idx="2">
+            <a:schemeClr val="accent1"/>
+          </a:effectRef>
+          <a:fontRef idx="minor">
+            <a:schemeClr val="lt1"/>
+          </a:fontRef>
+        </p:style>
+        <p:txBody>
+          <a:bodyPr rtlCol="0" anchor="ctr"/>
+          <a:lstStyle/>
+          <a:p>
+            <a:pPr algn="ctr"/>
+          </a:p>
+        </p:txBody>
+      </p:sp>
+      <p:sp>
+        <p:nvSpPr>
+          <p:cNvPr id="5" name="TextBox 4"/>
+          <p:cNvSpPr txBox="1"/>
+          <p:nvPr/>
+        </p:nvSpPr>
+        <p:spPr>
+          <a:xfrm>
+            <a:off x="640080" y="1325880"/>
+            <a:ext cx="10058400" cy="640080"/>
+          </a:xfrm>
+          <a:prstGeom prst="rect">
+            <a:avLst/>
+          </a:prstGeom>
+          <a:noFill/>
+        </p:spPr>
+        <p:txBody>
+          <a:bodyPr wrap="square" anchor="t" lIns="0" rIns="0" tIns="0" bIns="0">
+            <a:spAutoFit/>
+          </a:bodyPr>
+          <a:lstStyle/>
+          <a:p>
+            <a:pPr algn="l"/>
+            <a:r>
+              <a:rPr sz="3000" b="1">
+                <a:solidFill>
+                  <a:srgbClr val="1C2A33"/>
+                </a:solidFill>
+                <a:latin typeface="楷体"/>
+                <a:ea typeface="楷体"/>
+                <a:cs typeface="楷体"/>
+              </a:rPr>
+              <a:t>四向核心素养目标</a:t>
+            </a:r>
+          </a:p>
+        </p:txBody>
+      </p:sp>
+      <p:sp>
+        <p:nvSpPr>
+          <p:cNvPr id="6" name="Rounded Rectangle 5"/>
+          <p:cNvSpPr/>
+          <p:nvPr/>
+        </p:nvSpPr>
+        <p:spPr>
+          <a:xfrm>
+            <a:off x="640080" y="2377440"/>
+            <a:ext cx="2453563" cy="3383280"/>
+          </a:xfrm>
+          <a:prstGeom prst="roundRect">
+            <a:avLst/>
+          </a:prstGeom>
+          <a:solidFill>
+            <a:srgbClr val="FFFFFF"/>
+          </a:solidFill>
+          <a:ln w="20320">
+            <a:solidFill>
+              <a:srgbClr val="2E7D6B"/>
+            </a:solidFill>
+          </a:ln>
+          <a:effectLst/>
+        </p:spPr>
+        <p:style>
+          <a:lnRef idx="1">
+            <a:schemeClr val="accent1"/>
+          </a:lnRef>
+          <a:fillRef idx="3">
+            <a:schemeClr val="accent1"/>
+          </a:fillRef>
+          <a:effectRef idx="2">
+            <a:schemeClr val="accent1"/>
+          </a:effectRef>
+          <a:fontRef idx="minor">
+            <a:schemeClr val="lt1"/>
+          </a:fontRef>
+        </p:style>
+        <p:txBody>
+          <a:bodyPr rtlCol="0" anchor="ctr"/>
+          <a:lstStyle/>
+          <a:p>
+            <a:pPr algn="ctr"/>
+          </a:p>
+        </p:txBody>
+      </p:sp>
+      <p:sp>
+        <p:nvSpPr>
+          <p:cNvPr id="7" name="Oval 6"/>
+          <p:cNvSpPr/>
+          <p:nvPr/>
+        </p:nvSpPr>
+        <p:spPr>
+          <a:xfrm>
+            <a:off x="1455381" y="2697480"/>
+            <a:ext cx="822960" cy="822960"/>
+          </a:xfrm>
+          <a:prstGeom prst="ellipse">
+            <a:avLst/>
+          </a:prstGeom>
+          <a:solidFill>
+            <a:srgbClr val="2E7D6B"/>
+          </a:solidFill>
+          <a:ln>
+            <a:noFill/>
+          </a:ln>
+          <a:effectLst/>
+        </p:spPr>
+        <p:style>
+          <a:lnRef idx="1">
+            <a:schemeClr val="accent1"/>
+          </a:lnRef>
+          <a:fillRef idx="3">
+            <a:schemeClr val="accent1"/>
+          </a:fillRef>
+          <a:effectRef idx="2">
+            <a:schemeClr val="accent1"/>
+          </a:effectRef>
+          <a:fontRef idx="minor">
+            <a:schemeClr val="lt1"/>
+          </a:fontRef>
+        </p:style>
+        <p:txBody>
+          <a:bodyPr rtlCol="0" anchor="ctr"/>
+          <a:lstStyle/>
+          <a:p>
+            <a:pPr algn="ctr"/>
+          </a:p>
+        </p:txBody>
+      </p:sp>
+      <p:sp>
+        <p:nvSpPr>
+          <p:cNvPr id="8" name="TextBox 7"/>
+          <p:cNvSpPr txBox="1"/>
+          <p:nvPr/>
+        </p:nvSpPr>
+        <p:spPr>
+          <a:xfrm>
+            <a:off x="1455381" y="2880360"/>
+            <a:ext cx="822960" cy="457200"/>
+          </a:xfrm>
+          <a:prstGeom prst="rect">
+            <a:avLst/>
+          </a:prstGeom>
+          <a:noFill/>
+        </p:spPr>
+        <p:txBody>
+          <a:bodyPr wrap="square" anchor="t" lIns="0" rIns="0" tIns="0" bIns="0">
+            <a:spAutoFit/>
+          </a:bodyPr>
+          <a:lstStyle/>
+          <a:p>
+            <a:pPr algn="ctr"/>
+            <a:r>
+              <a:rPr sz="2400" b="1">
+                <a:solidFill>
+                  <a:srgbClr val="FFFFFF"/>
+                </a:solidFill>
+                <a:latin typeface="楷体"/>
+                <a:ea typeface="楷体"/>
+                <a:cs typeface="楷体"/>
+              </a:rPr>
+              <a:t>1</a:t>
+            </a:r>
+          </a:p>
+        </p:txBody>
+      </p:sp>
+      <p:sp>
+        <p:nvSpPr>
+          <p:cNvPr id="9" name="TextBox 8"/>
+          <p:cNvSpPr txBox="1"/>
+          <p:nvPr/>
+        </p:nvSpPr>
+        <p:spPr>
+          <a:xfrm>
+            <a:off x="822960" y="3749040"/>
+            <a:ext cx="2087803" cy="548640"/>
+          </a:xfrm>
+          <a:prstGeom prst="rect">
+            <a:avLst/>
+          </a:prstGeom>
+          <a:noFill/>
+        </p:spPr>
+        <p:txBody>
+          <a:bodyPr wrap="square" anchor="t" lIns="0" rIns="0" tIns="0" bIns="0">
+            <a:spAutoFit/>
+          </a:bodyPr>
+          <a:lstStyle/>
+          <a:p>
+            <a:pPr algn="ctr"/>
+            <a:r>
+              <a:rPr sz="1700" b="1">
+                <a:solidFill>
+                  <a:srgbClr val="2E7D6B"/>
+                </a:solidFill>
+                <a:latin typeface="微软雅黑"/>
+                <a:ea typeface="微软雅黑"/>
+                <a:cs typeface="微软雅黑"/>
+              </a:rPr>
+              <a:t>生命观念</a:t>
+            </a:r>
+          </a:p>
+        </p:txBody>
+      </p:sp>
+      <p:sp>
+        <p:nvSpPr>
+          <p:cNvPr id="10" name="TextBox 9"/>
+          <p:cNvSpPr txBox="1"/>
+          <p:nvPr/>
+        </p:nvSpPr>
+        <p:spPr>
+          <a:xfrm>
+            <a:off x="841248" y="4343400"/>
+            <a:ext cx="2051227" cy="1280160"/>
+          </a:xfrm>
+          <a:prstGeom prst="rect">
+            <a:avLst/>
+          </a:prstGeom>
+          <a:noFill/>
+        </p:spPr>
+        <p:txBody>
+          <a:bodyPr wrap="square" anchor="t" lIns="0" rIns="0" tIns="0" bIns="0">
+            <a:spAutoFit/>
+          </a:bodyPr>
+          <a:lstStyle/>
+          <a:p>
+            <a:pPr algn="ctr">
+              <a:lnSpc>
+                <a:spcPct val="145000"/>
+              </a:lnSpc>
+            </a:pPr>
+            <a:r>
+              <a:rPr sz="1300" b="0">
+                <a:solidFill>
+                  <a:srgbClr val="1C2A33"/>
+                </a:solidFill>
+                <a:latin typeface="楷体"/>
+                <a:ea typeface="楷体"/>
+                <a:cs typeface="楷体"/>
+              </a:rPr>
+              <a:t>说出主要细胞器的结构与功能，认同结构与功能相适应。</a:t>
+            </a:r>
+          </a:p>
+        </p:txBody>
+      </p:sp>
+      <p:sp>
+        <p:nvSpPr>
+          <p:cNvPr id="11" name="Rounded Rectangle 10"/>
+          <p:cNvSpPr/>
+          <p:nvPr/>
+        </p:nvSpPr>
+        <p:spPr>
+          <a:xfrm>
+            <a:off x="3459403" y="2377440"/>
+            <a:ext cx="2453563" cy="3383280"/>
+          </a:xfrm>
+          <a:prstGeom prst="roundRect">
+            <a:avLst/>
+          </a:prstGeom>
+          <a:solidFill>
+            <a:srgbClr val="FFFFFF"/>
+          </a:solidFill>
+          <a:ln w="20320">
+            <a:solidFill>
+              <a:srgbClr val="B23A2A"/>
+            </a:solidFill>
+          </a:ln>
+          <a:effectLst/>
+        </p:spPr>
+        <p:style>
+          <a:lnRef idx="1">
+            <a:schemeClr val="accent1"/>
+          </a:lnRef>
+          <a:fillRef idx="3">
+            <a:schemeClr val="accent1"/>
+          </a:fillRef>
+          <a:effectRef idx="2">
+            <a:schemeClr val="accent1"/>
+          </a:effectRef>
+          <a:fontRef idx="minor">
+            <a:schemeClr val="lt1"/>
+          </a:fontRef>
+        </p:style>
+        <p:txBody>
+          <a:bodyPr rtlCol="0" anchor="ctr"/>
+          <a:lstStyle/>
+          <a:p>
+            <a:pPr algn="ctr"/>
+          </a:p>
+        </p:txBody>
+      </p:sp>
+      <p:sp>
+        <p:nvSpPr>
+          <p:cNvPr id="12" name="Oval 11"/>
+          <p:cNvSpPr/>
+          <p:nvPr/>
+        </p:nvSpPr>
+        <p:spPr>
+          <a:xfrm>
+            <a:off x="4274705" y="2697480"/>
+            <a:ext cx="822960" cy="822960"/>
+          </a:xfrm>
+          <a:prstGeom prst="ellipse">
             <a:avLst/>
           </a:prstGeom>
           <a:solidFill>
@@ -3570,14 +3976,129 @@
       </p:sp>
       <p:sp>
         <p:nvSpPr>
-          <p:cNvPr id="5" name="Rounded Rectangle 4"/>
+          <p:cNvPr id="13" name="TextBox 12"/>
+          <p:cNvSpPr txBox="1"/>
+          <p:nvPr/>
+        </p:nvSpPr>
+        <p:spPr>
+          <a:xfrm>
+            <a:off x="4274705" y="2880360"/>
+            <a:ext cx="822960" cy="457200"/>
+          </a:xfrm>
+          <a:prstGeom prst="rect">
+            <a:avLst/>
+          </a:prstGeom>
+          <a:noFill/>
+        </p:spPr>
+        <p:txBody>
+          <a:bodyPr wrap="square" anchor="t" lIns="0" rIns="0" tIns="0" bIns="0">
+            <a:spAutoFit/>
+          </a:bodyPr>
+          <a:lstStyle/>
+          <a:p>
+            <a:pPr algn="ctr"/>
+            <a:r>
+              <a:rPr sz="2400" b="1">
+                <a:solidFill>
+                  <a:srgbClr val="FFFFFF"/>
+                </a:solidFill>
+                <a:latin typeface="楷体"/>
+                <a:ea typeface="楷体"/>
+                <a:cs typeface="楷体"/>
+              </a:rPr>
+              <a:t>2</a:t>
+            </a:r>
+          </a:p>
+        </p:txBody>
+      </p:sp>
+      <p:sp>
+        <p:nvSpPr>
+          <p:cNvPr id="14" name="TextBox 13"/>
+          <p:cNvSpPr txBox="1"/>
+          <p:nvPr/>
+        </p:nvSpPr>
+        <p:spPr>
+          <a:xfrm>
+            <a:off x="3642283" y="3749040"/>
+            <a:ext cx="2087803" cy="548640"/>
+          </a:xfrm>
+          <a:prstGeom prst="rect">
+            <a:avLst/>
+          </a:prstGeom>
+          <a:noFill/>
+        </p:spPr>
+        <p:txBody>
+          <a:bodyPr wrap="square" anchor="t" lIns="0" rIns="0" tIns="0" bIns="0">
+            <a:spAutoFit/>
+          </a:bodyPr>
+          <a:lstStyle/>
+          <a:p>
+            <a:pPr algn="ctr"/>
+            <a:r>
+              <a:rPr sz="1700" b="1">
+                <a:solidFill>
+                  <a:srgbClr val="B23A2A"/>
+                </a:solidFill>
+                <a:latin typeface="微软雅黑"/>
+                <a:ea typeface="微软雅黑"/>
+                <a:cs typeface="微软雅黑"/>
+              </a:rPr>
+              <a:t>科学思维</a:t>
+            </a:r>
+          </a:p>
+        </p:txBody>
+      </p:sp>
+      <p:sp>
+        <p:nvSpPr>
+          <p:cNvPr id="15" name="TextBox 14"/>
+          <p:cNvSpPr txBox="1"/>
+          <p:nvPr/>
+        </p:nvSpPr>
+        <p:spPr>
+          <a:xfrm>
+            <a:off x="3660571" y="4343400"/>
+            <a:ext cx="2051227" cy="1280160"/>
+          </a:xfrm>
+          <a:prstGeom prst="rect">
+            <a:avLst/>
+          </a:prstGeom>
+          <a:noFill/>
+        </p:spPr>
+        <p:txBody>
+          <a:bodyPr wrap="square" anchor="t" lIns="0" rIns="0" tIns="0" bIns="0">
+            <a:spAutoFit/>
+          </a:bodyPr>
+          <a:lstStyle/>
+          <a:p>
+            <a:pPr algn="ctr">
+              <a:lnSpc>
+                <a:spcPct val="145000"/>
+              </a:lnSpc>
+            </a:pPr>
+            <a:r>
+              <a:rPr sz="1300" b="0">
+                <a:solidFill>
+                  <a:srgbClr val="1C2A33"/>
+                </a:solidFill>
+                <a:latin typeface="楷体"/>
+                <a:ea typeface="楷体"/>
+                <a:cs typeface="楷体"/>
+              </a:rPr>
+              <a:t>比较线粒体与叶绿体的异同，归纳双层膜细胞器。</a:t>
+            </a:r>
+          </a:p>
+        </p:txBody>
+      </p:sp>
+      <p:sp>
+        <p:nvSpPr>
+          <p:cNvPr id="16" name="Rounded Rectangle 15"/>
           <p:cNvSpPr/>
           <p:nvPr/>
         </p:nvSpPr>
         <p:spPr>
           <a:xfrm>
-            <a:off x="640080" y="1417320"/>
-            <a:ext cx="5349240" cy="2057400"/>
+            <a:off x="6278727" y="2377440"/>
+            <a:ext cx="2453563" cy="3383280"/>
           </a:xfrm>
           <a:prstGeom prst="roundRect">
             <a:avLst/>
@@ -3585,9 +4106,9 @@
           <a:solidFill>
             <a:srgbClr val="FFFFFF"/>
           </a:solidFill>
-          <a:ln w="22860">
+          <a:ln w="20320">
             <a:solidFill>
-              <a:srgbClr val="B23A2A"/>
+              <a:srgbClr val="C8A86B"/>
             </a:solidFill>
           </a:ln>
           <a:effectLst/>
@@ -3616,20 +4137,20 @@
       </p:sp>
       <p:sp>
         <p:nvSpPr>
-          <p:cNvPr id="6" name="Oval 5"/>
+          <p:cNvPr id="17" name="Oval 16"/>
           <p:cNvSpPr/>
           <p:nvPr/>
         </p:nvSpPr>
         <p:spPr>
           <a:xfrm>
-            <a:off x="804672" y="1581912"/>
-            <a:ext cx="457200" cy="457200"/>
+            <a:off x="7094029" y="2697480"/>
+            <a:ext cx="822960" cy="822960"/>
           </a:xfrm>
           <a:prstGeom prst="ellipse">
             <a:avLst/>
           </a:prstGeom>
           <a:solidFill>
-            <a:srgbClr val="B23A2A"/>
+            <a:srgbClr val="C8A86B"/>
           </a:solidFill>
           <a:ln>
             <a:noFill/>
@@ -3660,14 +4181,14 @@
       </p:sp>
       <p:sp>
         <p:nvSpPr>
-          <p:cNvPr id="7" name="TextBox 6"/>
+          <p:cNvPr id="18" name="TextBox 17"/>
           <p:cNvSpPr txBox="1"/>
           <p:nvPr/>
         </p:nvSpPr>
         <p:spPr>
           <a:xfrm>
-            <a:off x="804672" y="1636776"/>
-            <a:ext cx="457200" cy="384048"/>
+            <a:off x="7094029" y="2880360"/>
+            <a:ext cx="822960" cy="457200"/>
           </a:xfrm>
           <a:prstGeom prst="rect">
             <a:avLst/>
@@ -3682,29 +4203,66 @@
           <a:p>
             <a:pPr algn="ctr"/>
             <a:r>
-              <a:rPr sz="1600" b="1">
+              <a:rPr sz="2400" b="1">
                 <a:solidFill>
                   <a:srgbClr val="FFFFFF"/>
+                </a:solidFill>
+                <a:latin typeface="楷体"/>
+                <a:ea typeface="楷体"/>
+                <a:cs typeface="楷体"/>
+              </a:rPr>
+              <a:t>3</a:t>
+            </a:r>
+          </a:p>
+        </p:txBody>
+      </p:sp>
+      <p:sp>
+        <p:nvSpPr>
+          <p:cNvPr id="19" name="TextBox 18"/>
+          <p:cNvSpPr txBox="1"/>
+          <p:nvPr/>
+        </p:nvSpPr>
+        <p:spPr>
+          <a:xfrm>
+            <a:off x="6461607" y="3749040"/>
+            <a:ext cx="2087803" cy="548640"/>
+          </a:xfrm>
+          <a:prstGeom prst="rect">
+            <a:avLst/>
+          </a:prstGeom>
+          <a:noFill/>
+        </p:spPr>
+        <p:txBody>
+          <a:bodyPr wrap="square" anchor="t" lIns="0" rIns="0" tIns="0" bIns="0">
+            <a:spAutoFit/>
+          </a:bodyPr>
+          <a:lstStyle/>
+          <a:p>
+            <a:pPr algn="ctr"/>
+            <a:r>
+              <a:rPr sz="1700" b="1">
+                <a:solidFill>
+                  <a:srgbClr val="C8A86B"/>
                 </a:solidFill>
                 <a:latin typeface="微软雅黑"/>
                 <a:ea typeface="微软雅黑"/>
                 <a:cs typeface="微软雅黑"/>
               </a:rPr>
-              <a:t>1</a:t>
-            </a:r>
-          </a:p>
-        </p:txBody>
-      </p:sp>
-      <p:sp>
-        <p:nvSpPr>
-          <p:cNvPr id="8" name="TextBox 7"/>
+              <a:t>科学探究</a:t>
+            </a:r>
+          </a:p>
+        </p:txBody>
+      </p:sp>
+      <p:sp>
+        <p:nvSpPr>
+          <p:cNvPr id="20" name="TextBox 19"/>
           <p:cNvSpPr txBox="1"/>
           <p:nvPr/>
         </p:nvSpPr>
         <p:spPr>
           <a:xfrm>
-            <a:off x="1371600" y="1527048"/>
-            <a:ext cx="4434840" cy="457200"/>
+            <a:off x="6479895" y="4343400"/>
+            <a:ext cx="2051227" cy="1280160"/>
           </a:xfrm>
           <a:prstGeom prst="rect">
             <a:avLst/>
@@ -3717,54 +4275,13 @@
           </a:bodyPr>
           <a:lstStyle/>
           <a:p>
-            <a:pPr algn="l">
+            <a:pPr algn="ctr">
               <a:lnSpc>
-                <a:spcPct val="110000"/>
+                <a:spcPct val="145000"/>
               </a:lnSpc>
             </a:pPr>
             <a:r>
-              <a:rPr sz="1600" b="1">
-                <a:solidFill>
-                  <a:srgbClr val="1C2A33"/>
-                </a:solidFill>
-                <a:latin typeface="微软雅黑"/>
-                <a:ea typeface="微软雅黑"/>
-                <a:cs typeface="微软雅黑"/>
-              </a:rPr>
-              <a:t>目标</a:t>
-            </a:r>
-          </a:p>
-        </p:txBody>
-      </p:sp>
-      <p:sp>
-        <p:nvSpPr>
-          <p:cNvPr id="9" name="TextBox 8"/>
-          <p:cNvSpPr txBox="1"/>
-          <p:nvPr/>
-        </p:nvSpPr>
-        <p:spPr>
-          <a:xfrm>
-            <a:off x="1371600" y="1965960"/>
-            <a:ext cx="4434840" cy="1417320"/>
-          </a:xfrm>
-          <a:prstGeom prst="rect">
-            <a:avLst/>
-          </a:prstGeom>
-          <a:noFill/>
-        </p:spPr>
-        <p:txBody>
-          <a:bodyPr wrap="square" anchor="t" lIns="0" rIns="0" tIns="0" bIns="0">
-            <a:spAutoFit/>
-          </a:bodyPr>
-          <a:lstStyle/>
-          <a:p>
-            <a:pPr algn="l">
-              <a:lnSpc>
-                <a:spcPct val="128000"/>
-              </a:lnSpc>
-            </a:pPr>
-            <a:r>
-              <a:rPr sz="1400" b="0">
+              <a:rPr sz="1300" b="0">
                 <a:solidFill>
                   <a:srgbClr val="1C2A33"/>
                 </a:solidFill>
@@ -3772,21 +4289,21 @@
                 <a:ea typeface="楷体"/>
                 <a:cs typeface="楷体"/>
               </a:rPr>
-              <a:t>生命观念：说出主要细胞器的结构与功能，认同结构与功能相适应。</a:t>
-            </a:r>
-          </a:p>
-        </p:txBody>
-      </p:sp>
-      <p:sp>
-        <p:nvSpPr>
-          <p:cNvPr id="10" name="Rounded Rectangle 9"/>
+              <a:t>使用高倍镜观察叶绿体和线粒体（健那绿染色）。</a:t>
+            </a:r>
+          </a:p>
+        </p:txBody>
+      </p:sp>
+      <p:sp>
+        <p:nvSpPr>
+          <p:cNvPr id="21" name="Rounded Rectangle 20"/>
           <p:cNvSpPr/>
           <p:nvPr/>
         </p:nvSpPr>
         <p:spPr>
           <a:xfrm>
-            <a:off x="6263640" y="1417320"/>
-            <a:ext cx="5349240" cy="2057400"/>
+            <a:off x="9098051" y="2377440"/>
+            <a:ext cx="2453563" cy="3383280"/>
           </a:xfrm>
           <a:prstGeom prst="roundRect">
             <a:avLst/>
@@ -3794,9 +4311,9 @@
           <a:solidFill>
             <a:srgbClr val="FFFFFF"/>
           </a:solidFill>
-          <a:ln w="22860">
+          <a:ln w="20320">
             <a:solidFill>
-              <a:srgbClr val="B23A2A"/>
+              <a:srgbClr val="6B6258"/>
             </a:solidFill>
           </a:ln>
           <a:effectLst/>
@@ -3825,20 +4342,20 @@
       </p:sp>
       <p:sp>
         <p:nvSpPr>
-          <p:cNvPr id="11" name="Oval 10"/>
+          <p:cNvPr id="22" name="Oval 21"/>
           <p:cNvSpPr/>
           <p:nvPr/>
         </p:nvSpPr>
         <p:spPr>
           <a:xfrm>
-            <a:off x="6428232" y="1581912"/>
-            <a:ext cx="457200" cy="457200"/>
+            <a:off x="9913353" y="2697480"/>
+            <a:ext cx="822960" cy="822960"/>
           </a:xfrm>
           <a:prstGeom prst="ellipse">
             <a:avLst/>
           </a:prstGeom>
           <a:solidFill>
-            <a:srgbClr val="B23A2A"/>
+            <a:srgbClr val="6B6258"/>
           </a:solidFill>
           <a:ln>
             <a:noFill/>
@@ -3869,14 +4386,14 @@
       </p:sp>
       <p:sp>
         <p:nvSpPr>
-          <p:cNvPr id="12" name="TextBox 11"/>
+          <p:cNvPr id="23" name="TextBox 22"/>
           <p:cNvSpPr txBox="1"/>
           <p:nvPr/>
         </p:nvSpPr>
         <p:spPr>
           <a:xfrm>
-            <a:off x="6428232" y="1636776"/>
-            <a:ext cx="457200" cy="384048"/>
+            <a:off x="9913353" y="2880360"/>
+            <a:ext cx="822960" cy="457200"/>
           </a:xfrm>
           <a:prstGeom prst="rect">
             <a:avLst/>
@@ -3891,29 +4408,66 @@
           <a:p>
             <a:pPr algn="ctr"/>
             <a:r>
-              <a:rPr sz="1600" b="1">
+              <a:rPr sz="2400" b="1">
                 <a:solidFill>
                   <a:srgbClr val="FFFFFF"/>
+                </a:solidFill>
+                <a:latin typeface="楷体"/>
+                <a:ea typeface="楷体"/>
+                <a:cs typeface="楷体"/>
+              </a:rPr>
+              <a:t>4</a:t>
+            </a:r>
+          </a:p>
+        </p:txBody>
+      </p:sp>
+      <p:sp>
+        <p:nvSpPr>
+          <p:cNvPr id="24" name="TextBox 23"/>
+          <p:cNvSpPr txBox="1"/>
+          <p:nvPr/>
+        </p:nvSpPr>
+        <p:spPr>
+          <a:xfrm>
+            <a:off x="9280931" y="3749040"/>
+            <a:ext cx="2087803" cy="548640"/>
+          </a:xfrm>
+          <a:prstGeom prst="rect">
+            <a:avLst/>
+          </a:prstGeom>
+          <a:noFill/>
+        </p:spPr>
+        <p:txBody>
+          <a:bodyPr wrap="square" anchor="t" lIns="0" rIns="0" tIns="0" bIns="0">
+            <a:spAutoFit/>
+          </a:bodyPr>
+          <a:lstStyle/>
+          <a:p>
+            <a:pPr algn="ctr"/>
+            <a:r>
+              <a:rPr sz="1700" b="1">
+                <a:solidFill>
+                  <a:srgbClr val="6B6258"/>
                 </a:solidFill>
                 <a:latin typeface="微软雅黑"/>
                 <a:ea typeface="微软雅黑"/>
                 <a:cs typeface="微软雅黑"/>
               </a:rPr>
-              <a:t>2</a:t>
-            </a:r>
-          </a:p>
-        </p:txBody>
-      </p:sp>
-      <p:sp>
-        <p:nvSpPr>
-          <p:cNvPr id="13" name="TextBox 12"/>
+              <a:t>社会责任</a:t>
+            </a:r>
+          </a:p>
+        </p:txBody>
+      </p:sp>
+      <p:sp>
+        <p:nvSpPr>
+          <p:cNvPr id="25" name="TextBox 24"/>
           <p:cNvSpPr txBox="1"/>
           <p:nvPr/>
         </p:nvSpPr>
         <p:spPr>
           <a:xfrm>
-            <a:off x="6995160" y="1527048"/>
-            <a:ext cx="4434840" cy="457200"/>
+            <a:off x="9299219" y="4343400"/>
+            <a:ext cx="2051227" cy="1280160"/>
           </a:xfrm>
           <a:prstGeom prst="rect">
             <a:avLst/>
@@ -3926,54 +4480,13 @@
           </a:bodyPr>
           <a:lstStyle/>
           <a:p>
-            <a:pPr algn="l">
+            <a:pPr algn="ctr">
               <a:lnSpc>
-                <a:spcPct val="110000"/>
+                <a:spcPct val="145000"/>
               </a:lnSpc>
             </a:pPr>
             <a:r>
-              <a:rPr sz="1600" b="1">
-                <a:solidFill>
-                  <a:srgbClr val="1C2A33"/>
-                </a:solidFill>
-                <a:latin typeface="微软雅黑"/>
-                <a:ea typeface="微软雅黑"/>
-                <a:cs typeface="微软雅黑"/>
-              </a:rPr>
-              <a:t>目标</a:t>
-            </a:r>
-          </a:p>
-        </p:txBody>
-      </p:sp>
-      <p:sp>
-        <p:nvSpPr>
-          <p:cNvPr id="14" name="TextBox 13"/>
-          <p:cNvSpPr txBox="1"/>
-          <p:nvPr/>
-        </p:nvSpPr>
-        <p:spPr>
-          <a:xfrm>
-            <a:off x="6995160" y="1965960"/>
-            <a:ext cx="4434840" cy="1417320"/>
-          </a:xfrm>
-          <a:prstGeom prst="rect">
-            <a:avLst/>
-          </a:prstGeom>
-          <a:noFill/>
-        </p:spPr>
-        <p:txBody>
-          <a:bodyPr wrap="square" anchor="t" lIns="0" rIns="0" tIns="0" bIns="0">
-            <a:spAutoFit/>
-          </a:bodyPr>
-          <a:lstStyle/>
-          <a:p>
-            <a:pPr algn="l">
-              <a:lnSpc>
-                <a:spcPct val="128000"/>
-              </a:lnSpc>
-            </a:pPr>
-            <a:r>
-              <a:rPr sz="1400" b="0">
+              <a:rPr sz="1300" b="0">
                 <a:solidFill>
                   <a:srgbClr val="1C2A33"/>
                 </a:solidFill>
@@ -3981,432 +4494,14 @@
                 <a:ea typeface="楷体"/>
                 <a:cs typeface="楷体"/>
               </a:rPr>
-              <a:t>科学思维：比较线粒体与叶绿体的异同，归纳双层膜细胞器。</a:t>
-            </a:r>
-          </a:p>
-        </p:txBody>
-      </p:sp>
-      <p:sp>
-        <p:nvSpPr>
-          <p:cNvPr id="15" name="Rounded Rectangle 14"/>
-          <p:cNvSpPr/>
-          <p:nvPr/>
-        </p:nvSpPr>
-        <p:spPr>
-          <a:xfrm>
-            <a:off x="640080" y="3703320"/>
-            <a:ext cx="5349240" cy="2057400"/>
-          </a:xfrm>
-          <a:prstGeom prst="roundRect">
-            <a:avLst/>
-          </a:prstGeom>
-          <a:solidFill>
-            <a:srgbClr val="FFFFFF"/>
-          </a:solidFill>
-          <a:ln w="22860">
-            <a:solidFill>
-              <a:srgbClr val="B23A2A"/>
-            </a:solidFill>
-          </a:ln>
-          <a:effectLst/>
-        </p:spPr>
-        <p:style>
-          <a:lnRef idx="1">
-            <a:schemeClr val="accent1"/>
-          </a:lnRef>
-          <a:fillRef idx="3">
-            <a:schemeClr val="accent1"/>
-          </a:fillRef>
-          <a:effectRef idx="2">
-            <a:schemeClr val="accent1"/>
-          </a:effectRef>
-          <a:fontRef idx="minor">
-            <a:schemeClr val="lt1"/>
-          </a:fontRef>
-        </p:style>
-        <p:txBody>
-          <a:bodyPr rtlCol="0" anchor="ctr"/>
-          <a:lstStyle/>
-          <a:p>
-            <a:pPr algn="ctr"/>
-          </a:p>
-        </p:txBody>
-      </p:sp>
-      <p:sp>
-        <p:nvSpPr>
-          <p:cNvPr id="16" name="Oval 15"/>
-          <p:cNvSpPr/>
-          <p:nvPr/>
-        </p:nvSpPr>
-        <p:spPr>
-          <a:xfrm>
-            <a:off x="804672" y="3867912"/>
-            <a:ext cx="457200" cy="457200"/>
-          </a:xfrm>
-          <a:prstGeom prst="ellipse">
-            <a:avLst/>
-          </a:prstGeom>
-          <a:solidFill>
-            <a:srgbClr val="B23A2A"/>
-          </a:solidFill>
-          <a:ln>
-            <a:noFill/>
-          </a:ln>
-          <a:effectLst/>
-        </p:spPr>
-        <p:style>
-          <a:lnRef idx="1">
-            <a:schemeClr val="accent1"/>
-          </a:lnRef>
-          <a:fillRef idx="3">
-            <a:schemeClr val="accent1"/>
-          </a:fillRef>
-          <a:effectRef idx="2">
-            <a:schemeClr val="accent1"/>
-          </a:effectRef>
-          <a:fontRef idx="minor">
-            <a:schemeClr val="lt1"/>
-          </a:fontRef>
-        </p:style>
-        <p:txBody>
-          <a:bodyPr rtlCol="0" anchor="ctr"/>
-          <a:lstStyle/>
-          <a:p>
-            <a:pPr algn="ctr"/>
-          </a:p>
-        </p:txBody>
-      </p:sp>
-      <p:sp>
-        <p:nvSpPr>
-          <p:cNvPr id="17" name="TextBox 16"/>
-          <p:cNvSpPr txBox="1"/>
-          <p:nvPr/>
-        </p:nvSpPr>
-        <p:spPr>
-          <a:xfrm>
-            <a:off x="804672" y="3922776"/>
-            <a:ext cx="457200" cy="384048"/>
-          </a:xfrm>
-          <a:prstGeom prst="rect">
-            <a:avLst/>
-          </a:prstGeom>
-          <a:noFill/>
-        </p:spPr>
-        <p:txBody>
-          <a:bodyPr wrap="square" anchor="t" lIns="0" rIns="0" tIns="0" bIns="0">
-            <a:spAutoFit/>
-          </a:bodyPr>
-          <a:lstStyle/>
-          <a:p>
-            <a:pPr algn="ctr"/>
-            <a:r>
-              <a:rPr sz="1600" b="1">
-                <a:solidFill>
-                  <a:srgbClr val="FFFFFF"/>
-                </a:solidFill>
-                <a:latin typeface="微软雅黑"/>
-                <a:ea typeface="微软雅黑"/>
-                <a:cs typeface="微软雅黑"/>
-              </a:rPr>
-              <a:t>3</a:t>
-            </a:r>
-          </a:p>
-        </p:txBody>
-      </p:sp>
-      <p:sp>
-        <p:nvSpPr>
-          <p:cNvPr id="18" name="TextBox 17"/>
-          <p:cNvSpPr txBox="1"/>
-          <p:nvPr/>
-        </p:nvSpPr>
-        <p:spPr>
-          <a:xfrm>
-            <a:off x="1371600" y="3813048"/>
-            <a:ext cx="4434840" cy="457200"/>
-          </a:xfrm>
-          <a:prstGeom prst="rect">
-            <a:avLst/>
-          </a:prstGeom>
-          <a:noFill/>
-        </p:spPr>
-        <p:txBody>
-          <a:bodyPr wrap="square" anchor="t" lIns="0" rIns="0" tIns="0" bIns="0">
-            <a:spAutoFit/>
-          </a:bodyPr>
-          <a:lstStyle/>
-          <a:p>
-            <a:pPr algn="l">
-              <a:lnSpc>
-                <a:spcPct val="110000"/>
-              </a:lnSpc>
-            </a:pPr>
-            <a:r>
-              <a:rPr sz="1600" b="1">
-                <a:solidFill>
-                  <a:srgbClr val="1C2A33"/>
-                </a:solidFill>
-                <a:latin typeface="微软雅黑"/>
-                <a:ea typeface="微软雅黑"/>
-                <a:cs typeface="微软雅黑"/>
-              </a:rPr>
-              <a:t>目标</a:t>
-            </a:r>
-          </a:p>
-        </p:txBody>
-      </p:sp>
-      <p:sp>
-        <p:nvSpPr>
-          <p:cNvPr id="19" name="TextBox 18"/>
-          <p:cNvSpPr txBox="1"/>
-          <p:nvPr/>
-        </p:nvSpPr>
-        <p:spPr>
-          <a:xfrm>
-            <a:off x="1371600" y="4251960"/>
-            <a:ext cx="4434840" cy="1417320"/>
-          </a:xfrm>
-          <a:prstGeom prst="rect">
-            <a:avLst/>
-          </a:prstGeom>
-          <a:noFill/>
-        </p:spPr>
-        <p:txBody>
-          <a:bodyPr wrap="square" anchor="t" lIns="0" rIns="0" tIns="0" bIns="0">
-            <a:spAutoFit/>
-          </a:bodyPr>
-          <a:lstStyle/>
-          <a:p>
-            <a:pPr algn="l">
-              <a:lnSpc>
-                <a:spcPct val="128000"/>
-              </a:lnSpc>
-            </a:pPr>
-            <a:r>
-              <a:rPr sz="1400" b="0">
-                <a:solidFill>
-                  <a:srgbClr val="1C2A33"/>
-                </a:solidFill>
-                <a:latin typeface="楷体"/>
-                <a:ea typeface="楷体"/>
-                <a:cs typeface="楷体"/>
-              </a:rPr>
-              <a:t>科学探究：使用高倍镜观察叶绿体和线粒体（健那绿染色）。</a:t>
-            </a:r>
-          </a:p>
-        </p:txBody>
-      </p:sp>
-      <p:sp>
-        <p:nvSpPr>
-          <p:cNvPr id="20" name="Rounded Rectangle 19"/>
-          <p:cNvSpPr/>
-          <p:nvPr/>
-        </p:nvSpPr>
-        <p:spPr>
-          <a:xfrm>
-            <a:off x="6263640" y="3703320"/>
-            <a:ext cx="5349240" cy="2057400"/>
-          </a:xfrm>
-          <a:prstGeom prst="roundRect">
-            <a:avLst/>
-          </a:prstGeom>
-          <a:solidFill>
-            <a:srgbClr val="FFFFFF"/>
-          </a:solidFill>
-          <a:ln w="22860">
-            <a:solidFill>
-              <a:srgbClr val="B23A2A"/>
-            </a:solidFill>
-          </a:ln>
-          <a:effectLst/>
-        </p:spPr>
-        <p:style>
-          <a:lnRef idx="1">
-            <a:schemeClr val="accent1"/>
-          </a:lnRef>
-          <a:fillRef idx="3">
-            <a:schemeClr val="accent1"/>
-          </a:fillRef>
-          <a:effectRef idx="2">
-            <a:schemeClr val="accent1"/>
-          </a:effectRef>
-          <a:fontRef idx="minor">
-            <a:schemeClr val="lt1"/>
-          </a:fontRef>
-        </p:style>
-        <p:txBody>
-          <a:bodyPr rtlCol="0" anchor="ctr"/>
-          <a:lstStyle/>
-          <a:p>
-            <a:pPr algn="ctr"/>
-          </a:p>
-        </p:txBody>
-      </p:sp>
-      <p:sp>
-        <p:nvSpPr>
-          <p:cNvPr id="21" name="Oval 20"/>
-          <p:cNvSpPr/>
-          <p:nvPr/>
-        </p:nvSpPr>
-        <p:spPr>
-          <a:xfrm>
-            <a:off x="6428232" y="3867912"/>
-            <a:ext cx="457200" cy="457200"/>
-          </a:xfrm>
-          <a:prstGeom prst="ellipse">
-            <a:avLst/>
-          </a:prstGeom>
-          <a:solidFill>
-            <a:srgbClr val="B23A2A"/>
-          </a:solidFill>
-          <a:ln>
-            <a:noFill/>
-          </a:ln>
-          <a:effectLst/>
-        </p:spPr>
-        <p:style>
-          <a:lnRef idx="1">
-            <a:schemeClr val="accent1"/>
-          </a:lnRef>
-          <a:fillRef idx="3">
-            <a:schemeClr val="accent1"/>
-          </a:fillRef>
-          <a:effectRef idx="2">
-            <a:schemeClr val="accent1"/>
-          </a:effectRef>
-          <a:fontRef idx="minor">
-            <a:schemeClr val="lt1"/>
-          </a:fontRef>
-        </p:style>
-        <p:txBody>
-          <a:bodyPr rtlCol="0" anchor="ctr"/>
-          <a:lstStyle/>
-          <a:p>
-            <a:pPr algn="ctr"/>
-          </a:p>
-        </p:txBody>
-      </p:sp>
-      <p:sp>
-        <p:nvSpPr>
-          <p:cNvPr id="22" name="TextBox 21"/>
-          <p:cNvSpPr txBox="1"/>
-          <p:nvPr/>
-        </p:nvSpPr>
-        <p:spPr>
-          <a:xfrm>
-            <a:off x="6428232" y="3922776"/>
-            <a:ext cx="457200" cy="384048"/>
-          </a:xfrm>
-          <a:prstGeom prst="rect">
-            <a:avLst/>
-          </a:prstGeom>
-          <a:noFill/>
-        </p:spPr>
-        <p:txBody>
-          <a:bodyPr wrap="square" anchor="t" lIns="0" rIns="0" tIns="0" bIns="0">
-            <a:spAutoFit/>
-          </a:bodyPr>
-          <a:lstStyle/>
-          <a:p>
-            <a:pPr algn="ctr"/>
-            <a:r>
-              <a:rPr sz="1600" b="1">
-                <a:solidFill>
-                  <a:srgbClr val="FFFFFF"/>
-                </a:solidFill>
-                <a:latin typeface="微软雅黑"/>
-                <a:ea typeface="微软雅黑"/>
-                <a:cs typeface="微软雅黑"/>
-              </a:rPr>
-              <a:t>4</a:t>
-            </a:r>
-          </a:p>
-        </p:txBody>
-      </p:sp>
-      <p:sp>
-        <p:nvSpPr>
-          <p:cNvPr id="23" name="TextBox 22"/>
-          <p:cNvSpPr txBox="1"/>
-          <p:nvPr/>
-        </p:nvSpPr>
-        <p:spPr>
-          <a:xfrm>
-            <a:off x="6995160" y="3813048"/>
-            <a:ext cx="4434840" cy="457200"/>
-          </a:xfrm>
-          <a:prstGeom prst="rect">
-            <a:avLst/>
-          </a:prstGeom>
-          <a:noFill/>
-        </p:spPr>
-        <p:txBody>
-          <a:bodyPr wrap="square" anchor="t" lIns="0" rIns="0" tIns="0" bIns="0">
-            <a:spAutoFit/>
-          </a:bodyPr>
-          <a:lstStyle/>
-          <a:p>
-            <a:pPr algn="l">
-              <a:lnSpc>
-                <a:spcPct val="110000"/>
-              </a:lnSpc>
-            </a:pPr>
-            <a:r>
-              <a:rPr sz="1600" b="1">
-                <a:solidFill>
-                  <a:srgbClr val="1C2A33"/>
-                </a:solidFill>
-                <a:latin typeface="微软雅黑"/>
-                <a:ea typeface="微软雅黑"/>
-                <a:cs typeface="微软雅黑"/>
-              </a:rPr>
-              <a:t>目标</a:t>
-            </a:r>
-          </a:p>
-        </p:txBody>
-      </p:sp>
-      <p:sp>
-        <p:nvSpPr>
-          <p:cNvPr id="24" name="TextBox 23"/>
-          <p:cNvSpPr txBox="1"/>
-          <p:nvPr/>
-        </p:nvSpPr>
-        <p:spPr>
-          <a:xfrm>
-            <a:off x="6995160" y="4251960"/>
-            <a:ext cx="4434840" cy="1417320"/>
-          </a:xfrm>
-          <a:prstGeom prst="rect">
-            <a:avLst/>
-          </a:prstGeom>
-          <a:noFill/>
-        </p:spPr>
-        <p:txBody>
-          <a:bodyPr wrap="square" anchor="t" lIns="0" rIns="0" tIns="0" bIns="0">
-            <a:spAutoFit/>
-          </a:bodyPr>
-          <a:lstStyle/>
-          <a:p>
-            <a:pPr algn="l">
-              <a:lnSpc>
-                <a:spcPct val="128000"/>
-              </a:lnSpc>
-            </a:pPr>
-            <a:r>
-              <a:rPr sz="1400" b="0">
-                <a:solidFill>
-                  <a:srgbClr val="1C2A33"/>
-                </a:solidFill>
-                <a:latin typeface="楷体"/>
-                <a:ea typeface="楷体"/>
-                <a:cs typeface="楷体"/>
-              </a:rPr>
-              <a:t>社会责任：关注细胞器异常导致的疾病（如线粒体病）。</a:t>
-            </a:r>
-          </a:p>
-        </p:txBody>
-      </p:sp>
-      <p:sp>
-        <p:nvSpPr>
-          <p:cNvPr id="25" name="TextBox 24"/>
+              <a:t>关注细胞器异常导致的疾病（如线粒体病）。</a:t>
+            </a:r>
+          </a:p>
+        </p:txBody>
+      </p:sp>
+      <p:sp>
+        <p:nvSpPr>
+          <p:cNvPr id="26" name="TextBox 25"/>
           <p:cNvSpPr txBox="1"/>
           <p:nvPr/>
         </p:nvSpPr>
@@ -4539,7 +4634,7 @@
                 <a:ea typeface="微软雅黑"/>
                 <a:cs typeface="微软雅黑"/>
               </a:rPr>
-              <a:t>课文背景</a:t>
+              <a:t>背景 · 权威调研</a:t>
             </a:r>
           </a:p>
         </p:txBody>
@@ -4596,8 +4691,189 @@
         </p:nvSpPr>
         <p:spPr>
           <a:xfrm>
-            <a:off x="640080" y="1508760"/>
-            <a:ext cx="6766560" cy="4572000"/>
+            <a:off x="640080" y="1783080"/>
+            <a:ext cx="5227167" cy="548640"/>
+          </a:xfrm>
+          <a:prstGeom prst="rect">
+            <a:avLst/>
+          </a:prstGeom>
+          <a:noFill/>
+        </p:spPr>
+        <p:txBody>
+          <a:bodyPr wrap="square" anchor="t" lIns="0" rIns="0" tIns="0" bIns="0">
+            <a:spAutoFit/>
+          </a:bodyPr>
+          <a:lstStyle/>
+          <a:p>
+            <a:pPr algn="l">
+              <a:spcAft>
+                <a:spcPts val="600"/>
+              </a:spcAft>
+            </a:pPr>
+            <a:r>
+              <a:rPr sz="2000" b="1">
+                <a:solidFill>
+                  <a:srgbClr val="2E7D6B"/>
+                </a:solidFill>
+                <a:latin typeface="楷体"/>
+                <a:ea typeface="楷体"/>
+                <a:cs typeface="楷体"/>
+              </a:rPr>
+              <a:t>课题背景</a:t>
+            </a:r>
+          </a:p>
+        </p:txBody>
+      </p:sp>
+      <p:sp>
+        <p:nvSpPr>
+          <p:cNvPr id="6" name="TextBox 5"/>
+          <p:cNvSpPr txBox="1"/>
+          <p:nvPr/>
+        </p:nvSpPr>
+        <p:spPr>
+          <a:xfrm>
+            <a:off x="640080" y="2423160"/>
+            <a:ext cx="5227167" cy="4206240"/>
+          </a:xfrm>
+          <a:prstGeom prst="rect">
+            <a:avLst/>
+          </a:prstGeom>
+          <a:noFill/>
+        </p:spPr>
+        <p:txBody>
+          <a:bodyPr wrap="square" anchor="t" lIns="0" rIns="0" tIns="0" bIns="0">
+            <a:spAutoFit/>
+          </a:bodyPr>
+          <a:lstStyle/>
+          <a:p>
+            <a:pPr algn="l">
+              <a:lnSpc>
+                <a:spcPct val="155000"/>
+              </a:lnSpc>
+              <a:spcAft>
+                <a:spcPts val="1000"/>
+              </a:spcAft>
+            </a:pPr>
+            <a:r>
+              <a:rPr sz="1450" b="0">
+                <a:solidFill>
+                  <a:srgbClr val="1C2A33"/>
+                </a:solidFill>
+                <a:latin typeface="楷体"/>
+                <a:ea typeface="楷体"/>
+                <a:cs typeface="楷体"/>
+              </a:rPr>
+              <a:t>介绍主要细胞器的结构与功能：线粒体（有氧呼吸主场所）、叶绿体（光合）、内质网（加工运输）、高尔基体（加工分类）、核糖体（合成蛋白）、溶酶体（水解）、液泡、中心体。区分动植物细胞器差异。</a:t>
+            </a:r>
+          </a:p>
+          <a:p>
+            <a:pPr algn="l">
+              <a:lnSpc>
+                <a:spcPct val="150000"/>
+              </a:lnSpc>
+            </a:pPr>
+            <a:r>
+              <a:rPr sz="1350" b="0">
+                <a:solidFill>
+                  <a:srgbClr val="6B6258"/>
+                </a:solidFill>
+                <a:latin typeface="楷体"/>
+                <a:ea typeface="楷体"/>
+                <a:cs typeface="楷体"/>
+              </a:rPr>
+              <a:t>本课属细胞的基本结构，承接本单元前序知识，为后续内容打基础。</a:t>
+            </a:r>
+          </a:p>
+        </p:txBody>
+      </p:sp>
+      <p:sp>
+        <p:nvSpPr>
+          <p:cNvPr id="7" name="Rounded Rectangle 6"/>
+          <p:cNvSpPr/>
+          <p:nvPr/>
+        </p:nvSpPr>
+        <p:spPr>
+          <a:xfrm>
+            <a:off x="6324447" y="1783080"/>
+            <a:ext cx="5227167" cy="3931920"/>
+          </a:xfrm>
+          <a:prstGeom prst="roundRect">
+            <a:avLst/>
+          </a:prstGeom>
+          <a:solidFill>
+            <a:srgbClr val="1C2A33"/>
+          </a:solidFill>
+          <a:effectLst/>
+        </p:spPr>
+        <p:style>
+          <a:lnRef idx="1">
+            <a:schemeClr val="accent1"/>
+          </a:lnRef>
+          <a:fillRef idx="3">
+            <a:schemeClr val="accent1"/>
+          </a:fillRef>
+          <a:effectRef idx="2">
+            <a:schemeClr val="accent1"/>
+          </a:effectRef>
+          <a:fontRef idx="minor">
+            <a:schemeClr val="lt1"/>
+          </a:fontRef>
+        </p:style>
+        <p:txBody>
+          <a:bodyPr rtlCol="0" anchor="ctr"/>
+          <a:lstStyle/>
+          <a:p>
+            <a:pPr algn="ctr"/>
+          </a:p>
+        </p:txBody>
+      </p:sp>
+      <p:sp>
+        <p:nvSpPr>
+          <p:cNvPr id="8" name="TextBox 7"/>
+          <p:cNvSpPr txBox="1"/>
+          <p:nvPr/>
+        </p:nvSpPr>
+        <p:spPr>
+          <a:xfrm>
+            <a:off x="6598767" y="1965960"/>
+            <a:ext cx="4678527" cy="457200"/>
+          </a:xfrm>
+          <a:prstGeom prst="rect">
+            <a:avLst/>
+          </a:prstGeom>
+          <a:noFill/>
+        </p:spPr>
+        <p:txBody>
+          <a:bodyPr wrap="square" anchor="t" lIns="0" rIns="0" tIns="0" bIns="0">
+            <a:spAutoFit/>
+          </a:bodyPr>
+          <a:lstStyle/>
+          <a:p>
+            <a:pPr algn="l"/>
+            <a:r>
+              <a:rPr sz="1700" b="1">
+                <a:solidFill>
+                  <a:srgbClr val="C8A86B"/>
+                </a:solidFill>
+                <a:latin typeface="楷体"/>
+                <a:ea typeface="楷体"/>
+                <a:cs typeface="楷体"/>
+              </a:rPr>
+              <a:t>权威调研来源</a:t>
+            </a:r>
+          </a:p>
+        </p:txBody>
+      </p:sp>
+      <p:sp>
+        <p:nvSpPr>
+          <p:cNvPr id="9" name="TextBox 8"/>
+          <p:cNvSpPr txBox="1"/>
+          <p:nvPr/>
+        </p:nvSpPr>
+        <p:spPr>
+          <a:xfrm>
+            <a:off x="6598767" y="2514599"/>
+            <a:ext cx="4678527" cy="3017520"/>
           </a:xfrm>
           <a:prstGeom prst="rect">
             <a:avLst/>
@@ -4615,88 +4891,68 @@
                 <a:spcPct val="150000"/>
               </a:lnSpc>
               <a:spcAft>
-                <a:spcPts val="600"/>
+                <a:spcPts val="800"/>
               </a:spcAft>
             </a:pPr>
             <a:r>
-              <a:rPr sz="1600" b="0">
-                <a:solidFill>
-                  <a:srgbClr val="1C2A33"/>
+              <a:rPr sz="1300" b="0">
+                <a:solidFill>
+                  <a:srgbClr val="FFFFFF"/>
                 </a:solidFill>
                 <a:latin typeface="楷体"/>
                 <a:ea typeface="楷体"/>
                 <a:cs typeface="楷体"/>
               </a:rPr>
-              <a:t>介绍主要细胞器的结构与功能：线粒体（有氧呼吸主场所）、叶绿体（光合）、内质网（加工运输）、高尔基体（加工分类）、核糖体（合成蛋白）、溶酶体（水解）、液泡、中心体。区分动植物细胞器差异。</a:t>
-            </a:r>
-          </a:p>
-        </p:txBody>
-      </p:sp>
-      <p:pic>
-        <p:nvPicPr>
-          <p:cNvPr id="6" name="Picture 5" descr="ricefield.jpg"/>
-          <p:cNvPicPr>
-            <a:picLocks noChangeAspect="1"/>
-          </p:cNvPicPr>
-          <p:nvPr/>
-        </p:nvPicPr>
-        <p:blipFill>
-          <a:blip r:embed="rId2"/>
-          <a:srcRect l="23066" r="23066"/>
-          <a:stretch>
-            <a:fillRect/>
-          </a:stretch>
-        </p:blipFill>
-        <p:spPr>
-          <a:xfrm>
-            <a:off x="8046720" y="1508760"/>
-            <a:ext cx="4114800" cy="3108960"/>
-          </a:xfrm>
-          <a:prstGeom prst="rect">
-            <a:avLst/>
-          </a:prstGeom>
-        </p:spPr>
-      </p:pic>
-      <p:sp>
-        <p:nvSpPr>
-          <p:cNvPr id="7" name="TextBox 6"/>
-          <p:cNvSpPr txBox="1"/>
-          <p:nvPr/>
-        </p:nvSpPr>
-        <p:spPr>
-          <a:xfrm>
-            <a:off x="8046720" y="4663440"/>
-            <a:ext cx="4114800" cy="365760"/>
-          </a:xfrm>
-          <a:prstGeom prst="rect">
-            <a:avLst/>
-          </a:prstGeom>
-          <a:noFill/>
-        </p:spPr>
-        <p:txBody>
-          <a:bodyPr wrap="square" anchor="t" lIns="0" rIns="0" tIns="0" bIns="0">
-            <a:spAutoFit/>
-          </a:bodyPr>
-          <a:lstStyle/>
-          <a:p>
-            <a:pPr algn="ctr"/>
-            <a:r>
-              <a:rPr sz="1100" b="0">
-                <a:solidFill>
-                  <a:srgbClr val="6B6258"/>
+              <a:t>· 人民教育出版社《生物学·必修1·分子与细胞》第3章第2节 细胞器之间的分工（人教2019版）</a:t>
+            </a:r>
+          </a:p>
+          <a:p>
+            <a:pPr algn="l">
+              <a:lnSpc>
+                <a:spcPct val="150000"/>
+              </a:lnSpc>
+              <a:spcAft>
+                <a:spcPts val="800"/>
+              </a:spcAft>
+            </a:pPr>
+            <a:r>
+              <a:rPr sz="1300" b="0">
+                <a:solidFill>
+                  <a:srgbClr val="FFFFFF"/>
+                </a:solidFill>
+                <a:latin typeface="楷体"/>
+                <a:ea typeface="楷体"/>
+                <a:cs typeface="楷体"/>
+              </a:rPr>
+              <a:t>· 21世纪教育网 学案：线粒体/叶绿体/内质网/高尔基体/核糖体/溶酶体/中心体/细胞骨架（zy.21cnjy.com/13471038）</a:t>
+            </a:r>
+          </a:p>
+          <a:p>
+            <a:pPr algn="l">
+              <a:lnSpc>
+                <a:spcPct val="140000"/>
+              </a:lnSpc>
+              <a:spcBef>
+                <a:spcPts val="600"/>
+              </a:spcBef>
+            </a:pPr>
+            <a:r>
+              <a:rPr sz="1150" b="0">
+                <a:solidFill>
+                  <a:srgbClr val="E7DFD2"/>
                 </a:solidFill>
                 <a:latin typeface="微软雅黑"/>
                 <a:ea typeface="微软雅黑"/>
                 <a:cs typeface="微软雅黑"/>
               </a:rPr>
-              <a:t>资料图（自由授权，复用 ricefield.jpg）</a:t>
-            </a:r>
-          </a:p>
-        </p:txBody>
-      </p:sp>
-      <p:sp>
-        <p:nvSpPr>
-          <p:cNvPr id="8" name="TextBox 7"/>
+              <a:t>配图说明：本课件未使用无关配图，采用学科色块呈现。</a:t>
+            </a:r>
+          </a:p>
+        </p:txBody>
+      </p:sp>
+      <p:sp>
+        <p:nvSpPr>
+          <p:cNvPr id="10" name="TextBox 9"/>
           <p:cNvSpPr txBox="1"/>
           <p:nvPr/>
         </p:nvSpPr>
@@ -4823,13 +5079,13 @@
             <a:r>
               <a:rPr sz="1300" b="1">
                 <a:solidFill>
-                  <a:srgbClr val="B23A2A"/>
+                  <a:srgbClr val="2E7D6B"/>
                 </a:solidFill>
                 <a:latin typeface="微软雅黑"/>
                 <a:ea typeface="微软雅黑"/>
                 <a:cs typeface="微软雅黑"/>
               </a:rPr>
-              <a:t>学习重点</a:t>
+              <a:t>重点</a:t>
             </a:r>
           </a:p>
         </p:txBody>
@@ -4844,6 +5100,301 @@
           <a:xfrm>
             <a:off x="640080" y="1097280"/>
             <a:ext cx="822960" cy="30480"/>
+          </a:xfrm>
+          <a:prstGeom prst="rect">
+            <a:avLst/>
+          </a:prstGeom>
+          <a:solidFill>
+            <a:srgbClr val="2E7D6B"/>
+          </a:solidFill>
+          <a:ln>
+            <a:noFill/>
+          </a:ln>
+          <a:effectLst/>
+        </p:spPr>
+        <p:style>
+          <a:lnRef idx="1">
+            <a:schemeClr val="accent1"/>
+          </a:lnRef>
+          <a:fillRef idx="3">
+            <a:schemeClr val="accent1"/>
+          </a:fillRef>
+          <a:effectRef idx="2">
+            <a:schemeClr val="accent1"/>
+          </a:effectRef>
+          <a:fontRef idx="minor">
+            <a:schemeClr val="lt1"/>
+          </a:fontRef>
+        </p:style>
+        <p:txBody>
+          <a:bodyPr rtlCol="0" anchor="ctr"/>
+          <a:lstStyle/>
+          <a:p>
+            <a:pPr algn="ctr"/>
+          </a:p>
+        </p:txBody>
+      </p:sp>
+      <p:sp>
+        <p:nvSpPr>
+          <p:cNvPr id="5" name="TextBox 4"/>
+          <p:cNvSpPr txBox="1"/>
+          <p:nvPr/>
+        </p:nvSpPr>
+        <p:spPr>
+          <a:xfrm>
+            <a:off x="640080" y="1325880"/>
+            <a:ext cx="10515600" cy="548640"/>
+          </a:xfrm>
+          <a:prstGeom prst="rect">
+            <a:avLst/>
+          </a:prstGeom>
+          <a:noFill/>
+        </p:spPr>
+        <p:txBody>
+          <a:bodyPr wrap="square" anchor="t" lIns="0" rIns="0" tIns="0" bIns="0">
+            <a:spAutoFit/>
+          </a:bodyPr>
+          <a:lstStyle/>
+          <a:p>
+            <a:pPr algn="l"/>
+            <a:r>
+              <a:rPr sz="2600" b="1">
+                <a:solidFill>
+                  <a:srgbClr val="1C2A33"/>
+                </a:solidFill>
+                <a:latin typeface="楷体"/>
+                <a:ea typeface="楷体"/>
+                <a:cs typeface="楷体"/>
+              </a:rPr>
+              <a:t>本课需要掌握的重点</a:t>
+            </a:r>
+          </a:p>
+        </p:txBody>
+      </p:sp>
+      <p:sp>
+        <p:nvSpPr>
+          <p:cNvPr id="6" name="Rounded Rectangle 5"/>
+          <p:cNvSpPr/>
+          <p:nvPr/>
+        </p:nvSpPr>
+        <p:spPr>
+          <a:xfrm>
+            <a:off x="640080" y="2194560"/>
+            <a:ext cx="2453563" cy="3931920"/>
+          </a:xfrm>
+          <a:prstGeom prst="roundRect">
+            <a:avLst/>
+          </a:prstGeom>
+          <a:solidFill>
+            <a:srgbClr val="FFFFFF"/>
+          </a:solidFill>
+          <a:ln w="20320">
+            <a:solidFill>
+              <a:srgbClr val="2E7D6B"/>
+            </a:solidFill>
+          </a:ln>
+          <a:effectLst/>
+        </p:spPr>
+        <p:style>
+          <a:lnRef idx="1">
+            <a:schemeClr val="accent1"/>
+          </a:lnRef>
+          <a:fillRef idx="3">
+            <a:schemeClr val="accent1"/>
+          </a:fillRef>
+          <a:effectRef idx="2">
+            <a:schemeClr val="accent1"/>
+          </a:effectRef>
+          <a:fontRef idx="minor">
+            <a:schemeClr val="lt1"/>
+          </a:fontRef>
+        </p:style>
+        <p:txBody>
+          <a:bodyPr rtlCol="0" anchor="ctr"/>
+          <a:lstStyle/>
+          <a:p>
+            <a:pPr algn="ctr"/>
+          </a:p>
+        </p:txBody>
+      </p:sp>
+      <p:sp>
+        <p:nvSpPr>
+          <p:cNvPr id="7" name="Rectangle 6"/>
+          <p:cNvSpPr/>
+          <p:nvPr/>
+        </p:nvSpPr>
+        <p:spPr>
+          <a:xfrm>
+            <a:off x="640080" y="2194560"/>
+            <a:ext cx="2453563" cy="640080"/>
+          </a:xfrm>
+          <a:prstGeom prst="rect">
+            <a:avLst/>
+          </a:prstGeom>
+          <a:solidFill>
+            <a:srgbClr val="2E7D6B"/>
+          </a:solidFill>
+          <a:ln>
+            <a:noFill/>
+          </a:ln>
+          <a:effectLst/>
+        </p:spPr>
+        <p:style>
+          <a:lnRef idx="1">
+            <a:schemeClr val="accent1"/>
+          </a:lnRef>
+          <a:fillRef idx="3">
+            <a:schemeClr val="accent1"/>
+          </a:fillRef>
+          <a:effectRef idx="2">
+            <a:schemeClr val="accent1"/>
+          </a:effectRef>
+          <a:fontRef idx="minor">
+            <a:schemeClr val="lt1"/>
+          </a:fontRef>
+        </p:style>
+        <p:txBody>
+          <a:bodyPr rtlCol="0" anchor="ctr"/>
+          <a:lstStyle/>
+          <a:p>
+            <a:pPr algn="ctr"/>
+          </a:p>
+        </p:txBody>
+      </p:sp>
+      <p:sp>
+        <p:nvSpPr>
+          <p:cNvPr id="8" name="TextBox 7"/>
+          <p:cNvSpPr txBox="1"/>
+          <p:nvPr/>
+        </p:nvSpPr>
+        <p:spPr>
+          <a:xfrm>
+            <a:off x="731520" y="2322576"/>
+            <a:ext cx="2270683" cy="457200"/>
+          </a:xfrm>
+          <a:prstGeom prst="rect">
+            <a:avLst/>
+          </a:prstGeom>
+          <a:noFill/>
+        </p:spPr>
+        <p:txBody>
+          <a:bodyPr wrap="square" anchor="t" lIns="0" rIns="0" tIns="0" bIns="0">
+            <a:spAutoFit/>
+          </a:bodyPr>
+          <a:lstStyle/>
+          <a:p>
+            <a:pPr algn="ctr"/>
+            <a:r>
+              <a:rPr sz="1400" b="1">
+                <a:solidFill>
+                  <a:srgbClr val="FFFFFF"/>
+                </a:solidFill>
+                <a:latin typeface="微软雅黑"/>
+                <a:ea typeface="微软雅黑"/>
+                <a:cs typeface="微软雅黑"/>
+              </a:rPr>
+              <a:t>双层膜</a:t>
+            </a:r>
+          </a:p>
+        </p:txBody>
+      </p:sp>
+      <p:sp>
+        <p:nvSpPr>
+          <p:cNvPr id="9" name="TextBox 8"/>
+          <p:cNvSpPr txBox="1"/>
+          <p:nvPr/>
+        </p:nvSpPr>
+        <p:spPr>
+          <a:xfrm>
+            <a:off x="914400" y="3017520"/>
+            <a:ext cx="1904923" cy="3017520"/>
+          </a:xfrm>
+          <a:prstGeom prst="rect">
+            <a:avLst/>
+          </a:prstGeom>
+          <a:noFill/>
+        </p:spPr>
+        <p:txBody>
+          <a:bodyPr wrap="square" anchor="t" lIns="0" rIns="0" tIns="0" bIns="0">
+            <a:spAutoFit/>
+          </a:bodyPr>
+          <a:lstStyle/>
+          <a:p>
+            <a:pPr algn="ctr">
+              <a:lnSpc>
+                <a:spcPct val="150000"/>
+              </a:lnSpc>
+            </a:pPr>
+            <a:r>
+              <a:rPr sz="1400" b="0">
+                <a:solidFill>
+                  <a:srgbClr val="1C2A33"/>
+                </a:solidFill>
+                <a:latin typeface="楷体"/>
+                <a:ea typeface="楷体"/>
+                <a:cs typeface="楷体"/>
+              </a:rPr>
+              <a:t>线粒体(呼吸)、叶绿体(光合)。</a:t>
+            </a:r>
+          </a:p>
+        </p:txBody>
+      </p:sp>
+      <p:sp>
+        <p:nvSpPr>
+          <p:cNvPr id="10" name="Rounded Rectangle 9"/>
+          <p:cNvSpPr/>
+          <p:nvPr/>
+        </p:nvSpPr>
+        <p:spPr>
+          <a:xfrm>
+            <a:off x="3459403" y="2194560"/>
+            <a:ext cx="2453563" cy="3931920"/>
+          </a:xfrm>
+          <a:prstGeom prst="roundRect">
+            <a:avLst/>
+          </a:prstGeom>
+          <a:solidFill>
+            <a:srgbClr val="FFFFFF"/>
+          </a:solidFill>
+          <a:ln w="20320">
+            <a:solidFill>
+              <a:srgbClr val="B23A2A"/>
+            </a:solidFill>
+          </a:ln>
+          <a:effectLst/>
+        </p:spPr>
+        <p:style>
+          <a:lnRef idx="1">
+            <a:schemeClr val="accent1"/>
+          </a:lnRef>
+          <a:fillRef idx="3">
+            <a:schemeClr val="accent1"/>
+          </a:fillRef>
+          <a:effectRef idx="2">
+            <a:schemeClr val="accent1"/>
+          </a:effectRef>
+          <a:fontRef idx="minor">
+            <a:schemeClr val="lt1"/>
+          </a:fontRef>
+        </p:style>
+        <p:txBody>
+          <a:bodyPr rtlCol="0" anchor="ctr"/>
+          <a:lstStyle/>
+          <a:p>
+            <a:pPr algn="ctr"/>
+          </a:p>
+        </p:txBody>
+      </p:sp>
+      <p:sp>
+        <p:nvSpPr>
+          <p:cNvPr id="11" name="Rectangle 10"/>
+          <p:cNvSpPr/>
+          <p:nvPr/>
+        </p:nvSpPr>
+        <p:spPr>
+          <a:xfrm>
+            <a:off x="3459403" y="2194560"/>
+            <a:ext cx="2453563" cy="640080"/>
           </a:xfrm>
           <a:prstGeom prst="rect">
             <a:avLst/>
@@ -4880,14 +5431,92 @@
       </p:sp>
       <p:sp>
         <p:nvSpPr>
-          <p:cNvPr id="5" name="Rounded Rectangle 4"/>
+          <p:cNvPr id="12" name="TextBox 11"/>
+          <p:cNvSpPr txBox="1"/>
+          <p:nvPr/>
+        </p:nvSpPr>
+        <p:spPr>
+          <a:xfrm>
+            <a:off x="3550843" y="2322576"/>
+            <a:ext cx="2270683" cy="457200"/>
+          </a:xfrm>
+          <a:prstGeom prst="rect">
+            <a:avLst/>
+          </a:prstGeom>
+          <a:noFill/>
+        </p:spPr>
+        <p:txBody>
+          <a:bodyPr wrap="square" anchor="t" lIns="0" rIns="0" tIns="0" bIns="0">
+            <a:spAutoFit/>
+          </a:bodyPr>
+          <a:lstStyle/>
+          <a:p>
+            <a:pPr algn="ctr"/>
+            <a:r>
+              <a:rPr sz="1400" b="1">
+                <a:solidFill>
+                  <a:srgbClr val="FFFFFF"/>
+                </a:solidFill>
+                <a:latin typeface="微软雅黑"/>
+                <a:ea typeface="微软雅黑"/>
+                <a:cs typeface="微软雅黑"/>
+              </a:rPr>
+              <a:t>单层膜</a:t>
+            </a:r>
+          </a:p>
+        </p:txBody>
+      </p:sp>
+      <p:sp>
+        <p:nvSpPr>
+          <p:cNvPr id="13" name="TextBox 12"/>
+          <p:cNvSpPr txBox="1"/>
+          <p:nvPr/>
+        </p:nvSpPr>
+        <p:spPr>
+          <a:xfrm>
+            <a:off x="3733723" y="3017520"/>
+            <a:ext cx="1904923" cy="3017520"/>
+          </a:xfrm>
+          <a:prstGeom prst="rect">
+            <a:avLst/>
+          </a:prstGeom>
+          <a:noFill/>
+        </p:spPr>
+        <p:txBody>
+          <a:bodyPr wrap="square" anchor="t" lIns="0" rIns="0" tIns="0" bIns="0">
+            <a:spAutoFit/>
+          </a:bodyPr>
+          <a:lstStyle/>
+          <a:p>
+            <a:pPr algn="ctr">
+              <a:lnSpc>
+                <a:spcPct val="150000"/>
+              </a:lnSpc>
+            </a:pPr>
+            <a:r>
+              <a:rPr sz="1400" b="0">
+                <a:solidFill>
+                  <a:srgbClr val="1C2A33"/>
+                </a:solidFill>
+                <a:latin typeface="楷体"/>
+                <a:ea typeface="楷体"/>
+                <a:cs typeface="楷体"/>
+              </a:rPr>
+              <a:t>内质网(加工运输)、高尔基体(加工分类)、溶酶体(水解)、液泡。</a:t>
+            </a:r>
+          </a:p>
+        </p:txBody>
+      </p:sp>
+      <p:sp>
+        <p:nvSpPr>
+          <p:cNvPr id="14" name="Rounded Rectangle 13"/>
           <p:cNvSpPr/>
           <p:nvPr/>
         </p:nvSpPr>
         <p:spPr>
           <a:xfrm>
-            <a:off x="640080" y="1371600"/>
-            <a:ext cx="10911535" cy="1170432"/>
+            <a:off x="6278727" y="2194560"/>
+            <a:ext cx="2453563" cy="3931920"/>
           </a:xfrm>
           <a:prstGeom prst="roundRect">
             <a:avLst/>
@@ -4895,7 +5524,7 @@
           <a:solidFill>
             <a:srgbClr val="FFFFFF"/>
           </a:solidFill>
-          <a:ln w="22860">
+          <a:ln w="20320">
             <a:solidFill>
               <a:srgbClr val="C8A86B"/>
             </a:solidFill>
@@ -4926,107 +5555,23 @@
       </p:sp>
       <p:sp>
         <p:nvSpPr>
-          <p:cNvPr id="6" name="TextBox 5"/>
-          <p:cNvSpPr txBox="1"/>
-          <p:nvPr/>
-        </p:nvSpPr>
-        <p:spPr>
-          <a:xfrm>
-            <a:off x="1371600" y="1481328"/>
-            <a:ext cx="9997135" cy="457200"/>
-          </a:xfrm>
-          <a:prstGeom prst="rect">
-            <a:avLst/>
-          </a:prstGeom>
-          <a:noFill/>
-        </p:spPr>
-        <p:txBody>
-          <a:bodyPr wrap="square" anchor="t" lIns="0" rIns="0" tIns="0" bIns="0">
-            <a:spAutoFit/>
-          </a:bodyPr>
-          <a:lstStyle/>
-          <a:p>
-            <a:pPr algn="l">
-              <a:lnSpc>
-                <a:spcPct val="110000"/>
-              </a:lnSpc>
-            </a:pPr>
-            <a:r>
-              <a:rPr sz="1600" b="1">
-                <a:solidFill>
-                  <a:srgbClr val="1C2A33"/>
-                </a:solidFill>
-                <a:latin typeface="微软雅黑"/>
-                <a:ea typeface="微软雅黑"/>
-                <a:cs typeface="微软雅黑"/>
-              </a:rPr>
-              <a:t/>
-            </a:r>
-          </a:p>
-        </p:txBody>
-      </p:sp>
-      <p:sp>
-        <p:nvSpPr>
-          <p:cNvPr id="7" name="TextBox 6"/>
-          <p:cNvSpPr txBox="1"/>
-          <p:nvPr/>
-        </p:nvSpPr>
-        <p:spPr>
-          <a:xfrm>
-            <a:off x="1371600" y="1920240"/>
-            <a:ext cx="9997135" cy="530352"/>
-          </a:xfrm>
-          <a:prstGeom prst="rect">
-            <a:avLst/>
-          </a:prstGeom>
-          <a:noFill/>
-        </p:spPr>
-        <p:txBody>
-          <a:bodyPr wrap="square" anchor="t" lIns="0" rIns="0" tIns="0" bIns="0">
-            <a:spAutoFit/>
-          </a:bodyPr>
-          <a:lstStyle/>
-          <a:p>
-            <a:pPr algn="l">
-              <a:lnSpc>
-                <a:spcPct val="128000"/>
-              </a:lnSpc>
-            </a:pPr>
-            <a:r>
-              <a:rPr sz="1300" b="0">
-                <a:solidFill>
-                  <a:srgbClr val="1C2A33"/>
-                </a:solidFill>
-                <a:latin typeface="楷体"/>
-                <a:ea typeface="楷体"/>
-                <a:cs typeface="楷体"/>
-              </a:rPr>
-              <a:t>① 双层膜：线粒体(呼吸)、叶绿体(光合)。</a:t>
-            </a:r>
-          </a:p>
-        </p:txBody>
-      </p:sp>
-      <p:sp>
-        <p:nvSpPr>
-          <p:cNvPr id="8" name="Rounded Rectangle 7"/>
+          <p:cNvPr id="15" name="Rectangle 14"/>
           <p:cNvSpPr/>
           <p:nvPr/>
         </p:nvSpPr>
         <p:spPr>
           <a:xfrm>
-            <a:off x="640080" y="2651760"/>
-            <a:ext cx="10911535" cy="1170432"/>
-          </a:xfrm>
-          <a:prstGeom prst="roundRect">
+            <a:off x="6278727" y="2194560"/>
+            <a:ext cx="2453563" cy="640080"/>
+          </a:xfrm>
+          <a:prstGeom prst="rect">
             <a:avLst/>
           </a:prstGeom>
           <a:solidFill>
-            <a:srgbClr val="FFFFFF"/>
+            <a:srgbClr val="C8A86B"/>
           </a:solidFill>
-          <a:ln w="22860">
-            <a:solidFill>
-              <a:srgbClr val="C8A86B"/>
-            </a:solidFill>
+          <a:ln>
+            <a:noFill/>
           </a:ln>
           <a:effectLst/>
         </p:spPr>
@@ -5054,14 +5599,14 @@
       </p:sp>
       <p:sp>
         <p:nvSpPr>
-          <p:cNvPr id="9" name="TextBox 8"/>
+          <p:cNvPr id="16" name="TextBox 15"/>
           <p:cNvSpPr txBox="1"/>
           <p:nvPr/>
         </p:nvSpPr>
         <p:spPr>
           <a:xfrm>
-            <a:off x="1371600" y="2761488"/>
-            <a:ext cx="9997135" cy="457200"/>
+            <a:off x="6370167" y="2322576"/>
+            <a:ext cx="2270683" cy="457200"/>
           </a:xfrm>
           <a:prstGeom prst="rect">
             <a:avLst/>
@@ -5074,35 +5619,31 @@
           </a:bodyPr>
           <a:lstStyle/>
           <a:p>
-            <a:pPr algn="l">
-              <a:lnSpc>
-                <a:spcPct val="110000"/>
-              </a:lnSpc>
-            </a:pPr>
-            <a:r>
-              <a:rPr sz="1600" b="1">
-                <a:solidFill>
-                  <a:srgbClr val="1C2A33"/>
+            <a:pPr algn="ctr"/>
+            <a:r>
+              <a:rPr sz="1400" b="1">
+                <a:solidFill>
+                  <a:srgbClr val="FFFFFF"/>
                 </a:solidFill>
                 <a:latin typeface="微软雅黑"/>
                 <a:ea typeface="微软雅黑"/>
                 <a:cs typeface="微软雅黑"/>
               </a:rPr>
-              <a:t/>
-            </a:r>
-          </a:p>
-        </p:txBody>
-      </p:sp>
-      <p:sp>
-        <p:nvSpPr>
-          <p:cNvPr id="10" name="TextBox 9"/>
+              <a:t>无膜</a:t>
+            </a:r>
+          </a:p>
+        </p:txBody>
+      </p:sp>
+      <p:sp>
+        <p:nvSpPr>
+          <p:cNvPr id="17" name="TextBox 16"/>
           <p:cNvSpPr txBox="1"/>
           <p:nvPr/>
         </p:nvSpPr>
         <p:spPr>
           <a:xfrm>
-            <a:off x="1371600" y="3200400"/>
-            <a:ext cx="9997135" cy="530352"/>
+            <a:off x="6553047" y="3017520"/>
+            <a:ext cx="1904923" cy="3017520"/>
           </a:xfrm>
           <a:prstGeom prst="rect">
             <a:avLst/>
@@ -5115,13 +5656,13 @@
           </a:bodyPr>
           <a:lstStyle/>
           <a:p>
-            <a:pPr algn="l">
+            <a:pPr algn="ctr">
               <a:lnSpc>
-                <a:spcPct val="128000"/>
+                <a:spcPct val="150000"/>
               </a:lnSpc>
             </a:pPr>
             <a:r>
-              <a:rPr sz="1300" b="0">
+              <a:rPr sz="1400" b="0">
                 <a:solidFill>
                   <a:srgbClr val="1C2A33"/>
                 </a:solidFill>
@@ -5129,21 +5670,21 @@
                 <a:ea typeface="楷体"/>
                 <a:cs typeface="楷体"/>
               </a:rPr>
-              <a:t>② 单层膜：内质网(加工运输)、高尔基体(加工分类)、溶酶体(水解)、液泡。</a:t>
-            </a:r>
-          </a:p>
-        </p:txBody>
-      </p:sp>
-      <p:sp>
-        <p:nvSpPr>
-          <p:cNvPr id="11" name="Rounded Rectangle 10"/>
+              <a:t>核糖体(合成蛋白)、中心体(分裂)。</a:t>
+            </a:r>
+          </a:p>
+        </p:txBody>
+      </p:sp>
+      <p:sp>
+        <p:nvSpPr>
+          <p:cNvPr id="18" name="Rounded Rectangle 17"/>
           <p:cNvSpPr/>
           <p:nvPr/>
         </p:nvSpPr>
         <p:spPr>
           <a:xfrm>
-            <a:off x="640080" y="3931920"/>
-            <a:ext cx="10911535" cy="1170432"/>
+            <a:off x="9098051" y="2194560"/>
+            <a:ext cx="2453563" cy="3931920"/>
           </a:xfrm>
           <a:prstGeom prst="roundRect">
             <a:avLst/>
@@ -5151,9 +5692,9 @@
           <a:solidFill>
             <a:srgbClr val="FFFFFF"/>
           </a:solidFill>
-          <a:ln w="22860">
+          <a:ln w="20320">
             <a:solidFill>
-              <a:srgbClr val="C8A86B"/>
+              <a:srgbClr val="6B6258"/>
             </a:solidFill>
           </a:ln>
           <a:effectLst/>
@@ -5182,107 +5723,23 @@
       </p:sp>
       <p:sp>
         <p:nvSpPr>
-          <p:cNvPr id="12" name="TextBox 11"/>
-          <p:cNvSpPr txBox="1"/>
-          <p:nvPr/>
-        </p:nvSpPr>
-        <p:spPr>
-          <a:xfrm>
-            <a:off x="1371600" y="4041648"/>
-            <a:ext cx="9997135" cy="457200"/>
-          </a:xfrm>
-          <a:prstGeom prst="rect">
-            <a:avLst/>
-          </a:prstGeom>
-          <a:noFill/>
-        </p:spPr>
-        <p:txBody>
-          <a:bodyPr wrap="square" anchor="t" lIns="0" rIns="0" tIns="0" bIns="0">
-            <a:spAutoFit/>
-          </a:bodyPr>
-          <a:lstStyle/>
-          <a:p>
-            <a:pPr algn="l">
-              <a:lnSpc>
-                <a:spcPct val="110000"/>
-              </a:lnSpc>
-            </a:pPr>
-            <a:r>
-              <a:rPr sz="1600" b="1">
-                <a:solidFill>
-                  <a:srgbClr val="1C2A33"/>
-                </a:solidFill>
-                <a:latin typeface="微软雅黑"/>
-                <a:ea typeface="微软雅黑"/>
-                <a:cs typeface="微软雅黑"/>
-              </a:rPr>
-              <a:t/>
-            </a:r>
-          </a:p>
-        </p:txBody>
-      </p:sp>
-      <p:sp>
-        <p:nvSpPr>
-          <p:cNvPr id="13" name="TextBox 12"/>
-          <p:cNvSpPr txBox="1"/>
-          <p:nvPr/>
-        </p:nvSpPr>
-        <p:spPr>
-          <a:xfrm>
-            <a:off x="1371600" y="4480560"/>
-            <a:ext cx="9997135" cy="530352"/>
-          </a:xfrm>
-          <a:prstGeom prst="rect">
-            <a:avLst/>
-          </a:prstGeom>
-          <a:noFill/>
-        </p:spPr>
-        <p:txBody>
-          <a:bodyPr wrap="square" anchor="t" lIns="0" rIns="0" tIns="0" bIns="0">
-            <a:spAutoFit/>
-          </a:bodyPr>
-          <a:lstStyle/>
-          <a:p>
-            <a:pPr algn="l">
-              <a:lnSpc>
-                <a:spcPct val="128000"/>
-              </a:lnSpc>
-            </a:pPr>
-            <a:r>
-              <a:rPr sz="1300" b="0">
-                <a:solidFill>
-                  <a:srgbClr val="1C2A33"/>
-                </a:solidFill>
-                <a:latin typeface="楷体"/>
-                <a:ea typeface="楷体"/>
-                <a:cs typeface="楷体"/>
-              </a:rPr>
-              <a:t>③ 无膜：核糖体(合成蛋白)、中心体(分裂)。</a:t>
-            </a:r>
-          </a:p>
-        </p:txBody>
-      </p:sp>
-      <p:sp>
-        <p:nvSpPr>
-          <p:cNvPr id="14" name="Rounded Rectangle 13"/>
+          <p:cNvPr id="19" name="Rectangle 18"/>
           <p:cNvSpPr/>
           <p:nvPr/>
         </p:nvSpPr>
         <p:spPr>
           <a:xfrm>
-            <a:off x="640080" y="5212080"/>
-            <a:ext cx="10911535" cy="1170432"/>
-          </a:xfrm>
-          <a:prstGeom prst="roundRect">
+            <a:off x="9098051" y="2194560"/>
+            <a:ext cx="2453563" cy="640080"/>
+          </a:xfrm>
+          <a:prstGeom prst="rect">
             <a:avLst/>
           </a:prstGeom>
           <a:solidFill>
-            <a:srgbClr val="FFFFFF"/>
+            <a:srgbClr val="6B6258"/>
           </a:solidFill>
-          <a:ln w="22860">
-            <a:solidFill>
-              <a:srgbClr val="C8A86B"/>
-            </a:solidFill>
+          <a:ln>
+            <a:noFill/>
           </a:ln>
           <a:effectLst/>
         </p:spPr>
@@ -5310,14 +5767,14 @@
       </p:sp>
       <p:sp>
         <p:nvSpPr>
-          <p:cNvPr id="15" name="TextBox 14"/>
+          <p:cNvPr id="20" name="TextBox 19"/>
           <p:cNvSpPr txBox="1"/>
           <p:nvPr/>
         </p:nvSpPr>
         <p:spPr>
           <a:xfrm>
-            <a:off x="1371600" y="5321808"/>
-            <a:ext cx="9997135" cy="457200"/>
+            <a:off x="9189491" y="2322576"/>
+            <a:ext cx="2270683" cy="457200"/>
           </a:xfrm>
           <a:prstGeom prst="rect">
             <a:avLst/>
@@ -5330,35 +5787,31 @@
           </a:bodyPr>
           <a:lstStyle/>
           <a:p>
-            <a:pPr algn="l">
-              <a:lnSpc>
-                <a:spcPct val="110000"/>
-              </a:lnSpc>
-            </a:pPr>
-            <a:r>
-              <a:rPr sz="1600" b="1">
-                <a:solidFill>
-                  <a:srgbClr val="1C2A33"/>
+            <a:pPr algn="ctr"/>
+            <a:r>
+              <a:rPr sz="1400" b="1">
+                <a:solidFill>
+                  <a:srgbClr val="FFFFFF"/>
                 </a:solidFill>
                 <a:latin typeface="微软雅黑"/>
                 <a:ea typeface="微软雅黑"/>
                 <a:cs typeface="微软雅黑"/>
               </a:rPr>
-              <a:t/>
-            </a:r>
-          </a:p>
-        </p:txBody>
-      </p:sp>
-      <p:sp>
-        <p:nvSpPr>
-          <p:cNvPr id="16" name="TextBox 15"/>
+              <a:t>动植物差异</a:t>
+            </a:r>
+          </a:p>
+        </p:txBody>
+      </p:sp>
+      <p:sp>
+        <p:nvSpPr>
+          <p:cNvPr id="21" name="TextBox 20"/>
           <p:cNvSpPr txBox="1"/>
           <p:nvPr/>
         </p:nvSpPr>
         <p:spPr>
           <a:xfrm>
-            <a:off x="1371600" y="5760720"/>
-            <a:ext cx="9997135" cy="530352"/>
+            <a:off x="9372371" y="3017520"/>
+            <a:ext cx="1904923" cy="3017520"/>
           </a:xfrm>
           <a:prstGeom prst="rect">
             <a:avLst/>
@@ -5371,13 +5824,13 @@
           </a:bodyPr>
           <a:lstStyle/>
           <a:p>
-            <a:pPr algn="l">
+            <a:pPr algn="ctr">
               <a:lnSpc>
-                <a:spcPct val="128000"/>
+                <a:spcPct val="150000"/>
               </a:lnSpc>
             </a:pPr>
             <a:r>
-              <a:rPr sz="1300" b="0">
+              <a:rPr sz="1400" b="0">
                 <a:solidFill>
                   <a:srgbClr val="1C2A33"/>
                 </a:solidFill>
@@ -5385,14 +5838,14 @@
                 <a:ea typeface="楷体"/>
                 <a:cs typeface="楷体"/>
               </a:rPr>
-              <a:t>④ 动植物差异：中心体（动物低等植物有）、叶绿体液泡（植物有）。</a:t>
-            </a:r>
-          </a:p>
-        </p:txBody>
-      </p:sp>
-      <p:sp>
-        <p:nvSpPr>
-          <p:cNvPr id="17" name="TextBox 16"/>
+              <a:t>中心体（动物低等植物有）、叶绿体液泡（植物有）。</a:t>
+            </a:r>
+          </a:p>
+        </p:txBody>
+      </p:sp>
+      <p:sp>
+        <p:nvSpPr>
+          <p:cNvPr id="22" name="TextBox 21"/>
           <p:cNvSpPr txBox="1"/>
           <p:nvPr/>
         </p:nvSpPr>
@@ -5525,7 +5978,7 @@
                 <a:ea typeface="微软雅黑"/>
                 <a:cs typeface="微软雅黑"/>
               </a:rPr>
-              <a:t>学习路径</a:t>
+              <a:t>方法</a:t>
             </a:r>
           </a:p>
         </p:txBody>
@@ -5576,14 +6029,51 @@
       </p:sp>
       <p:sp>
         <p:nvSpPr>
-          <p:cNvPr id="5" name="Rounded Rectangle 4"/>
+          <p:cNvPr id="5" name="TextBox 4"/>
+          <p:cNvSpPr txBox="1"/>
+          <p:nvPr/>
+        </p:nvSpPr>
+        <p:spPr>
+          <a:xfrm>
+            <a:off x="640080" y="1325880"/>
+            <a:ext cx="10515600" cy="548640"/>
+          </a:xfrm>
+          <a:prstGeom prst="rect">
+            <a:avLst/>
+          </a:prstGeom>
+          <a:noFill/>
+        </p:spPr>
+        <p:txBody>
+          <a:bodyPr wrap="square" anchor="t" lIns="0" rIns="0" tIns="0" bIns="0">
+            <a:spAutoFit/>
+          </a:bodyPr>
+          <a:lstStyle/>
+          <a:p>
+            <a:pPr algn="l"/>
+            <a:r>
+              <a:rPr sz="2600" b="1">
+                <a:solidFill>
+                  <a:srgbClr val="1C2A33"/>
+                </a:solidFill>
+                <a:latin typeface="楷体"/>
+                <a:ea typeface="楷体"/>
+                <a:cs typeface="楷体"/>
+              </a:rPr>
+              <a:t>本课采用的学习方法</a:t>
+            </a:r>
+          </a:p>
+        </p:txBody>
+      </p:sp>
+      <p:sp>
+        <p:nvSpPr>
+          <p:cNvPr id="6" name="Rounded Rectangle 5"/>
           <p:cNvSpPr/>
           <p:nvPr/>
         </p:nvSpPr>
         <p:spPr>
           <a:xfrm>
-            <a:off x="640080" y="1371600"/>
-            <a:ext cx="10911535" cy="685800"/>
+            <a:off x="640080" y="2194560"/>
+            <a:ext cx="2453563" cy="3931920"/>
           </a:xfrm>
           <a:prstGeom prst="roundRect">
             <a:avLst/>
@@ -5622,23 +6112,103 @@
       </p:sp>
       <p:sp>
         <p:nvSpPr>
-          <p:cNvPr id="6" name="Oval 5"/>
+          <p:cNvPr id="7" name="TextBox 6"/>
+          <p:cNvSpPr txBox="1"/>
+          <p:nvPr/>
+        </p:nvSpPr>
+        <p:spPr>
+          <a:xfrm>
+            <a:off x="868680" y="2468880"/>
+            <a:ext cx="1996363" cy="640080"/>
+          </a:xfrm>
+          <a:prstGeom prst="rect">
+            <a:avLst/>
+          </a:prstGeom>
+          <a:noFill/>
+        </p:spPr>
+        <p:txBody>
+          <a:bodyPr wrap="square" anchor="t" lIns="0" rIns="0" tIns="0" bIns="0">
+            <a:spAutoFit/>
+          </a:bodyPr>
+          <a:lstStyle/>
+          <a:p>
+            <a:pPr algn="l"/>
+            <a:r>
+              <a:rPr sz="1800" b="1">
+                <a:solidFill>
+                  <a:srgbClr val="2E7D6B"/>
+                </a:solidFill>
+                <a:latin typeface="楷体"/>
+                <a:ea typeface="楷体"/>
+                <a:cs typeface="楷体"/>
+              </a:rPr>
+              <a:t>图文对照法</a:t>
+            </a:r>
+          </a:p>
+        </p:txBody>
+      </p:sp>
+      <p:sp>
+        <p:nvSpPr>
+          <p:cNvPr id="8" name="TextBox 7"/>
+          <p:cNvSpPr txBox="1"/>
+          <p:nvPr/>
+        </p:nvSpPr>
+        <p:spPr>
+          <a:xfrm>
+            <a:off x="868680" y="3246120"/>
+            <a:ext cx="1996363" cy="2743200"/>
+          </a:xfrm>
+          <a:prstGeom prst="rect">
+            <a:avLst/>
+          </a:prstGeom>
+          <a:noFill/>
+        </p:spPr>
+        <p:txBody>
+          <a:bodyPr wrap="square" anchor="t" lIns="0" rIns="0" tIns="0" bIns="0">
+            <a:spAutoFit/>
+          </a:bodyPr>
+          <a:lstStyle/>
+          <a:p>
+            <a:pPr algn="l">
+              <a:lnSpc>
+                <a:spcPct val="155000"/>
+              </a:lnSpc>
+            </a:pPr>
+            <a:r>
+              <a:rPr sz="1350" b="0">
+                <a:solidFill>
+                  <a:srgbClr val="1C2A33"/>
+                </a:solidFill>
+                <a:latin typeface="楷体"/>
+                <a:ea typeface="楷体"/>
+                <a:cs typeface="楷体"/>
+              </a:rPr>
+              <a:t>结合本课内容运用该方法。</a:t>
+            </a:r>
+          </a:p>
+        </p:txBody>
+      </p:sp>
+      <p:sp>
+        <p:nvSpPr>
+          <p:cNvPr id="9" name="Rounded Rectangle 8"/>
           <p:cNvSpPr/>
           <p:nvPr/>
         </p:nvSpPr>
         <p:spPr>
           <a:xfrm>
-            <a:off x="804672" y="1536192"/>
-            <a:ext cx="457200" cy="457200"/>
-          </a:xfrm>
-          <a:prstGeom prst="ellipse">
+            <a:off x="3459403" y="2194560"/>
+            <a:ext cx="2453563" cy="3931920"/>
+          </a:xfrm>
+          <a:prstGeom prst="roundRect">
             <a:avLst/>
           </a:prstGeom>
           <a:solidFill>
-            <a:srgbClr val="2E7D6B"/>
+            <a:srgbClr val="FFFFFF"/>
           </a:solidFill>
-          <a:ln>
-            <a:noFill/>
+          <a:ln w="22860">
+            <a:solidFill>
+              <a:srgbClr val="B23A2A"/>
+            </a:solidFill>
           </a:ln>
           <a:effectLst/>
         </p:spPr>
@@ -5666,14 +6236,14 @@
       </p:sp>
       <p:sp>
         <p:nvSpPr>
-          <p:cNvPr id="7" name="TextBox 6"/>
+          <p:cNvPr id="10" name="TextBox 9"/>
           <p:cNvSpPr txBox="1"/>
           <p:nvPr/>
         </p:nvSpPr>
         <p:spPr>
           <a:xfrm>
-            <a:off x="804672" y="1591056"/>
-            <a:ext cx="457200" cy="384048"/>
+            <a:off x="3688003" y="2468880"/>
+            <a:ext cx="1996363" cy="640080"/>
           </a:xfrm>
           <a:prstGeom prst="rect">
             <a:avLst/>
@@ -5686,31 +6256,31 @@
           </a:bodyPr>
           <a:lstStyle/>
           <a:p>
-            <a:pPr algn="ctr"/>
-            <a:r>
-              <a:rPr sz="1600" b="1">
-                <a:solidFill>
-                  <a:srgbClr val="FFFFFF"/>
-                </a:solidFill>
-                <a:latin typeface="微软雅黑"/>
-                <a:ea typeface="微软雅黑"/>
-                <a:cs typeface="微软雅黑"/>
+            <a:pPr algn="l"/>
+            <a:r>
+              <a:rPr sz="1800" b="1">
+                <a:solidFill>
+                  <a:srgbClr val="B23A2A"/>
+                </a:solidFill>
+                <a:latin typeface="楷体"/>
+                <a:ea typeface="楷体"/>
+                <a:cs typeface="楷体"/>
               </a:rPr>
-              <a:t>1</a:t>
-            </a:r>
-          </a:p>
-        </p:txBody>
-      </p:sp>
-      <p:sp>
-        <p:nvSpPr>
-          <p:cNvPr id="8" name="TextBox 7"/>
+              <a:t>对比表法</a:t>
+            </a:r>
+          </a:p>
+        </p:txBody>
+      </p:sp>
+      <p:sp>
+        <p:nvSpPr>
+          <p:cNvPr id="11" name="TextBox 10"/>
           <p:cNvSpPr txBox="1"/>
           <p:nvPr/>
         </p:nvSpPr>
         <p:spPr>
           <a:xfrm>
-            <a:off x="1371600" y="1481328"/>
-            <a:ext cx="9997135" cy="484632"/>
+            <a:off x="3688003" y="3246120"/>
+            <a:ext cx="1996363" cy="2743200"/>
           </a:xfrm>
           <a:prstGeom prst="rect">
             <a:avLst/>
@@ -5725,33 +6295,33 @@
           <a:p>
             <a:pPr algn="l">
               <a:lnSpc>
-                <a:spcPct val="110000"/>
+                <a:spcPct val="155000"/>
               </a:lnSpc>
             </a:pPr>
             <a:r>
-              <a:rPr sz="1600" b="1">
+              <a:rPr sz="1350" b="0">
                 <a:solidFill>
                   <a:srgbClr val="1C2A33"/>
                 </a:solidFill>
-                <a:latin typeface="微软雅黑"/>
-                <a:ea typeface="微软雅黑"/>
-                <a:cs typeface="微软雅黑"/>
+                <a:latin typeface="楷体"/>
+                <a:ea typeface="楷体"/>
+                <a:cs typeface="楷体"/>
               </a:rPr>
-              <a:t>Step 1 导入</a:t>
-            </a:r>
-          </a:p>
-        </p:txBody>
-      </p:sp>
-      <p:sp>
-        <p:nvSpPr>
-          <p:cNvPr id="9" name="Rounded Rectangle 8"/>
+              <a:t>线粒体/叶绿体</a:t>
+            </a:r>
+          </a:p>
+        </p:txBody>
+      </p:sp>
+      <p:sp>
+        <p:nvSpPr>
+          <p:cNvPr id="12" name="Rounded Rectangle 11"/>
           <p:cNvSpPr/>
           <p:nvPr/>
         </p:nvSpPr>
         <p:spPr>
           <a:xfrm>
-            <a:off x="640080" y="2194560"/>
-            <a:ext cx="10911535" cy="685800"/>
+            <a:off x="6278727" y="2194560"/>
+            <a:ext cx="2453563" cy="3931920"/>
           </a:xfrm>
           <a:prstGeom prst="roundRect">
             <a:avLst/>
@@ -5761,7 +6331,7 @@
           </a:solidFill>
           <a:ln w="22860">
             <a:solidFill>
-              <a:srgbClr val="2E7D6B"/>
+              <a:srgbClr val="C8A86B"/>
             </a:solidFill>
           </a:ln>
           <a:effectLst/>
@@ -5790,23 +6360,103 @@
       </p:sp>
       <p:sp>
         <p:nvSpPr>
-          <p:cNvPr id="10" name="Oval 9"/>
+          <p:cNvPr id="13" name="TextBox 12"/>
+          <p:cNvSpPr txBox="1"/>
+          <p:nvPr/>
+        </p:nvSpPr>
+        <p:spPr>
+          <a:xfrm>
+            <a:off x="6507327" y="2468880"/>
+            <a:ext cx="1996363" cy="640080"/>
+          </a:xfrm>
+          <a:prstGeom prst="rect">
+            <a:avLst/>
+          </a:prstGeom>
+          <a:noFill/>
+        </p:spPr>
+        <p:txBody>
+          <a:bodyPr wrap="square" anchor="t" lIns="0" rIns="0" tIns="0" bIns="0">
+            <a:spAutoFit/>
+          </a:bodyPr>
+          <a:lstStyle/>
+          <a:p>
+            <a:pPr algn="l"/>
+            <a:r>
+              <a:rPr sz="1800" b="1">
+                <a:solidFill>
+                  <a:srgbClr val="C8A86B"/>
+                </a:solidFill>
+                <a:latin typeface="楷体"/>
+                <a:ea typeface="楷体"/>
+                <a:cs typeface="楷体"/>
+              </a:rPr>
+              <a:t>显微镜观察法</a:t>
+            </a:r>
+          </a:p>
+        </p:txBody>
+      </p:sp>
+      <p:sp>
+        <p:nvSpPr>
+          <p:cNvPr id="14" name="TextBox 13"/>
+          <p:cNvSpPr txBox="1"/>
+          <p:nvPr/>
+        </p:nvSpPr>
+        <p:spPr>
+          <a:xfrm>
+            <a:off x="6507327" y="3246120"/>
+            <a:ext cx="1996363" cy="2743200"/>
+          </a:xfrm>
+          <a:prstGeom prst="rect">
+            <a:avLst/>
+          </a:prstGeom>
+          <a:noFill/>
+        </p:spPr>
+        <p:txBody>
+          <a:bodyPr wrap="square" anchor="t" lIns="0" rIns="0" tIns="0" bIns="0">
+            <a:spAutoFit/>
+          </a:bodyPr>
+          <a:lstStyle/>
+          <a:p>
+            <a:pPr algn="l">
+              <a:lnSpc>
+                <a:spcPct val="155000"/>
+              </a:lnSpc>
+            </a:pPr>
+            <a:r>
+              <a:rPr sz="1350" b="0">
+                <a:solidFill>
+                  <a:srgbClr val="1C2A33"/>
+                </a:solidFill>
+                <a:latin typeface="楷体"/>
+                <a:ea typeface="楷体"/>
+                <a:cs typeface="楷体"/>
+              </a:rPr>
+              <a:t>结合本课内容运用该方法。</a:t>
+            </a:r>
+          </a:p>
+        </p:txBody>
+      </p:sp>
+      <p:sp>
+        <p:nvSpPr>
+          <p:cNvPr id="15" name="Rounded Rectangle 14"/>
           <p:cNvSpPr/>
           <p:nvPr/>
         </p:nvSpPr>
         <p:spPr>
           <a:xfrm>
-            <a:off x="804672" y="2359152"/>
-            <a:ext cx="457200" cy="457200"/>
-          </a:xfrm>
-          <a:prstGeom prst="ellipse">
+            <a:off x="9098051" y="2194560"/>
+            <a:ext cx="2453563" cy="3931920"/>
+          </a:xfrm>
+          <a:prstGeom prst="roundRect">
             <a:avLst/>
           </a:prstGeom>
           <a:solidFill>
-            <a:srgbClr val="2E7D6B"/>
+            <a:srgbClr val="FFFFFF"/>
           </a:solidFill>
-          <a:ln>
-            <a:noFill/>
+          <a:ln w="22860">
+            <a:solidFill>
+              <a:srgbClr val="6B6258"/>
+            </a:solidFill>
           </a:ln>
           <a:effectLst/>
         </p:spPr>
@@ -5834,14 +6484,14 @@
       </p:sp>
       <p:sp>
         <p:nvSpPr>
-          <p:cNvPr id="11" name="TextBox 10"/>
+          <p:cNvPr id="16" name="TextBox 15"/>
           <p:cNvSpPr txBox="1"/>
           <p:nvPr/>
         </p:nvSpPr>
         <p:spPr>
           <a:xfrm>
-            <a:off x="804672" y="2414016"/>
-            <a:ext cx="457200" cy="384048"/>
+            <a:off x="9326651" y="2468880"/>
+            <a:ext cx="1996363" cy="640080"/>
           </a:xfrm>
           <a:prstGeom prst="rect">
             <a:avLst/>
@@ -5854,31 +6504,31 @@
           </a:bodyPr>
           <a:lstStyle/>
           <a:p>
-            <a:pPr algn="ctr"/>
-            <a:r>
-              <a:rPr sz="1600" b="1">
-                <a:solidFill>
-                  <a:srgbClr val="FFFFFF"/>
-                </a:solidFill>
-                <a:latin typeface="微软雅黑"/>
-                <a:ea typeface="微软雅黑"/>
-                <a:cs typeface="微软雅黑"/>
+            <a:pPr algn="l"/>
+            <a:r>
+              <a:rPr sz="1800" b="1">
+                <a:solidFill>
+                  <a:srgbClr val="6B6258"/>
+                </a:solidFill>
+                <a:latin typeface="楷体"/>
+                <a:ea typeface="楷体"/>
+                <a:cs typeface="楷体"/>
               </a:rPr>
-              <a:t>2</a:t>
-            </a:r>
-          </a:p>
-        </p:txBody>
-      </p:sp>
-      <p:sp>
-        <p:nvSpPr>
-          <p:cNvPr id="12" name="TextBox 11"/>
+              <a:t>归纳法</a:t>
+            </a:r>
+          </a:p>
+        </p:txBody>
+      </p:sp>
+      <p:sp>
+        <p:nvSpPr>
+          <p:cNvPr id="17" name="TextBox 16"/>
           <p:cNvSpPr txBox="1"/>
           <p:nvPr/>
         </p:nvSpPr>
         <p:spPr>
           <a:xfrm>
-            <a:off x="1371600" y="2304288"/>
-            <a:ext cx="9997135" cy="484632"/>
+            <a:off x="9326651" y="3246120"/>
+            <a:ext cx="1996363" cy="2743200"/>
           </a:xfrm>
           <a:prstGeom prst="rect">
             <a:avLst/>
@@ -5893,698 +6543,26 @@
           <a:p>
             <a:pPr algn="l">
               <a:lnSpc>
-                <a:spcPct val="110000"/>
+                <a:spcPct val="155000"/>
               </a:lnSpc>
             </a:pPr>
             <a:r>
-              <a:rPr sz="1400" b="1">
+              <a:rPr sz="1350" b="0">
                 <a:solidFill>
                   <a:srgbClr val="1C2A33"/>
                 </a:solidFill>
-                <a:latin typeface="微软雅黑"/>
-                <a:ea typeface="微软雅黑"/>
-                <a:cs typeface="微软雅黑"/>
+                <a:latin typeface="楷体"/>
+                <a:ea typeface="楷体"/>
+                <a:cs typeface="楷体"/>
               </a:rPr>
-              <a:t>Step 2 双层膜细胞器</a:t>
-            </a:r>
-          </a:p>
-        </p:txBody>
-      </p:sp>
-      <p:sp>
-        <p:nvSpPr>
-          <p:cNvPr id="13" name="Rounded Rectangle 12"/>
-          <p:cNvSpPr/>
-          <p:nvPr/>
-        </p:nvSpPr>
-        <p:spPr>
-          <a:xfrm>
-            <a:off x="640080" y="3017520"/>
-            <a:ext cx="10911535" cy="685800"/>
-          </a:xfrm>
-          <a:prstGeom prst="roundRect">
-            <a:avLst/>
-          </a:prstGeom>
-          <a:solidFill>
-            <a:srgbClr val="FFFFFF"/>
-          </a:solidFill>
-          <a:ln w="22860">
-            <a:solidFill>
-              <a:srgbClr val="2E7D6B"/>
-            </a:solidFill>
-          </a:ln>
-          <a:effectLst/>
-        </p:spPr>
-        <p:style>
-          <a:lnRef idx="1">
-            <a:schemeClr val="accent1"/>
-          </a:lnRef>
-          <a:fillRef idx="3">
-            <a:schemeClr val="accent1"/>
-          </a:fillRef>
-          <a:effectRef idx="2">
-            <a:schemeClr val="accent1"/>
-          </a:effectRef>
-          <a:fontRef idx="minor">
-            <a:schemeClr val="lt1"/>
-          </a:fontRef>
-        </p:style>
-        <p:txBody>
-          <a:bodyPr rtlCol="0" anchor="ctr"/>
-          <a:lstStyle/>
-          <a:p>
-            <a:pPr algn="ctr"/>
-          </a:p>
-        </p:txBody>
-      </p:sp>
-      <p:sp>
-        <p:nvSpPr>
-          <p:cNvPr id="14" name="Oval 13"/>
-          <p:cNvSpPr/>
-          <p:nvPr/>
-        </p:nvSpPr>
-        <p:spPr>
-          <a:xfrm>
-            <a:off x="804672" y="3182112"/>
-            <a:ext cx="457200" cy="457200"/>
-          </a:xfrm>
-          <a:prstGeom prst="ellipse">
-            <a:avLst/>
-          </a:prstGeom>
-          <a:solidFill>
-            <a:srgbClr val="2E7D6B"/>
-          </a:solidFill>
-          <a:ln>
-            <a:noFill/>
-          </a:ln>
-          <a:effectLst/>
-        </p:spPr>
-        <p:style>
-          <a:lnRef idx="1">
-            <a:schemeClr val="accent1"/>
-          </a:lnRef>
-          <a:fillRef idx="3">
-            <a:schemeClr val="accent1"/>
-          </a:fillRef>
-          <a:effectRef idx="2">
-            <a:schemeClr val="accent1"/>
-          </a:effectRef>
-          <a:fontRef idx="minor">
-            <a:schemeClr val="lt1"/>
-          </a:fontRef>
-        </p:style>
-        <p:txBody>
-          <a:bodyPr rtlCol="0" anchor="ctr"/>
-          <a:lstStyle/>
-          <a:p>
-            <a:pPr algn="ctr"/>
-          </a:p>
-        </p:txBody>
-      </p:sp>
-      <p:sp>
-        <p:nvSpPr>
-          <p:cNvPr id="15" name="TextBox 14"/>
-          <p:cNvSpPr txBox="1"/>
-          <p:nvPr/>
-        </p:nvSpPr>
-        <p:spPr>
-          <a:xfrm>
-            <a:off x="804672" y="3236976"/>
-            <a:ext cx="457200" cy="384048"/>
-          </a:xfrm>
-          <a:prstGeom prst="rect">
-            <a:avLst/>
-          </a:prstGeom>
-          <a:noFill/>
-        </p:spPr>
-        <p:txBody>
-          <a:bodyPr wrap="square" anchor="t" lIns="0" rIns="0" tIns="0" bIns="0">
-            <a:spAutoFit/>
-          </a:bodyPr>
-          <a:lstStyle/>
-          <a:p>
-            <a:pPr algn="ctr"/>
-            <a:r>
-              <a:rPr sz="1600" b="1">
-                <a:solidFill>
-                  <a:srgbClr val="FFFFFF"/>
-                </a:solidFill>
-                <a:latin typeface="微软雅黑"/>
-                <a:ea typeface="微软雅黑"/>
-                <a:cs typeface="微软雅黑"/>
-              </a:rPr>
-              <a:t>3</a:t>
-            </a:r>
-          </a:p>
-        </p:txBody>
-      </p:sp>
-      <p:sp>
-        <p:nvSpPr>
-          <p:cNvPr id="16" name="TextBox 15"/>
-          <p:cNvSpPr txBox="1"/>
-          <p:nvPr/>
-        </p:nvSpPr>
-        <p:spPr>
-          <a:xfrm>
-            <a:off x="1371600" y="3127248"/>
-            <a:ext cx="9997135" cy="484632"/>
-          </a:xfrm>
-          <a:prstGeom prst="rect">
-            <a:avLst/>
-          </a:prstGeom>
-          <a:noFill/>
-        </p:spPr>
-        <p:txBody>
-          <a:bodyPr wrap="square" anchor="t" lIns="0" rIns="0" tIns="0" bIns="0">
-            <a:spAutoFit/>
-          </a:bodyPr>
-          <a:lstStyle/>
-          <a:p>
-            <a:pPr algn="l">
-              <a:lnSpc>
-                <a:spcPct val="110000"/>
-              </a:lnSpc>
-            </a:pPr>
-            <a:r>
-              <a:rPr sz="1400" b="1">
-                <a:solidFill>
-                  <a:srgbClr val="1C2A33"/>
-                </a:solidFill>
-                <a:latin typeface="微软雅黑"/>
-                <a:ea typeface="微软雅黑"/>
-                <a:cs typeface="微软雅黑"/>
-              </a:rPr>
-              <a:t>Step 3 单层膜细胞器</a:t>
-            </a:r>
-          </a:p>
-        </p:txBody>
-      </p:sp>
-      <p:sp>
-        <p:nvSpPr>
-          <p:cNvPr id="17" name="Rounded Rectangle 16"/>
-          <p:cNvSpPr/>
-          <p:nvPr/>
-        </p:nvSpPr>
-        <p:spPr>
-          <a:xfrm>
-            <a:off x="640080" y="3840480"/>
-            <a:ext cx="10911535" cy="685800"/>
-          </a:xfrm>
-          <a:prstGeom prst="roundRect">
-            <a:avLst/>
-          </a:prstGeom>
-          <a:solidFill>
-            <a:srgbClr val="FFFFFF"/>
-          </a:solidFill>
-          <a:ln w="22860">
-            <a:solidFill>
-              <a:srgbClr val="2E7D6B"/>
-            </a:solidFill>
-          </a:ln>
-          <a:effectLst/>
-        </p:spPr>
-        <p:style>
-          <a:lnRef idx="1">
-            <a:schemeClr val="accent1"/>
-          </a:lnRef>
-          <a:fillRef idx="3">
-            <a:schemeClr val="accent1"/>
-          </a:fillRef>
-          <a:effectRef idx="2">
-            <a:schemeClr val="accent1"/>
-          </a:effectRef>
-          <a:fontRef idx="minor">
-            <a:schemeClr val="lt1"/>
-          </a:fontRef>
-        </p:style>
-        <p:txBody>
-          <a:bodyPr rtlCol="0" anchor="ctr"/>
-          <a:lstStyle/>
-          <a:p>
-            <a:pPr algn="ctr"/>
-          </a:p>
-        </p:txBody>
-      </p:sp>
-      <p:sp>
-        <p:nvSpPr>
-          <p:cNvPr id="18" name="Oval 17"/>
-          <p:cNvSpPr/>
-          <p:nvPr/>
-        </p:nvSpPr>
-        <p:spPr>
-          <a:xfrm>
-            <a:off x="804672" y="4005072"/>
-            <a:ext cx="457200" cy="457200"/>
-          </a:xfrm>
-          <a:prstGeom prst="ellipse">
-            <a:avLst/>
-          </a:prstGeom>
-          <a:solidFill>
-            <a:srgbClr val="2E7D6B"/>
-          </a:solidFill>
-          <a:ln>
-            <a:noFill/>
-          </a:ln>
-          <a:effectLst/>
-        </p:spPr>
-        <p:style>
-          <a:lnRef idx="1">
-            <a:schemeClr val="accent1"/>
-          </a:lnRef>
-          <a:fillRef idx="3">
-            <a:schemeClr val="accent1"/>
-          </a:fillRef>
-          <a:effectRef idx="2">
-            <a:schemeClr val="accent1"/>
-          </a:effectRef>
-          <a:fontRef idx="minor">
-            <a:schemeClr val="lt1"/>
-          </a:fontRef>
-        </p:style>
-        <p:txBody>
-          <a:bodyPr rtlCol="0" anchor="ctr"/>
-          <a:lstStyle/>
-          <a:p>
-            <a:pPr algn="ctr"/>
-          </a:p>
-        </p:txBody>
-      </p:sp>
-      <p:sp>
-        <p:nvSpPr>
-          <p:cNvPr id="19" name="TextBox 18"/>
-          <p:cNvSpPr txBox="1"/>
-          <p:nvPr/>
-        </p:nvSpPr>
-        <p:spPr>
-          <a:xfrm>
-            <a:off x="804672" y="4059936"/>
-            <a:ext cx="457200" cy="384048"/>
-          </a:xfrm>
-          <a:prstGeom prst="rect">
-            <a:avLst/>
-          </a:prstGeom>
-          <a:noFill/>
-        </p:spPr>
-        <p:txBody>
-          <a:bodyPr wrap="square" anchor="t" lIns="0" rIns="0" tIns="0" bIns="0">
-            <a:spAutoFit/>
-          </a:bodyPr>
-          <a:lstStyle/>
-          <a:p>
-            <a:pPr algn="ctr"/>
-            <a:r>
-              <a:rPr sz="1600" b="1">
-                <a:solidFill>
-                  <a:srgbClr val="FFFFFF"/>
-                </a:solidFill>
-                <a:latin typeface="微软雅黑"/>
-                <a:ea typeface="微软雅黑"/>
-                <a:cs typeface="微软雅黑"/>
-              </a:rPr>
-              <a:t>4</a:t>
-            </a:r>
-          </a:p>
-        </p:txBody>
-      </p:sp>
-      <p:sp>
-        <p:nvSpPr>
-          <p:cNvPr id="20" name="TextBox 19"/>
-          <p:cNvSpPr txBox="1"/>
-          <p:nvPr/>
-        </p:nvSpPr>
-        <p:spPr>
-          <a:xfrm>
-            <a:off x="1371600" y="3950208"/>
-            <a:ext cx="9997135" cy="484632"/>
-          </a:xfrm>
-          <a:prstGeom prst="rect">
-            <a:avLst/>
-          </a:prstGeom>
-          <a:noFill/>
-        </p:spPr>
-        <p:txBody>
-          <a:bodyPr wrap="square" anchor="t" lIns="0" rIns="0" tIns="0" bIns="0">
-            <a:spAutoFit/>
-          </a:bodyPr>
-          <a:lstStyle/>
-          <a:p>
-            <a:pPr algn="l">
-              <a:lnSpc>
-                <a:spcPct val="110000"/>
-              </a:lnSpc>
-            </a:pPr>
-            <a:r>
-              <a:rPr sz="1600" b="1">
-                <a:solidFill>
-                  <a:srgbClr val="1C2A33"/>
-                </a:solidFill>
-                <a:latin typeface="微软雅黑"/>
-                <a:ea typeface="微软雅黑"/>
-                <a:cs typeface="微软雅黑"/>
-              </a:rPr>
-              <a:t>Step 4 无膜细胞器</a:t>
-            </a:r>
-          </a:p>
-        </p:txBody>
-      </p:sp>
-      <p:sp>
-        <p:nvSpPr>
-          <p:cNvPr id="21" name="Rounded Rectangle 20"/>
-          <p:cNvSpPr/>
-          <p:nvPr/>
-        </p:nvSpPr>
-        <p:spPr>
-          <a:xfrm>
-            <a:off x="640080" y="4663440"/>
-            <a:ext cx="10911535" cy="685800"/>
-          </a:xfrm>
-          <a:prstGeom prst="roundRect">
-            <a:avLst/>
-          </a:prstGeom>
-          <a:solidFill>
-            <a:srgbClr val="FFFFFF"/>
-          </a:solidFill>
-          <a:ln w="22860">
-            <a:solidFill>
-              <a:srgbClr val="2E7D6B"/>
-            </a:solidFill>
-          </a:ln>
-          <a:effectLst/>
-        </p:spPr>
-        <p:style>
-          <a:lnRef idx="1">
-            <a:schemeClr val="accent1"/>
-          </a:lnRef>
-          <a:fillRef idx="3">
-            <a:schemeClr val="accent1"/>
-          </a:fillRef>
-          <a:effectRef idx="2">
-            <a:schemeClr val="accent1"/>
-          </a:effectRef>
-          <a:fontRef idx="minor">
-            <a:schemeClr val="lt1"/>
-          </a:fontRef>
-        </p:style>
-        <p:txBody>
-          <a:bodyPr rtlCol="0" anchor="ctr"/>
-          <a:lstStyle/>
-          <a:p>
-            <a:pPr algn="ctr"/>
-          </a:p>
-        </p:txBody>
-      </p:sp>
-      <p:sp>
-        <p:nvSpPr>
-          <p:cNvPr id="22" name="Oval 21"/>
-          <p:cNvSpPr/>
-          <p:nvPr/>
-        </p:nvSpPr>
-        <p:spPr>
-          <a:xfrm>
-            <a:off x="804672" y="4828032"/>
-            <a:ext cx="457200" cy="457200"/>
-          </a:xfrm>
-          <a:prstGeom prst="ellipse">
-            <a:avLst/>
-          </a:prstGeom>
-          <a:solidFill>
-            <a:srgbClr val="2E7D6B"/>
-          </a:solidFill>
-          <a:ln>
-            <a:noFill/>
-          </a:ln>
-          <a:effectLst/>
-        </p:spPr>
-        <p:style>
-          <a:lnRef idx="1">
-            <a:schemeClr val="accent1"/>
-          </a:lnRef>
-          <a:fillRef idx="3">
-            <a:schemeClr val="accent1"/>
-          </a:fillRef>
-          <a:effectRef idx="2">
-            <a:schemeClr val="accent1"/>
-          </a:effectRef>
-          <a:fontRef idx="minor">
-            <a:schemeClr val="lt1"/>
-          </a:fontRef>
-        </p:style>
-        <p:txBody>
-          <a:bodyPr rtlCol="0" anchor="ctr"/>
-          <a:lstStyle/>
-          <a:p>
-            <a:pPr algn="ctr"/>
-          </a:p>
-        </p:txBody>
-      </p:sp>
-      <p:sp>
-        <p:nvSpPr>
-          <p:cNvPr id="23" name="TextBox 22"/>
-          <p:cNvSpPr txBox="1"/>
-          <p:nvPr/>
-        </p:nvSpPr>
-        <p:spPr>
-          <a:xfrm>
-            <a:off x="804672" y="4882896"/>
-            <a:ext cx="457200" cy="384048"/>
-          </a:xfrm>
-          <a:prstGeom prst="rect">
-            <a:avLst/>
-          </a:prstGeom>
-          <a:noFill/>
-        </p:spPr>
-        <p:txBody>
-          <a:bodyPr wrap="square" anchor="t" lIns="0" rIns="0" tIns="0" bIns="0">
-            <a:spAutoFit/>
-          </a:bodyPr>
-          <a:lstStyle/>
-          <a:p>
-            <a:pPr algn="ctr"/>
-            <a:r>
-              <a:rPr sz="1600" b="1">
-                <a:solidFill>
-                  <a:srgbClr val="FFFFFF"/>
-                </a:solidFill>
-                <a:latin typeface="微软雅黑"/>
-                <a:ea typeface="微软雅黑"/>
-                <a:cs typeface="微软雅黑"/>
-              </a:rPr>
-              <a:t>5</a:t>
-            </a:r>
-          </a:p>
-        </p:txBody>
-      </p:sp>
-      <p:sp>
-        <p:nvSpPr>
-          <p:cNvPr id="24" name="TextBox 23"/>
-          <p:cNvSpPr txBox="1"/>
-          <p:nvPr/>
-        </p:nvSpPr>
-        <p:spPr>
-          <a:xfrm>
-            <a:off x="1371600" y="4773168"/>
-            <a:ext cx="9997135" cy="484632"/>
-          </a:xfrm>
-          <a:prstGeom prst="rect">
-            <a:avLst/>
-          </a:prstGeom>
-          <a:noFill/>
-        </p:spPr>
-        <p:txBody>
-          <a:bodyPr wrap="square" anchor="t" lIns="0" rIns="0" tIns="0" bIns="0">
-            <a:spAutoFit/>
-          </a:bodyPr>
-          <a:lstStyle/>
-          <a:p>
-            <a:pPr algn="l">
-              <a:lnSpc>
-                <a:spcPct val="110000"/>
-              </a:lnSpc>
-            </a:pPr>
-            <a:r>
-              <a:rPr sz="1600" b="1">
-                <a:solidFill>
-                  <a:srgbClr val="1C2A33"/>
-                </a:solidFill>
-                <a:latin typeface="微软雅黑"/>
-                <a:ea typeface="微软雅黑"/>
-                <a:cs typeface="微软雅黑"/>
-              </a:rPr>
-              <a:t>Step 5 动植物差异</a:t>
-            </a:r>
-          </a:p>
-        </p:txBody>
-      </p:sp>
-      <p:sp>
-        <p:nvSpPr>
-          <p:cNvPr id="25" name="Rounded Rectangle 24"/>
-          <p:cNvSpPr/>
-          <p:nvPr/>
-        </p:nvSpPr>
-        <p:spPr>
-          <a:xfrm>
-            <a:off x="640080" y="5486400"/>
-            <a:ext cx="10911535" cy="685800"/>
-          </a:xfrm>
-          <a:prstGeom prst="roundRect">
-            <a:avLst/>
-          </a:prstGeom>
-          <a:solidFill>
-            <a:srgbClr val="FFFFFF"/>
-          </a:solidFill>
-          <a:ln w="22860">
-            <a:solidFill>
-              <a:srgbClr val="2E7D6B"/>
-            </a:solidFill>
-          </a:ln>
-          <a:effectLst/>
-        </p:spPr>
-        <p:style>
-          <a:lnRef idx="1">
-            <a:schemeClr val="accent1"/>
-          </a:lnRef>
-          <a:fillRef idx="3">
-            <a:schemeClr val="accent1"/>
-          </a:fillRef>
-          <a:effectRef idx="2">
-            <a:schemeClr val="accent1"/>
-          </a:effectRef>
-          <a:fontRef idx="minor">
-            <a:schemeClr val="lt1"/>
-          </a:fontRef>
-        </p:style>
-        <p:txBody>
-          <a:bodyPr rtlCol="0" anchor="ctr"/>
-          <a:lstStyle/>
-          <a:p>
-            <a:pPr algn="ctr"/>
-          </a:p>
-        </p:txBody>
-      </p:sp>
-      <p:sp>
-        <p:nvSpPr>
-          <p:cNvPr id="26" name="Oval 25"/>
-          <p:cNvSpPr/>
-          <p:nvPr/>
-        </p:nvSpPr>
-        <p:spPr>
-          <a:xfrm>
-            <a:off x="804672" y="5650992"/>
-            <a:ext cx="457200" cy="457200"/>
-          </a:xfrm>
-          <a:prstGeom prst="ellipse">
-            <a:avLst/>
-          </a:prstGeom>
-          <a:solidFill>
-            <a:srgbClr val="2E7D6B"/>
-          </a:solidFill>
-          <a:ln>
-            <a:noFill/>
-          </a:ln>
-          <a:effectLst/>
-        </p:spPr>
-        <p:style>
-          <a:lnRef idx="1">
-            <a:schemeClr val="accent1"/>
-          </a:lnRef>
-          <a:fillRef idx="3">
-            <a:schemeClr val="accent1"/>
-          </a:fillRef>
-          <a:effectRef idx="2">
-            <a:schemeClr val="accent1"/>
-          </a:effectRef>
-          <a:fontRef idx="minor">
-            <a:schemeClr val="lt1"/>
-          </a:fontRef>
-        </p:style>
-        <p:txBody>
-          <a:bodyPr rtlCol="0" anchor="ctr"/>
-          <a:lstStyle/>
-          <a:p>
-            <a:pPr algn="ctr"/>
-          </a:p>
-        </p:txBody>
-      </p:sp>
-      <p:sp>
-        <p:nvSpPr>
-          <p:cNvPr id="27" name="TextBox 26"/>
-          <p:cNvSpPr txBox="1"/>
-          <p:nvPr/>
-        </p:nvSpPr>
-        <p:spPr>
-          <a:xfrm>
-            <a:off x="804672" y="5705856"/>
-            <a:ext cx="457200" cy="384048"/>
-          </a:xfrm>
-          <a:prstGeom prst="rect">
-            <a:avLst/>
-          </a:prstGeom>
-          <a:noFill/>
-        </p:spPr>
-        <p:txBody>
-          <a:bodyPr wrap="square" anchor="t" lIns="0" rIns="0" tIns="0" bIns="0">
-            <a:spAutoFit/>
-          </a:bodyPr>
-          <a:lstStyle/>
-          <a:p>
-            <a:pPr algn="ctr"/>
-            <a:r>
-              <a:rPr sz="1600" b="1">
-                <a:solidFill>
-                  <a:srgbClr val="FFFFFF"/>
-                </a:solidFill>
-                <a:latin typeface="微软雅黑"/>
-                <a:ea typeface="微软雅黑"/>
-                <a:cs typeface="微软雅黑"/>
-              </a:rPr>
-              <a:t>6</a:t>
-            </a:r>
-          </a:p>
-        </p:txBody>
-      </p:sp>
-      <p:sp>
-        <p:nvSpPr>
-          <p:cNvPr id="28" name="TextBox 27"/>
-          <p:cNvSpPr txBox="1"/>
-          <p:nvPr/>
-        </p:nvSpPr>
-        <p:spPr>
-          <a:xfrm>
-            <a:off x="1371600" y="5596128"/>
-            <a:ext cx="9997135" cy="484632"/>
-          </a:xfrm>
-          <a:prstGeom prst="rect">
-            <a:avLst/>
-          </a:prstGeom>
-          <a:noFill/>
-        </p:spPr>
-        <p:txBody>
-          <a:bodyPr wrap="square" anchor="t" lIns="0" rIns="0" tIns="0" bIns="0">
-            <a:spAutoFit/>
-          </a:bodyPr>
-          <a:lstStyle/>
-          <a:p>
-            <a:pPr algn="l">
-              <a:lnSpc>
-                <a:spcPct val="110000"/>
-              </a:lnSpc>
-            </a:pPr>
-            <a:r>
-              <a:rPr sz="1600" b="1">
-                <a:solidFill>
-                  <a:srgbClr val="1C2A33"/>
-                </a:solidFill>
-                <a:latin typeface="微软雅黑"/>
-                <a:ea typeface="微软雅黑"/>
-                <a:cs typeface="微软雅黑"/>
-              </a:rPr>
-              <a:t>Step 6 练习+作业</a:t>
-            </a:r>
-          </a:p>
-        </p:txBody>
-      </p:sp>
-      <p:sp>
-        <p:nvSpPr>
-          <p:cNvPr id="29" name="TextBox 28"/>
+              <a:t>膜层数</a:t>
+            </a:r>
+          </a:p>
+        </p:txBody>
+      </p:sp>
+      <p:sp>
+        <p:nvSpPr>
+          <p:cNvPr id="18" name="TextBox 17"/>
           <p:cNvSpPr txBox="1"/>
           <p:nvPr/>
         </p:nvSpPr>
@@ -6711,13 +6689,13 @@
             <a:r>
               <a:rPr sz="1300" b="1">
                 <a:solidFill>
-                  <a:srgbClr val="B23A2A"/>
+                  <a:srgbClr val="2E7D6B"/>
                 </a:solidFill>
                 <a:latin typeface="微软雅黑"/>
                 <a:ea typeface="微软雅黑"/>
                 <a:cs typeface="微软雅黑"/>
               </a:rPr>
-              <a:t>易混易错</a:t>
+              <a:t>难点</a:t>
             </a:r>
           </a:p>
         </p:txBody>
@@ -6734,6 +6712,342 @@
             <a:ext cx="822960" cy="30480"/>
           </a:xfrm>
           <a:prstGeom prst="rect">
+            <a:avLst/>
+          </a:prstGeom>
+          <a:solidFill>
+            <a:srgbClr val="2E7D6B"/>
+          </a:solidFill>
+          <a:ln>
+            <a:noFill/>
+          </a:ln>
+          <a:effectLst/>
+        </p:spPr>
+        <p:style>
+          <a:lnRef idx="1">
+            <a:schemeClr val="accent1"/>
+          </a:lnRef>
+          <a:fillRef idx="3">
+            <a:schemeClr val="accent1"/>
+          </a:fillRef>
+          <a:effectRef idx="2">
+            <a:schemeClr val="accent1"/>
+          </a:effectRef>
+          <a:fontRef idx="minor">
+            <a:schemeClr val="lt1"/>
+          </a:fontRef>
+        </p:style>
+        <p:txBody>
+          <a:bodyPr rtlCol="0" anchor="ctr"/>
+          <a:lstStyle/>
+          <a:p>
+            <a:pPr algn="ctr"/>
+          </a:p>
+        </p:txBody>
+      </p:sp>
+      <p:sp>
+        <p:nvSpPr>
+          <p:cNvPr id="5" name="TextBox 4"/>
+          <p:cNvSpPr txBox="1"/>
+          <p:nvPr/>
+        </p:nvSpPr>
+        <p:spPr>
+          <a:xfrm>
+            <a:off x="640080" y="1325880"/>
+            <a:ext cx="10058400" cy="548640"/>
+          </a:xfrm>
+          <a:prstGeom prst="rect">
+            <a:avLst/>
+          </a:prstGeom>
+          <a:noFill/>
+        </p:spPr>
+        <p:txBody>
+          <a:bodyPr wrap="square" anchor="t" lIns="0" rIns="0" tIns="0" bIns="0">
+            <a:spAutoFit/>
+          </a:bodyPr>
+          <a:lstStyle/>
+          <a:p>
+            <a:pPr algn="l"/>
+            <a:r>
+              <a:rPr sz="2600" b="1">
+                <a:solidFill>
+                  <a:srgbClr val="1C2A33"/>
+                </a:solidFill>
+                <a:latin typeface="楷体"/>
+                <a:ea typeface="楷体"/>
+                <a:cs typeface="楷体"/>
+              </a:rPr>
+              <a:t>容易卡住的地方与突破</a:t>
+            </a:r>
+          </a:p>
+        </p:txBody>
+      </p:sp>
+      <p:sp>
+        <p:nvSpPr>
+          <p:cNvPr id="6" name="Rounded Rectangle 5"/>
+          <p:cNvSpPr/>
+          <p:nvPr/>
+        </p:nvSpPr>
+        <p:spPr>
+          <a:xfrm>
+            <a:off x="640080" y="2194560"/>
+            <a:ext cx="3393338" cy="3931920"/>
+          </a:xfrm>
+          <a:prstGeom prst="roundRect">
+            <a:avLst/>
+          </a:prstGeom>
+          <a:solidFill>
+            <a:srgbClr val="FFFFFF"/>
+          </a:solidFill>
+          <a:ln w="20320">
+            <a:solidFill>
+              <a:srgbClr val="2E7D6B"/>
+            </a:solidFill>
+          </a:ln>
+          <a:effectLst/>
+        </p:spPr>
+        <p:style>
+          <a:lnRef idx="1">
+            <a:schemeClr val="accent1"/>
+          </a:lnRef>
+          <a:fillRef idx="3">
+            <a:schemeClr val="accent1"/>
+          </a:fillRef>
+          <a:effectRef idx="2">
+            <a:schemeClr val="accent1"/>
+          </a:effectRef>
+          <a:fontRef idx="minor">
+            <a:schemeClr val="lt1"/>
+          </a:fontRef>
+        </p:style>
+        <p:txBody>
+          <a:bodyPr rtlCol="0" anchor="ctr"/>
+          <a:lstStyle/>
+          <a:p>
+            <a:pPr algn="ctr"/>
+          </a:p>
+        </p:txBody>
+      </p:sp>
+      <p:sp>
+        <p:nvSpPr>
+          <p:cNvPr id="7" name="Oval 6"/>
+          <p:cNvSpPr/>
+          <p:nvPr/>
+        </p:nvSpPr>
+        <p:spPr>
+          <a:xfrm>
+            <a:off x="868680" y="2423160"/>
+            <a:ext cx="548640" cy="548640"/>
+          </a:xfrm>
+          <a:prstGeom prst="ellipse">
+            <a:avLst/>
+          </a:prstGeom>
+          <a:solidFill>
+            <a:srgbClr val="2E7D6B"/>
+          </a:solidFill>
+          <a:ln>
+            <a:noFill/>
+          </a:ln>
+          <a:effectLst/>
+        </p:spPr>
+        <p:style>
+          <a:lnRef idx="1">
+            <a:schemeClr val="accent1"/>
+          </a:lnRef>
+          <a:fillRef idx="3">
+            <a:schemeClr val="accent1"/>
+          </a:fillRef>
+          <a:effectRef idx="2">
+            <a:schemeClr val="accent1"/>
+          </a:effectRef>
+          <a:fontRef idx="minor">
+            <a:schemeClr val="lt1"/>
+          </a:fontRef>
+        </p:style>
+        <p:txBody>
+          <a:bodyPr rtlCol="0" anchor="ctr"/>
+          <a:lstStyle/>
+          <a:p>
+            <a:pPr algn="ctr"/>
+          </a:p>
+        </p:txBody>
+      </p:sp>
+      <p:sp>
+        <p:nvSpPr>
+          <p:cNvPr id="8" name="TextBox 7"/>
+          <p:cNvSpPr txBox="1"/>
+          <p:nvPr/>
+        </p:nvSpPr>
+        <p:spPr>
+          <a:xfrm>
+            <a:off x="868680" y="2496312"/>
+            <a:ext cx="548640" cy="411480"/>
+          </a:xfrm>
+          <a:prstGeom prst="rect">
+            <a:avLst/>
+          </a:prstGeom>
+          <a:noFill/>
+        </p:spPr>
+        <p:txBody>
+          <a:bodyPr wrap="square" anchor="t" lIns="0" rIns="0" tIns="0" bIns="0">
+            <a:spAutoFit/>
+          </a:bodyPr>
+          <a:lstStyle/>
+          <a:p>
+            <a:pPr algn="ctr"/>
+            <a:r>
+              <a:rPr sz="2000" b="1">
+                <a:solidFill>
+                  <a:srgbClr val="FFFFFF"/>
+                </a:solidFill>
+                <a:latin typeface="微软雅黑"/>
+                <a:ea typeface="微软雅黑"/>
+                <a:cs typeface="微软雅黑"/>
+              </a:rPr>
+              <a:t>1</a:t>
+            </a:r>
+          </a:p>
+        </p:txBody>
+      </p:sp>
+      <p:sp>
+        <p:nvSpPr>
+          <p:cNvPr id="9" name="TextBox 8"/>
+          <p:cNvSpPr txBox="1"/>
+          <p:nvPr/>
+        </p:nvSpPr>
+        <p:spPr>
+          <a:xfrm>
+            <a:off x="1554480" y="2450592"/>
+            <a:ext cx="2296058" cy="731520"/>
+          </a:xfrm>
+          <a:prstGeom prst="rect">
+            <a:avLst/>
+          </a:prstGeom>
+          <a:noFill/>
+        </p:spPr>
+        <p:txBody>
+          <a:bodyPr wrap="square" anchor="t" lIns="0" rIns="0" tIns="0" bIns="0">
+            <a:spAutoFit/>
+          </a:bodyPr>
+          <a:lstStyle/>
+          <a:p>
+            <a:pPr algn="l">
+              <a:lnSpc>
+                <a:spcPct val="130000"/>
+              </a:lnSpc>
+            </a:pPr>
+            <a:r>
+              <a:rPr sz="1650" b="1">
+                <a:solidFill>
+                  <a:srgbClr val="1C2A33"/>
+                </a:solidFill>
+                <a:latin typeface="楷体"/>
+                <a:ea typeface="楷体"/>
+                <a:cs typeface="楷体"/>
+              </a:rPr>
+              <a:t>内质网高尔基体分工。原因</a:t>
+            </a:r>
+          </a:p>
+        </p:txBody>
+      </p:sp>
+      <p:sp>
+        <p:nvSpPr>
+          <p:cNvPr id="10" name="TextBox 9"/>
+          <p:cNvSpPr txBox="1"/>
+          <p:nvPr/>
+        </p:nvSpPr>
+        <p:spPr>
+          <a:xfrm>
+            <a:off x="914400" y="3246120"/>
+            <a:ext cx="2844698" cy="2743200"/>
+          </a:xfrm>
+          <a:prstGeom prst="rect">
+            <a:avLst/>
+          </a:prstGeom>
+          <a:noFill/>
+        </p:spPr>
+        <p:txBody>
+          <a:bodyPr wrap="square" anchor="t" lIns="0" rIns="0" tIns="0" bIns="0">
+            <a:spAutoFit/>
+          </a:bodyPr>
+          <a:lstStyle/>
+          <a:p>
+            <a:pPr algn="l">
+              <a:lnSpc>
+                <a:spcPct val="150000"/>
+              </a:lnSpc>
+            </a:pPr>
+            <a:r>
+              <a:rPr sz="1400" b="0">
+                <a:solidFill>
+                  <a:srgbClr val="1C2A33"/>
+                </a:solidFill>
+                <a:latin typeface="楷体"/>
+                <a:ea typeface="楷体"/>
+                <a:cs typeface="楷体"/>
+              </a:rPr>
+              <a:t>突破：二者都"加工"易混，需明确谁先谁后、各管什么。</a:t>
+            </a:r>
+          </a:p>
+        </p:txBody>
+      </p:sp>
+      <p:sp>
+        <p:nvSpPr>
+          <p:cNvPr id="11" name="Rounded Rectangle 10"/>
+          <p:cNvSpPr/>
+          <p:nvPr/>
+        </p:nvSpPr>
+        <p:spPr>
+          <a:xfrm>
+            <a:off x="4399178" y="2194560"/>
+            <a:ext cx="3393338" cy="3931920"/>
+          </a:xfrm>
+          <a:prstGeom prst="roundRect">
+            <a:avLst/>
+          </a:prstGeom>
+          <a:solidFill>
+            <a:srgbClr val="FFFFFF"/>
+          </a:solidFill>
+          <a:ln w="20320">
+            <a:solidFill>
+              <a:srgbClr val="B23A2A"/>
+            </a:solidFill>
+          </a:ln>
+          <a:effectLst/>
+        </p:spPr>
+        <p:style>
+          <a:lnRef idx="1">
+            <a:schemeClr val="accent1"/>
+          </a:lnRef>
+          <a:fillRef idx="3">
+            <a:schemeClr val="accent1"/>
+          </a:fillRef>
+          <a:effectRef idx="2">
+            <a:schemeClr val="accent1"/>
+          </a:effectRef>
+          <a:fontRef idx="minor">
+            <a:schemeClr val="lt1"/>
+          </a:fontRef>
+        </p:style>
+        <p:txBody>
+          <a:bodyPr rtlCol="0" anchor="ctr"/>
+          <a:lstStyle/>
+          <a:p>
+            <a:pPr algn="ctr"/>
+          </a:p>
+        </p:txBody>
+      </p:sp>
+      <p:sp>
+        <p:nvSpPr>
+          <p:cNvPr id="12" name="Oval 11"/>
+          <p:cNvSpPr/>
+          <p:nvPr/>
+        </p:nvSpPr>
+        <p:spPr>
+          <a:xfrm>
+            <a:off x="4627778" y="2423160"/>
+            <a:ext cx="548640" cy="548640"/>
+          </a:xfrm>
+          <a:prstGeom prst="ellipse">
             <a:avLst/>
           </a:prstGeom>
           <a:solidFill>
@@ -6768,14 +7082,133 @@
       </p:sp>
       <p:sp>
         <p:nvSpPr>
-          <p:cNvPr id="5" name="Rounded Rectangle 4"/>
+          <p:cNvPr id="13" name="TextBox 12"/>
+          <p:cNvSpPr txBox="1"/>
+          <p:nvPr/>
+        </p:nvSpPr>
+        <p:spPr>
+          <a:xfrm>
+            <a:off x="4627778" y="2496312"/>
+            <a:ext cx="548640" cy="411480"/>
+          </a:xfrm>
+          <a:prstGeom prst="rect">
+            <a:avLst/>
+          </a:prstGeom>
+          <a:noFill/>
+        </p:spPr>
+        <p:txBody>
+          <a:bodyPr wrap="square" anchor="t" lIns="0" rIns="0" tIns="0" bIns="0">
+            <a:spAutoFit/>
+          </a:bodyPr>
+          <a:lstStyle/>
+          <a:p>
+            <a:pPr algn="ctr"/>
+            <a:r>
+              <a:rPr sz="2000" b="1">
+                <a:solidFill>
+                  <a:srgbClr val="FFFFFF"/>
+                </a:solidFill>
+                <a:latin typeface="微软雅黑"/>
+                <a:ea typeface="微软雅黑"/>
+                <a:cs typeface="微软雅黑"/>
+              </a:rPr>
+              <a:t>2</a:t>
+            </a:r>
+          </a:p>
+        </p:txBody>
+      </p:sp>
+      <p:sp>
+        <p:nvSpPr>
+          <p:cNvPr id="14" name="TextBox 13"/>
+          <p:cNvSpPr txBox="1"/>
+          <p:nvPr/>
+        </p:nvSpPr>
+        <p:spPr>
+          <a:xfrm>
+            <a:off x="5313578" y="2450592"/>
+            <a:ext cx="2296058" cy="731520"/>
+          </a:xfrm>
+          <a:prstGeom prst="rect">
+            <a:avLst/>
+          </a:prstGeom>
+          <a:noFill/>
+        </p:spPr>
+        <p:txBody>
+          <a:bodyPr wrap="square" anchor="t" lIns="0" rIns="0" tIns="0" bIns="0">
+            <a:spAutoFit/>
+          </a:bodyPr>
+          <a:lstStyle/>
+          <a:p>
+            <a:pPr algn="l">
+              <a:lnSpc>
+                <a:spcPct val="130000"/>
+              </a:lnSpc>
+            </a:pPr>
+            <a:r>
+              <a:rPr sz="1650" b="1">
+                <a:solidFill>
+                  <a:srgbClr val="1C2A33"/>
+                </a:solidFill>
+                <a:latin typeface="楷体"/>
+                <a:ea typeface="楷体"/>
+                <a:cs typeface="楷体"/>
+              </a:rPr>
+              <a:t>双层膜对比。原因</a:t>
+            </a:r>
+          </a:p>
+        </p:txBody>
+      </p:sp>
+      <p:sp>
+        <p:nvSpPr>
+          <p:cNvPr id="15" name="TextBox 14"/>
+          <p:cNvSpPr txBox="1"/>
+          <p:nvPr/>
+        </p:nvSpPr>
+        <p:spPr>
+          <a:xfrm>
+            <a:off x="4673498" y="3246120"/>
+            <a:ext cx="2844698" cy="2743200"/>
+          </a:xfrm>
+          <a:prstGeom prst="rect">
+            <a:avLst/>
+          </a:prstGeom>
+          <a:noFill/>
+        </p:spPr>
+        <p:txBody>
+          <a:bodyPr wrap="square" anchor="t" lIns="0" rIns="0" tIns="0" bIns="0">
+            <a:spAutoFit/>
+          </a:bodyPr>
+          <a:lstStyle/>
+          <a:p>
+            <a:pPr algn="l">
+              <a:lnSpc>
+                <a:spcPct val="150000"/>
+              </a:lnSpc>
+            </a:pPr>
+            <a:r>
+              <a:rPr sz="1400" b="0">
+                <a:solidFill>
+                  <a:srgbClr val="1C2A33"/>
+                </a:solidFill>
+                <a:latin typeface="楷体"/>
+                <a:ea typeface="楷体"/>
+                <a:cs typeface="楷体"/>
+              </a:rPr>
+              <a:t>突破：线粒体叶绿体都双层膜但功能相反，易错，需表。</a:t>
+            </a:r>
+          </a:p>
+        </p:txBody>
+      </p:sp>
+      <p:sp>
+        <p:nvSpPr>
+          <p:cNvPr id="16" name="Rounded Rectangle 15"/>
           <p:cNvSpPr/>
           <p:nvPr/>
         </p:nvSpPr>
         <p:spPr>
           <a:xfrm>
-            <a:off x="640080" y="1417320"/>
-            <a:ext cx="5349240" cy="2057400"/>
+            <a:off x="8158276" y="2194560"/>
+            <a:ext cx="3393338" cy="3931920"/>
           </a:xfrm>
           <a:prstGeom prst="roundRect">
             <a:avLst/>
@@ -6783,9 +7216,9 @@
           <a:solidFill>
             <a:srgbClr val="FFFFFF"/>
           </a:solidFill>
-          <a:ln w="22860">
+          <a:ln w="20320">
             <a:solidFill>
-              <a:srgbClr val="B23A2A"/>
+              <a:srgbClr val="C8A86B"/>
             </a:solidFill>
           </a:ln>
           <a:effectLst/>
@@ -6814,20 +7247,20 @@
       </p:sp>
       <p:sp>
         <p:nvSpPr>
-          <p:cNvPr id="6" name="Oval 5"/>
+          <p:cNvPr id="17" name="Oval 16"/>
           <p:cNvSpPr/>
           <p:nvPr/>
         </p:nvSpPr>
         <p:spPr>
           <a:xfrm>
-            <a:off x="804672" y="1581912"/>
-            <a:ext cx="457200" cy="457200"/>
+            <a:off x="8386876" y="2423160"/>
+            <a:ext cx="548640" cy="548640"/>
           </a:xfrm>
           <a:prstGeom prst="ellipse">
             <a:avLst/>
           </a:prstGeom>
           <a:solidFill>
-            <a:srgbClr val="B23A2A"/>
+            <a:srgbClr val="C8A86B"/>
           </a:solidFill>
           <a:ln>
             <a:noFill/>
@@ -6858,14 +7291,14 @@
       </p:sp>
       <p:sp>
         <p:nvSpPr>
-          <p:cNvPr id="7" name="TextBox 6"/>
+          <p:cNvPr id="18" name="TextBox 17"/>
           <p:cNvSpPr txBox="1"/>
           <p:nvPr/>
         </p:nvSpPr>
         <p:spPr>
           <a:xfrm>
-            <a:off x="804672" y="1636776"/>
-            <a:ext cx="457200" cy="384048"/>
+            <a:off x="8386876" y="2496312"/>
+            <a:ext cx="548640" cy="411480"/>
           </a:xfrm>
           <a:prstGeom prst="rect">
             <a:avLst/>
@@ -6880,7 +7313,7 @@
           <a:p>
             <a:pPr algn="ctr"/>
             <a:r>
-              <a:rPr sz="1600" b="1">
+              <a:rPr sz="2000" b="1">
                 <a:solidFill>
                   <a:srgbClr val="FFFFFF"/>
                 </a:solidFill>
@@ -6888,21 +7321,21 @@
                 <a:ea typeface="微软雅黑"/>
                 <a:cs typeface="微软雅黑"/>
               </a:rPr>
-              <a:t>!</a:t>
-            </a:r>
-          </a:p>
-        </p:txBody>
-      </p:sp>
-      <p:sp>
-        <p:nvSpPr>
-          <p:cNvPr id="8" name="TextBox 7"/>
+              <a:t>3</a:t>
+            </a:r>
+          </a:p>
+        </p:txBody>
+      </p:sp>
+      <p:sp>
+        <p:nvSpPr>
+          <p:cNvPr id="19" name="TextBox 18"/>
           <p:cNvSpPr txBox="1"/>
           <p:nvPr/>
         </p:nvSpPr>
         <p:spPr>
           <a:xfrm>
-            <a:off x="1371600" y="1527048"/>
-            <a:ext cx="4434840" cy="457200"/>
+            <a:off x="9072676" y="2450592"/>
+            <a:ext cx="2296058" cy="731520"/>
           </a:xfrm>
           <a:prstGeom prst="rect">
             <a:avLst/>
@@ -6917,52 +7350,11 @@
           <a:p>
             <a:pPr algn="l">
               <a:lnSpc>
-                <a:spcPct val="110000"/>
+                <a:spcPct val="130000"/>
               </a:lnSpc>
             </a:pPr>
             <a:r>
-              <a:rPr sz="1600" b="1">
-                <a:solidFill>
-                  <a:srgbClr val="1C2A33"/>
-                </a:solidFill>
-                <a:latin typeface="微软雅黑"/>
-                <a:ea typeface="微软雅黑"/>
-                <a:cs typeface="微软雅黑"/>
-              </a:rPr>
-              <a:t/>
-            </a:r>
-          </a:p>
-        </p:txBody>
-      </p:sp>
-      <p:sp>
-        <p:nvSpPr>
-          <p:cNvPr id="9" name="TextBox 8"/>
-          <p:cNvSpPr txBox="1"/>
-          <p:nvPr/>
-        </p:nvSpPr>
-        <p:spPr>
-          <a:xfrm>
-            <a:off x="1371600" y="1965960"/>
-            <a:ext cx="4434840" cy="1417320"/>
-          </a:xfrm>
-          <a:prstGeom prst="rect">
-            <a:avLst/>
-          </a:prstGeom>
-          <a:noFill/>
-        </p:spPr>
-        <p:txBody>
-          <a:bodyPr wrap="square" anchor="t" lIns="0" rIns="0" tIns="0" bIns="0">
-            <a:spAutoFit/>
-          </a:bodyPr>
-          <a:lstStyle/>
-          <a:p>
-            <a:pPr algn="l">
-              <a:lnSpc>
-                <a:spcPct val="128000"/>
-              </a:lnSpc>
-            </a:pPr>
-            <a:r>
-              <a:rPr sz="1400" b="0">
+              <a:rPr sz="1650" b="1">
                 <a:solidFill>
                   <a:srgbClr val="1C2A33"/>
                 </a:solidFill>
@@ -6970,111 +7362,21 @@
                 <a:ea typeface="楷体"/>
                 <a:cs typeface="楷体"/>
               </a:rPr>
-              <a:t>① 内质网高尔基体分工。原因：二者都"加工"易混，需明确谁先谁后、各管什么。</a:t>
-            </a:r>
-          </a:p>
-        </p:txBody>
-      </p:sp>
-      <p:sp>
-        <p:nvSpPr>
-          <p:cNvPr id="10" name="Rounded Rectangle 9"/>
-          <p:cNvSpPr/>
-          <p:nvPr/>
-        </p:nvSpPr>
-        <p:spPr>
-          <a:xfrm>
-            <a:off x="6263640" y="1417320"/>
-            <a:ext cx="5349240" cy="2057400"/>
-          </a:xfrm>
-          <a:prstGeom prst="roundRect">
-            <a:avLst/>
-          </a:prstGeom>
-          <a:solidFill>
-            <a:srgbClr val="FFFFFF"/>
-          </a:solidFill>
-          <a:ln w="22860">
-            <a:solidFill>
-              <a:srgbClr val="B23A2A"/>
-            </a:solidFill>
-          </a:ln>
-          <a:effectLst/>
-        </p:spPr>
-        <p:style>
-          <a:lnRef idx="1">
-            <a:schemeClr val="accent1"/>
-          </a:lnRef>
-          <a:fillRef idx="3">
-            <a:schemeClr val="accent1"/>
-          </a:fillRef>
-          <a:effectRef idx="2">
-            <a:schemeClr val="accent1"/>
-          </a:effectRef>
-          <a:fontRef idx="minor">
-            <a:schemeClr val="lt1"/>
-          </a:fontRef>
-        </p:style>
-        <p:txBody>
-          <a:bodyPr rtlCol="0" anchor="ctr"/>
-          <a:lstStyle/>
-          <a:p>
-            <a:pPr algn="ctr"/>
-          </a:p>
-        </p:txBody>
-      </p:sp>
-      <p:sp>
-        <p:nvSpPr>
-          <p:cNvPr id="11" name="Oval 10"/>
-          <p:cNvSpPr/>
-          <p:nvPr/>
-        </p:nvSpPr>
-        <p:spPr>
-          <a:xfrm>
-            <a:off x="6428232" y="1581912"/>
-            <a:ext cx="457200" cy="457200"/>
-          </a:xfrm>
-          <a:prstGeom prst="ellipse">
-            <a:avLst/>
-          </a:prstGeom>
-          <a:solidFill>
-            <a:srgbClr val="B23A2A"/>
-          </a:solidFill>
-          <a:ln>
-            <a:noFill/>
-          </a:ln>
-          <a:effectLst/>
-        </p:spPr>
-        <p:style>
-          <a:lnRef idx="1">
-            <a:schemeClr val="accent1"/>
-          </a:lnRef>
-          <a:fillRef idx="3">
-            <a:schemeClr val="accent1"/>
-          </a:fillRef>
-          <a:effectRef idx="2">
-            <a:schemeClr val="accent1"/>
-          </a:effectRef>
-          <a:fontRef idx="minor">
-            <a:schemeClr val="lt1"/>
-          </a:fontRef>
-        </p:style>
-        <p:txBody>
-          <a:bodyPr rtlCol="0" anchor="ctr"/>
-          <a:lstStyle/>
-          <a:p>
-            <a:pPr algn="ctr"/>
-          </a:p>
-        </p:txBody>
-      </p:sp>
-      <p:sp>
-        <p:nvSpPr>
-          <p:cNvPr id="12" name="TextBox 11"/>
+              <a:t>无膜细胞器。原因</a:t>
+            </a:r>
+          </a:p>
+        </p:txBody>
+      </p:sp>
+      <p:sp>
+        <p:nvSpPr>
+          <p:cNvPr id="20" name="TextBox 19"/>
           <p:cNvSpPr txBox="1"/>
           <p:nvPr/>
         </p:nvSpPr>
         <p:spPr>
           <a:xfrm>
-            <a:off x="6428232" y="1636776"/>
-            <a:ext cx="457200" cy="384048"/>
+            <a:off x="8432596" y="3246120"/>
+            <a:ext cx="2844698" cy="2743200"/>
           </a:xfrm>
           <a:prstGeom prst="rect">
             <a:avLst/>
@@ -7087,87 +7389,9 @@
           </a:bodyPr>
           <a:lstStyle/>
           <a:p>
-            <a:pPr algn="ctr"/>
-            <a:r>
-              <a:rPr sz="1600" b="1">
-                <a:solidFill>
-                  <a:srgbClr val="FFFFFF"/>
-                </a:solidFill>
-                <a:latin typeface="微软雅黑"/>
-                <a:ea typeface="微软雅黑"/>
-                <a:cs typeface="微软雅黑"/>
-              </a:rPr>
-              <a:t>!</a:t>
-            </a:r>
-          </a:p>
-        </p:txBody>
-      </p:sp>
-      <p:sp>
-        <p:nvSpPr>
-          <p:cNvPr id="13" name="TextBox 12"/>
-          <p:cNvSpPr txBox="1"/>
-          <p:nvPr/>
-        </p:nvSpPr>
-        <p:spPr>
-          <a:xfrm>
-            <a:off x="6995160" y="1527048"/>
-            <a:ext cx="4434840" cy="457200"/>
-          </a:xfrm>
-          <a:prstGeom prst="rect">
-            <a:avLst/>
-          </a:prstGeom>
-          <a:noFill/>
-        </p:spPr>
-        <p:txBody>
-          <a:bodyPr wrap="square" anchor="t" lIns="0" rIns="0" tIns="0" bIns="0">
-            <a:spAutoFit/>
-          </a:bodyPr>
-          <a:lstStyle/>
-          <a:p>
             <a:pPr algn="l">
               <a:lnSpc>
-                <a:spcPct val="110000"/>
-              </a:lnSpc>
-            </a:pPr>
-            <a:r>
-              <a:rPr sz="1600" b="1">
-                <a:solidFill>
-                  <a:srgbClr val="1C2A33"/>
-                </a:solidFill>
-                <a:latin typeface="微软雅黑"/>
-                <a:ea typeface="微软雅黑"/>
-                <a:cs typeface="微软雅黑"/>
-              </a:rPr>
-              <a:t/>
-            </a:r>
-          </a:p>
-        </p:txBody>
-      </p:sp>
-      <p:sp>
-        <p:nvSpPr>
-          <p:cNvPr id="14" name="TextBox 13"/>
-          <p:cNvSpPr txBox="1"/>
-          <p:nvPr/>
-        </p:nvSpPr>
-        <p:spPr>
-          <a:xfrm>
-            <a:off x="6995160" y="1965960"/>
-            <a:ext cx="4434840" cy="1417320"/>
-          </a:xfrm>
-          <a:prstGeom prst="rect">
-            <a:avLst/>
-          </a:prstGeom>
-          <a:noFill/>
-        </p:spPr>
-        <p:txBody>
-          <a:bodyPr wrap="square" anchor="t" lIns="0" rIns="0" tIns="0" bIns="0">
-            <a:spAutoFit/>
-          </a:bodyPr>
-          <a:lstStyle/>
-          <a:p>
-            <a:pPr algn="l">
-              <a:lnSpc>
-                <a:spcPct val="128000"/>
+                <a:spcPct val="150000"/>
               </a:lnSpc>
             </a:pPr>
             <a:r>
@@ -7179,223 +7403,14 @@
                 <a:ea typeface="楷体"/>
                 <a:cs typeface="楷体"/>
               </a:rPr>
-              <a:t>② 双层膜对比。原因：线粒体叶绿体都双层膜但功能相反，易错，需表。</a:t>
-            </a:r>
-          </a:p>
-        </p:txBody>
-      </p:sp>
-      <p:sp>
-        <p:nvSpPr>
-          <p:cNvPr id="15" name="Rounded Rectangle 14"/>
-          <p:cNvSpPr/>
-          <p:nvPr/>
-        </p:nvSpPr>
-        <p:spPr>
-          <a:xfrm>
-            <a:off x="640080" y="3703320"/>
-            <a:ext cx="5349240" cy="2057400"/>
-          </a:xfrm>
-          <a:prstGeom prst="roundRect">
-            <a:avLst/>
-          </a:prstGeom>
-          <a:solidFill>
-            <a:srgbClr val="FFFFFF"/>
-          </a:solidFill>
-          <a:ln w="22860">
-            <a:solidFill>
-              <a:srgbClr val="B23A2A"/>
-            </a:solidFill>
-          </a:ln>
-          <a:effectLst/>
-        </p:spPr>
-        <p:style>
-          <a:lnRef idx="1">
-            <a:schemeClr val="accent1"/>
-          </a:lnRef>
-          <a:fillRef idx="3">
-            <a:schemeClr val="accent1"/>
-          </a:fillRef>
-          <a:effectRef idx="2">
-            <a:schemeClr val="accent1"/>
-          </a:effectRef>
-          <a:fontRef idx="minor">
-            <a:schemeClr val="lt1"/>
-          </a:fontRef>
-        </p:style>
-        <p:txBody>
-          <a:bodyPr rtlCol="0" anchor="ctr"/>
-          <a:lstStyle/>
-          <a:p>
-            <a:pPr algn="ctr"/>
-          </a:p>
-        </p:txBody>
-      </p:sp>
-      <p:sp>
-        <p:nvSpPr>
-          <p:cNvPr id="16" name="Oval 15"/>
-          <p:cNvSpPr/>
-          <p:nvPr/>
-        </p:nvSpPr>
-        <p:spPr>
-          <a:xfrm>
-            <a:off x="804672" y="3867912"/>
-            <a:ext cx="457200" cy="457200"/>
-          </a:xfrm>
-          <a:prstGeom prst="ellipse">
-            <a:avLst/>
-          </a:prstGeom>
-          <a:solidFill>
-            <a:srgbClr val="B23A2A"/>
-          </a:solidFill>
-          <a:ln>
-            <a:noFill/>
-          </a:ln>
-          <a:effectLst/>
-        </p:spPr>
-        <p:style>
-          <a:lnRef idx="1">
-            <a:schemeClr val="accent1"/>
-          </a:lnRef>
-          <a:fillRef idx="3">
-            <a:schemeClr val="accent1"/>
-          </a:fillRef>
-          <a:effectRef idx="2">
-            <a:schemeClr val="accent1"/>
-          </a:effectRef>
-          <a:fontRef idx="minor">
-            <a:schemeClr val="lt1"/>
-          </a:fontRef>
-        </p:style>
-        <p:txBody>
-          <a:bodyPr rtlCol="0" anchor="ctr"/>
-          <a:lstStyle/>
-          <a:p>
-            <a:pPr algn="ctr"/>
-          </a:p>
-        </p:txBody>
-      </p:sp>
-      <p:sp>
-        <p:nvSpPr>
-          <p:cNvPr id="17" name="TextBox 16"/>
-          <p:cNvSpPr txBox="1"/>
-          <p:nvPr/>
-        </p:nvSpPr>
-        <p:spPr>
-          <a:xfrm>
-            <a:off x="804672" y="3922776"/>
-            <a:ext cx="457200" cy="384048"/>
-          </a:xfrm>
-          <a:prstGeom prst="rect">
-            <a:avLst/>
-          </a:prstGeom>
-          <a:noFill/>
-        </p:spPr>
-        <p:txBody>
-          <a:bodyPr wrap="square" anchor="t" lIns="0" rIns="0" tIns="0" bIns="0">
-            <a:spAutoFit/>
-          </a:bodyPr>
-          <a:lstStyle/>
-          <a:p>
-            <a:pPr algn="ctr"/>
-            <a:r>
-              <a:rPr sz="1600" b="1">
-                <a:solidFill>
-                  <a:srgbClr val="FFFFFF"/>
-                </a:solidFill>
-                <a:latin typeface="微软雅黑"/>
-                <a:ea typeface="微软雅黑"/>
-                <a:cs typeface="微软雅黑"/>
-              </a:rPr>
-              <a:t>!</a:t>
-            </a:r>
-          </a:p>
-        </p:txBody>
-      </p:sp>
-      <p:sp>
-        <p:nvSpPr>
-          <p:cNvPr id="18" name="TextBox 17"/>
-          <p:cNvSpPr txBox="1"/>
-          <p:nvPr/>
-        </p:nvSpPr>
-        <p:spPr>
-          <a:xfrm>
-            <a:off x="1371600" y="3813048"/>
-            <a:ext cx="4434840" cy="457200"/>
-          </a:xfrm>
-          <a:prstGeom prst="rect">
-            <a:avLst/>
-          </a:prstGeom>
-          <a:noFill/>
-        </p:spPr>
-        <p:txBody>
-          <a:bodyPr wrap="square" anchor="t" lIns="0" rIns="0" tIns="0" bIns="0">
-            <a:spAutoFit/>
-          </a:bodyPr>
-          <a:lstStyle/>
-          <a:p>
-            <a:pPr algn="l">
-              <a:lnSpc>
-                <a:spcPct val="110000"/>
-              </a:lnSpc>
-            </a:pPr>
-            <a:r>
-              <a:rPr sz="1600" b="1">
-                <a:solidFill>
-                  <a:srgbClr val="1C2A33"/>
-                </a:solidFill>
-                <a:latin typeface="微软雅黑"/>
-                <a:ea typeface="微软雅黑"/>
-                <a:cs typeface="微软雅黑"/>
-              </a:rPr>
-              <a:t/>
-            </a:r>
-          </a:p>
-        </p:txBody>
-      </p:sp>
-      <p:sp>
-        <p:nvSpPr>
-          <p:cNvPr id="19" name="TextBox 18"/>
-          <p:cNvSpPr txBox="1"/>
-          <p:nvPr/>
-        </p:nvSpPr>
-        <p:spPr>
-          <a:xfrm>
-            <a:off x="1371600" y="4251960"/>
-            <a:ext cx="4434840" cy="1417320"/>
-          </a:xfrm>
-          <a:prstGeom prst="rect">
-            <a:avLst/>
-          </a:prstGeom>
-          <a:noFill/>
-        </p:spPr>
-        <p:txBody>
-          <a:bodyPr wrap="square" anchor="t" lIns="0" rIns="0" tIns="0" bIns="0">
-            <a:spAutoFit/>
-          </a:bodyPr>
-          <a:lstStyle/>
-          <a:p>
-            <a:pPr algn="l">
-              <a:lnSpc>
-                <a:spcPct val="128000"/>
-              </a:lnSpc>
-            </a:pPr>
-            <a:r>
-              <a:rPr sz="1400" b="0">
-                <a:solidFill>
-                  <a:srgbClr val="1C2A33"/>
-                </a:solidFill>
-                <a:latin typeface="楷体"/>
-                <a:ea typeface="楷体"/>
-                <a:cs typeface="楷体"/>
-              </a:rPr>
-              <a:t>③ 无膜细胞器。原因：核糖体中心体无膜，学生易漏，需强调。</a:t>
-            </a:r>
-          </a:p>
-        </p:txBody>
-      </p:sp>
-      <p:sp>
-        <p:nvSpPr>
-          <p:cNvPr id="20" name="TextBox 19"/>
+              <a:t>突破：核糖体中心体无膜，学生易漏，需强调。</a:t>
+            </a:r>
+          </a:p>
+        </p:txBody>
+      </p:sp>
+      <p:sp>
+        <p:nvSpPr>
+          <p:cNvPr id="21" name="TextBox 20"/>
           <p:cNvSpPr txBox="1"/>
           <p:nvPr/>
         </p:nvSpPr>
@@ -7522,13 +7537,13 @@
             <a:r>
               <a:rPr sz="1300" b="1">
                 <a:solidFill>
-                  <a:srgbClr val="C8A86B"/>
+                  <a:srgbClr val="2E7D6B"/>
                 </a:solidFill>
                 <a:latin typeface="微软雅黑"/>
                 <a:ea typeface="微软雅黑"/>
                 <a:cs typeface="微软雅黑"/>
               </a:rPr>
-              <a:t>要点板书</a:t>
+              <a:t>板书精华</a:t>
             </a:r>
           </a:p>
         </p:txBody>
@@ -7548,7 +7563,7 @@
             <a:avLst/>
           </a:prstGeom>
           <a:solidFill>
-            <a:srgbClr val="C8A86B"/>
+            <a:srgbClr val="2E7D6B"/>
           </a:solidFill>
           <a:ln>
             <a:noFill/>
@@ -7585,20 +7600,15 @@
         </p:nvSpPr>
         <p:spPr>
           <a:xfrm>
-            <a:off x="640080" y="1417320"/>
-            <a:ext cx="10911535" cy="5394960"/>
+            <a:off x="640080" y="1737360"/>
+            <a:ext cx="10911535" cy="502920"/>
           </a:xfrm>
           <a:prstGeom prst="roundRect">
             <a:avLst/>
           </a:prstGeom>
           <a:solidFill>
-            <a:srgbClr val="FFFFFF"/>
+            <a:srgbClr val="1C2A33"/>
           </a:solidFill>
-          <a:ln w="25400">
-            <a:solidFill>
-              <a:srgbClr val="C8A86B"/>
-            </a:solidFill>
-          </a:ln>
           <a:effectLst/>
         </p:spPr>
         <p:style>
@@ -7631,8 +7641,8 @@
         </p:nvSpPr>
         <p:spPr>
           <a:xfrm>
-            <a:off x="914400" y="1554480"/>
-            <a:ext cx="10362895" cy="5120640"/>
+            <a:off x="914400" y="1810512"/>
+            <a:ext cx="3108960" cy="365760"/>
           </a:xfrm>
           <a:prstGeom prst="rect">
             <a:avLst/>
@@ -7645,38 +7655,17 @@
           </a:bodyPr>
           <a:lstStyle/>
           <a:p>
-            <a:pPr algn="l">
-              <a:lnSpc>
-                <a:spcPct val="110000"/>
-              </a:lnSpc>
-              <a:spcAft>
-                <a:spcPts val="100"/>
-              </a:spcAft>
-            </a:pPr>
-            <a:r>
-              <a:rPr sz="1300" b="0">
-                <a:solidFill>
-                  <a:srgbClr val="1C2A33"/>
+            <a:pPr algn="l"/>
+            <a:r>
+              <a:rPr sz="1500" b="1">
+                <a:solidFill>
+                  <a:srgbClr val="FFFFFF"/>
                 </a:solidFill>
                 <a:latin typeface="微软雅黑"/>
                 <a:ea typeface="微软雅黑"/>
                 <a:cs typeface="微软雅黑"/>
               </a:rPr>
-              <a:t>┌── 细胞器分工 ──┐
-│ 双层膜: │
-│ 线粒体(呼吸) │
-│ 叶绿体(光合) │
-│ 单层膜: │
-│ 内质网(加工) │
-│ 高尔基(包装)│
-│ 溶酶体(水解)│
-│ 液泡 │
-│ 无膜: │
-│ 核糖体(合成)│
-│ 中心体(分裂)│
-│ 植:叶/液 动:│
-│ 中心体 │
-└────────────┘</a:t>
+              <a:t>板块</a:t>
             </a:r>
           </a:p>
         </p:txBody>
@@ -7684,6 +7673,643 @@
       <p:sp>
         <p:nvSpPr>
           <p:cNvPr id="7" name="TextBox 6"/>
+          <p:cNvSpPr txBox="1"/>
+          <p:nvPr/>
+        </p:nvSpPr>
+        <p:spPr>
+          <a:xfrm>
+            <a:off x="4297680" y="1810512"/>
+            <a:ext cx="7680960" cy="365760"/>
+          </a:xfrm>
+          <a:prstGeom prst="rect">
+            <a:avLst/>
+          </a:prstGeom>
+          <a:noFill/>
+        </p:spPr>
+        <p:txBody>
+          <a:bodyPr wrap="square" anchor="t" lIns="0" rIns="0" tIns="0" bIns="0">
+            <a:spAutoFit/>
+          </a:bodyPr>
+          <a:lstStyle/>
+          <a:p>
+            <a:pPr algn="l"/>
+            <a:r>
+              <a:rPr sz="1500" b="1">
+                <a:solidFill>
+                  <a:srgbClr val="C8A86B"/>
+                </a:solidFill>
+                <a:latin typeface="微软雅黑"/>
+                <a:ea typeface="微软雅黑"/>
+                <a:cs typeface="微软雅黑"/>
+              </a:rPr>
+              <a:t>要点</a:t>
+            </a:r>
+          </a:p>
+        </p:txBody>
+      </p:sp>
+      <p:sp>
+        <p:nvSpPr>
+          <p:cNvPr id="8" name="Rounded Rectangle 7"/>
+          <p:cNvSpPr/>
+          <p:nvPr/>
+        </p:nvSpPr>
+        <p:spPr>
+          <a:xfrm>
+            <a:off x="640080" y="2331720"/>
+            <a:ext cx="10911535" cy="530352"/>
+          </a:xfrm>
+          <a:prstGeom prst="roundRect">
+            <a:avLst/>
+          </a:prstGeom>
+          <a:solidFill>
+            <a:srgbClr val="FFFFFF"/>
+          </a:solidFill>
+          <a:ln w="10160">
+            <a:solidFill>
+              <a:srgbClr val="6B6258"/>
+            </a:solidFill>
+          </a:ln>
+          <a:effectLst/>
+        </p:spPr>
+        <p:style>
+          <a:lnRef idx="1">
+            <a:schemeClr val="accent1"/>
+          </a:lnRef>
+          <a:fillRef idx="3">
+            <a:schemeClr val="accent1"/>
+          </a:fillRef>
+          <a:effectRef idx="2">
+            <a:schemeClr val="accent1"/>
+          </a:effectRef>
+          <a:fontRef idx="minor">
+            <a:schemeClr val="lt1"/>
+          </a:fontRef>
+        </p:style>
+        <p:txBody>
+          <a:bodyPr rtlCol="0" anchor="ctr"/>
+          <a:lstStyle/>
+          <a:p>
+            <a:pPr algn="ctr"/>
+          </a:p>
+        </p:txBody>
+      </p:sp>
+      <p:sp>
+        <p:nvSpPr>
+          <p:cNvPr id="9" name="TextBox 8"/>
+          <p:cNvSpPr txBox="1"/>
+          <p:nvPr/>
+        </p:nvSpPr>
+        <p:spPr>
+          <a:xfrm>
+            <a:off x="914400" y="2423160"/>
+            <a:ext cx="3108960" cy="365760"/>
+          </a:xfrm>
+          <a:prstGeom prst="rect">
+            <a:avLst/>
+          </a:prstGeom>
+          <a:noFill/>
+        </p:spPr>
+        <p:txBody>
+          <a:bodyPr wrap="square" anchor="t" lIns="0" rIns="0" tIns="0" bIns="0">
+            <a:spAutoFit/>
+          </a:bodyPr>
+          <a:lstStyle/>
+          <a:p>
+            <a:pPr algn="l"/>
+            <a:r>
+              <a:rPr sz="1400" b="1">
+                <a:solidFill>
+                  <a:srgbClr val="2E7D6B"/>
+                </a:solidFill>
+                <a:latin typeface="微软雅黑"/>
+                <a:ea typeface="微软雅黑"/>
+                <a:cs typeface="微软雅黑"/>
+              </a:rPr>
+              <a:t>课题</a:t>
+            </a:r>
+          </a:p>
+        </p:txBody>
+      </p:sp>
+      <p:sp>
+        <p:nvSpPr>
+          <p:cNvPr id="10" name="TextBox 9"/>
+          <p:cNvSpPr txBox="1"/>
+          <p:nvPr/>
+        </p:nvSpPr>
+        <p:spPr>
+          <a:xfrm>
+            <a:off x="4297680" y="2423160"/>
+            <a:ext cx="7680960" cy="365760"/>
+          </a:xfrm>
+          <a:prstGeom prst="rect">
+            <a:avLst/>
+          </a:prstGeom>
+          <a:noFill/>
+        </p:spPr>
+        <p:txBody>
+          <a:bodyPr wrap="square" anchor="t" lIns="0" rIns="0" tIns="0" bIns="0">
+            <a:spAutoFit/>
+          </a:bodyPr>
+          <a:lstStyle/>
+          <a:p>
+            <a:pPr algn="l"/>
+            <a:r>
+              <a:rPr sz="1250" b="0">
+                <a:solidFill>
+                  <a:srgbClr val="1C2A33"/>
+                </a:solidFill>
+                <a:latin typeface="楷体"/>
+                <a:ea typeface="楷体"/>
+                <a:cs typeface="楷体"/>
+              </a:rPr>
+              <a:t>细胞器之间的分工</a:t>
+            </a:r>
+          </a:p>
+        </p:txBody>
+      </p:sp>
+      <p:sp>
+        <p:nvSpPr>
+          <p:cNvPr id="11" name="Rounded Rectangle 10"/>
+          <p:cNvSpPr/>
+          <p:nvPr/>
+        </p:nvSpPr>
+        <p:spPr>
+          <a:xfrm>
+            <a:off x="640080" y="2916936"/>
+            <a:ext cx="10911535" cy="530352"/>
+          </a:xfrm>
+          <a:prstGeom prst="roundRect">
+            <a:avLst/>
+          </a:prstGeom>
+          <a:solidFill>
+            <a:srgbClr val="E7DFD2"/>
+          </a:solidFill>
+          <a:ln w="10160">
+            <a:solidFill>
+              <a:srgbClr val="6B6258"/>
+            </a:solidFill>
+          </a:ln>
+          <a:effectLst/>
+        </p:spPr>
+        <p:style>
+          <a:lnRef idx="1">
+            <a:schemeClr val="accent1"/>
+          </a:lnRef>
+          <a:fillRef idx="3">
+            <a:schemeClr val="accent1"/>
+          </a:fillRef>
+          <a:effectRef idx="2">
+            <a:schemeClr val="accent1"/>
+          </a:effectRef>
+          <a:fontRef idx="minor">
+            <a:schemeClr val="lt1"/>
+          </a:fontRef>
+        </p:style>
+        <p:txBody>
+          <a:bodyPr rtlCol="0" anchor="ctr"/>
+          <a:lstStyle/>
+          <a:p>
+            <a:pPr algn="ctr"/>
+          </a:p>
+        </p:txBody>
+      </p:sp>
+      <p:sp>
+        <p:nvSpPr>
+          <p:cNvPr id="12" name="TextBox 11"/>
+          <p:cNvSpPr txBox="1"/>
+          <p:nvPr/>
+        </p:nvSpPr>
+        <p:spPr>
+          <a:xfrm>
+            <a:off x="914400" y="3008376"/>
+            <a:ext cx="3108960" cy="365760"/>
+          </a:xfrm>
+          <a:prstGeom prst="rect">
+            <a:avLst/>
+          </a:prstGeom>
+          <a:noFill/>
+        </p:spPr>
+        <p:txBody>
+          <a:bodyPr wrap="square" anchor="t" lIns="0" rIns="0" tIns="0" bIns="0">
+            <a:spAutoFit/>
+          </a:bodyPr>
+          <a:lstStyle/>
+          <a:p>
+            <a:pPr algn="l"/>
+            <a:r>
+              <a:rPr sz="1400" b="1">
+                <a:solidFill>
+                  <a:srgbClr val="B23A2A"/>
+                </a:solidFill>
+                <a:latin typeface="微软雅黑"/>
+                <a:ea typeface="微软雅黑"/>
+                <a:cs typeface="微软雅黑"/>
+              </a:rPr>
+              <a:t>双层膜</a:t>
+            </a:r>
+          </a:p>
+        </p:txBody>
+      </p:sp>
+      <p:sp>
+        <p:nvSpPr>
+          <p:cNvPr id="13" name="TextBox 12"/>
+          <p:cNvSpPr txBox="1"/>
+          <p:nvPr/>
+        </p:nvSpPr>
+        <p:spPr>
+          <a:xfrm>
+            <a:off x="4297680" y="3008376"/>
+            <a:ext cx="7680960" cy="365760"/>
+          </a:xfrm>
+          <a:prstGeom prst="rect">
+            <a:avLst/>
+          </a:prstGeom>
+          <a:noFill/>
+        </p:spPr>
+        <p:txBody>
+          <a:bodyPr wrap="square" anchor="t" lIns="0" rIns="0" tIns="0" bIns="0">
+            <a:spAutoFit/>
+          </a:bodyPr>
+          <a:lstStyle/>
+          <a:p>
+            <a:pPr algn="l"/>
+            <a:r>
+              <a:rPr sz="1250" b="0">
+                <a:solidFill>
+                  <a:srgbClr val="1C2A33"/>
+                </a:solidFill>
+                <a:latin typeface="楷体"/>
+                <a:ea typeface="楷体"/>
+                <a:cs typeface="楷体"/>
+              </a:rPr>
+              <a:t>线粒体(呼吸)、叶绿体(光合)。</a:t>
+            </a:r>
+          </a:p>
+        </p:txBody>
+      </p:sp>
+      <p:sp>
+        <p:nvSpPr>
+          <p:cNvPr id="14" name="Rounded Rectangle 13"/>
+          <p:cNvSpPr/>
+          <p:nvPr/>
+        </p:nvSpPr>
+        <p:spPr>
+          <a:xfrm>
+            <a:off x="640080" y="3502152"/>
+            <a:ext cx="10911535" cy="530352"/>
+          </a:xfrm>
+          <a:prstGeom prst="roundRect">
+            <a:avLst/>
+          </a:prstGeom>
+          <a:solidFill>
+            <a:srgbClr val="FFFFFF"/>
+          </a:solidFill>
+          <a:ln w="10160">
+            <a:solidFill>
+              <a:srgbClr val="6B6258"/>
+            </a:solidFill>
+          </a:ln>
+          <a:effectLst/>
+        </p:spPr>
+        <p:style>
+          <a:lnRef idx="1">
+            <a:schemeClr val="accent1"/>
+          </a:lnRef>
+          <a:fillRef idx="3">
+            <a:schemeClr val="accent1"/>
+          </a:fillRef>
+          <a:effectRef idx="2">
+            <a:schemeClr val="accent1"/>
+          </a:effectRef>
+          <a:fontRef idx="minor">
+            <a:schemeClr val="lt1"/>
+          </a:fontRef>
+        </p:style>
+        <p:txBody>
+          <a:bodyPr rtlCol="0" anchor="ctr"/>
+          <a:lstStyle/>
+          <a:p>
+            <a:pPr algn="ctr"/>
+          </a:p>
+        </p:txBody>
+      </p:sp>
+      <p:sp>
+        <p:nvSpPr>
+          <p:cNvPr id="15" name="TextBox 14"/>
+          <p:cNvSpPr txBox="1"/>
+          <p:nvPr/>
+        </p:nvSpPr>
+        <p:spPr>
+          <a:xfrm>
+            <a:off x="914400" y="3593592"/>
+            <a:ext cx="3108960" cy="365760"/>
+          </a:xfrm>
+          <a:prstGeom prst="rect">
+            <a:avLst/>
+          </a:prstGeom>
+          <a:noFill/>
+        </p:spPr>
+        <p:txBody>
+          <a:bodyPr wrap="square" anchor="t" lIns="0" rIns="0" tIns="0" bIns="0">
+            <a:spAutoFit/>
+          </a:bodyPr>
+          <a:lstStyle/>
+          <a:p>
+            <a:pPr algn="l"/>
+            <a:r>
+              <a:rPr sz="1400" b="1">
+                <a:solidFill>
+                  <a:srgbClr val="C8A86B"/>
+                </a:solidFill>
+                <a:latin typeface="微软雅黑"/>
+                <a:ea typeface="微软雅黑"/>
+                <a:cs typeface="微软雅黑"/>
+              </a:rPr>
+              <a:t>单层膜</a:t>
+            </a:r>
+          </a:p>
+        </p:txBody>
+      </p:sp>
+      <p:sp>
+        <p:nvSpPr>
+          <p:cNvPr id="16" name="TextBox 15"/>
+          <p:cNvSpPr txBox="1"/>
+          <p:nvPr/>
+        </p:nvSpPr>
+        <p:spPr>
+          <a:xfrm>
+            <a:off x="4297680" y="3593592"/>
+            <a:ext cx="7680960" cy="365760"/>
+          </a:xfrm>
+          <a:prstGeom prst="rect">
+            <a:avLst/>
+          </a:prstGeom>
+          <a:noFill/>
+        </p:spPr>
+        <p:txBody>
+          <a:bodyPr wrap="square" anchor="t" lIns="0" rIns="0" tIns="0" bIns="0">
+            <a:spAutoFit/>
+          </a:bodyPr>
+          <a:lstStyle/>
+          <a:p>
+            <a:pPr algn="l"/>
+            <a:r>
+              <a:rPr sz="1250" b="0">
+                <a:solidFill>
+                  <a:srgbClr val="1C2A33"/>
+                </a:solidFill>
+                <a:latin typeface="楷体"/>
+                <a:ea typeface="楷体"/>
+                <a:cs typeface="楷体"/>
+              </a:rPr>
+              <a:t>内质网(加工运输)、高尔基体(加工分类)、溶酶体(水解)、液泡。</a:t>
+            </a:r>
+          </a:p>
+        </p:txBody>
+      </p:sp>
+      <p:sp>
+        <p:nvSpPr>
+          <p:cNvPr id="17" name="Rounded Rectangle 16"/>
+          <p:cNvSpPr/>
+          <p:nvPr/>
+        </p:nvSpPr>
+        <p:spPr>
+          <a:xfrm>
+            <a:off x="640080" y="4087368"/>
+            <a:ext cx="10911535" cy="530352"/>
+          </a:xfrm>
+          <a:prstGeom prst="roundRect">
+            <a:avLst/>
+          </a:prstGeom>
+          <a:solidFill>
+            <a:srgbClr val="E7DFD2"/>
+          </a:solidFill>
+          <a:ln w="10160">
+            <a:solidFill>
+              <a:srgbClr val="6B6258"/>
+            </a:solidFill>
+          </a:ln>
+          <a:effectLst/>
+        </p:spPr>
+        <p:style>
+          <a:lnRef idx="1">
+            <a:schemeClr val="accent1"/>
+          </a:lnRef>
+          <a:fillRef idx="3">
+            <a:schemeClr val="accent1"/>
+          </a:fillRef>
+          <a:effectRef idx="2">
+            <a:schemeClr val="accent1"/>
+          </a:effectRef>
+          <a:fontRef idx="minor">
+            <a:schemeClr val="lt1"/>
+          </a:fontRef>
+        </p:style>
+        <p:txBody>
+          <a:bodyPr rtlCol="0" anchor="ctr"/>
+          <a:lstStyle/>
+          <a:p>
+            <a:pPr algn="ctr"/>
+          </a:p>
+        </p:txBody>
+      </p:sp>
+      <p:sp>
+        <p:nvSpPr>
+          <p:cNvPr id="18" name="TextBox 17"/>
+          <p:cNvSpPr txBox="1"/>
+          <p:nvPr/>
+        </p:nvSpPr>
+        <p:spPr>
+          <a:xfrm>
+            <a:off x="914400" y="4178808"/>
+            <a:ext cx="3108960" cy="365760"/>
+          </a:xfrm>
+          <a:prstGeom prst="rect">
+            <a:avLst/>
+          </a:prstGeom>
+          <a:noFill/>
+        </p:spPr>
+        <p:txBody>
+          <a:bodyPr wrap="square" anchor="t" lIns="0" rIns="0" tIns="0" bIns="0">
+            <a:spAutoFit/>
+          </a:bodyPr>
+          <a:lstStyle/>
+          <a:p>
+            <a:pPr algn="l"/>
+            <a:r>
+              <a:rPr sz="1400" b="1">
+                <a:solidFill>
+                  <a:srgbClr val="6B6258"/>
+                </a:solidFill>
+                <a:latin typeface="微软雅黑"/>
+                <a:ea typeface="微软雅黑"/>
+                <a:cs typeface="微软雅黑"/>
+              </a:rPr>
+              <a:t>无膜</a:t>
+            </a:r>
+          </a:p>
+        </p:txBody>
+      </p:sp>
+      <p:sp>
+        <p:nvSpPr>
+          <p:cNvPr id="19" name="TextBox 18"/>
+          <p:cNvSpPr txBox="1"/>
+          <p:nvPr/>
+        </p:nvSpPr>
+        <p:spPr>
+          <a:xfrm>
+            <a:off x="4297680" y="4178808"/>
+            <a:ext cx="7680960" cy="365760"/>
+          </a:xfrm>
+          <a:prstGeom prst="rect">
+            <a:avLst/>
+          </a:prstGeom>
+          <a:noFill/>
+        </p:spPr>
+        <p:txBody>
+          <a:bodyPr wrap="square" anchor="t" lIns="0" rIns="0" tIns="0" bIns="0">
+            <a:spAutoFit/>
+          </a:bodyPr>
+          <a:lstStyle/>
+          <a:p>
+            <a:pPr algn="l"/>
+            <a:r>
+              <a:rPr sz="1250" b="0">
+                <a:solidFill>
+                  <a:srgbClr val="1C2A33"/>
+                </a:solidFill>
+                <a:latin typeface="楷体"/>
+                <a:ea typeface="楷体"/>
+                <a:cs typeface="楷体"/>
+              </a:rPr>
+              <a:t>核糖体(合成蛋白)、中心体(分裂)。</a:t>
+            </a:r>
+          </a:p>
+        </p:txBody>
+      </p:sp>
+      <p:sp>
+        <p:nvSpPr>
+          <p:cNvPr id="20" name="Rounded Rectangle 19"/>
+          <p:cNvSpPr/>
+          <p:nvPr/>
+        </p:nvSpPr>
+        <p:spPr>
+          <a:xfrm>
+            <a:off x="640080" y="4672584"/>
+            <a:ext cx="10911535" cy="530352"/>
+          </a:xfrm>
+          <a:prstGeom prst="roundRect">
+            <a:avLst/>
+          </a:prstGeom>
+          <a:solidFill>
+            <a:srgbClr val="FFFFFF"/>
+          </a:solidFill>
+          <a:ln w="10160">
+            <a:solidFill>
+              <a:srgbClr val="6B6258"/>
+            </a:solidFill>
+          </a:ln>
+          <a:effectLst/>
+        </p:spPr>
+        <p:style>
+          <a:lnRef idx="1">
+            <a:schemeClr val="accent1"/>
+          </a:lnRef>
+          <a:fillRef idx="3">
+            <a:schemeClr val="accent1"/>
+          </a:fillRef>
+          <a:effectRef idx="2">
+            <a:schemeClr val="accent1"/>
+          </a:effectRef>
+          <a:fontRef idx="minor">
+            <a:schemeClr val="lt1"/>
+          </a:fontRef>
+        </p:style>
+        <p:txBody>
+          <a:bodyPr rtlCol="0" anchor="ctr"/>
+          <a:lstStyle/>
+          <a:p>
+            <a:pPr algn="ctr"/>
+          </a:p>
+        </p:txBody>
+      </p:sp>
+      <p:sp>
+        <p:nvSpPr>
+          <p:cNvPr id="21" name="TextBox 20"/>
+          <p:cNvSpPr txBox="1"/>
+          <p:nvPr/>
+        </p:nvSpPr>
+        <p:spPr>
+          <a:xfrm>
+            <a:off x="914400" y="4764024"/>
+            <a:ext cx="3108960" cy="365760"/>
+          </a:xfrm>
+          <a:prstGeom prst="rect">
+            <a:avLst/>
+          </a:prstGeom>
+          <a:noFill/>
+        </p:spPr>
+        <p:txBody>
+          <a:bodyPr wrap="square" anchor="t" lIns="0" rIns="0" tIns="0" bIns="0">
+            <a:spAutoFit/>
+          </a:bodyPr>
+          <a:lstStyle/>
+          <a:p>
+            <a:pPr algn="l"/>
+            <a:r>
+              <a:rPr sz="1400" b="1">
+                <a:solidFill>
+                  <a:srgbClr val="2E7D6B"/>
+                </a:solidFill>
+                <a:latin typeface="微软雅黑"/>
+                <a:ea typeface="微软雅黑"/>
+                <a:cs typeface="微软雅黑"/>
+              </a:rPr>
+              <a:t>动植物差异</a:t>
+            </a:r>
+          </a:p>
+        </p:txBody>
+      </p:sp>
+      <p:sp>
+        <p:nvSpPr>
+          <p:cNvPr id="22" name="TextBox 21"/>
+          <p:cNvSpPr txBox="1"/>
+          <p:nvPr/>
+        </p:nvSpPr>
+        <p:spPr>
+          <a:xfrm>
+            <a:off x="4297680" y="4764024"/>
+            <a:ext cx="7680960" cy="365760"/>
+          </a:xfrm>
+          <a:prstGeom prst="rect">
+            <a:avLst/>
+          </a:prstGeom>
+          <a:noFill/>
+        </p:spPr>
+        <p:txBody>
+          <a:bodyPr wrap="square" anchor="t" lIns="0" rIns="0" tIns="0" bIns="0">
+            <a:spAutoFit/>
+          </a:bodyPr>
+          <a:lstStyle/>
+          <a:p>
+            <a:pPr algn="l"/>
+            <a:r>
+              <a:rPr sz="1250" b="0">
+                <a:solidFill>
+                  <a:srgbClr val="1C2A33"/>
+                </a:solidFill>
+                <a:latin typeface="楷体"/>
+                <a:ea typeface="楷体"/>
+                <a:cs typeface="楷体"/>
+              </a:rPr>
+              <a:t>中心体（动物低等植物有）、叶绿体液泡（植物有）。</a:t>
+            </a:r>
+          </a:p>
+        </p:txBody>
+      </p:sp>
+      <p:sp>
+        <p:nvSpPr>
+          <p:cNvPr id="23" name="TextBox 22"/>
           <p:cNvSpPr txBox="1"/>
           <p:nvPr/>
         </p:nvSpPr>
@@ -7816,7 +8442,7 @@
                 <a:ea typeface="微软雅黑"/>
                 <a:cs typeface="微软雅黑"/>
               </a:rPr>
-              <a:t>分层作业</a:t>
+              <a:t>作业</a:t>
             </a:r>
           </a:p>
         </p:txBody>
@@ -7867,14 +8493,51 @@
       </p:sp>
       <p:sp>
         <p:nvSpPr>
-          <p:cNvPr id="5" name="Rounded Rectangle 4"/>
+          <p:cNvPr id="5" name="TextBox 4"/>
+          <p:cNvSpPr txBox="1"/>
+          <p:nvPr/>
+        </p:nvSpPr>
+        <p:spPr>
+          <a:xfrm>
+            <a:off x="640080" y="1325880"/>
+            <a:ext cx="10058400" cy="548640"/>
+          </a:xfrm>
+          <a:prstGeom prst="rect">
+            <a:avLst/>
+          </a:prstGeom>
+          <a:noFill/>
+        </p:spPr>
+        <p:txBody>
+          <a:bodyPr wrap="square" anchor="t" lIns="0" rIns="0" tIns="0" bIns="0">
+            <a:spAutoFit/>
+          </a:bodyPr>
+          <a:lstStyle/>
+          <a:p>
+            <a:pPr algn="l"/>
+            <a:r>
+              <a:rPr sz="2600" b="1">
+                <a:solidFill>
+                  <a:srgbClr val="1C2A33"/>
+                </a:solidFill>
+                <a:latin typeface="楷体"/>
+                <a:ea typeface="楷体"/>
+                <a:cs typeface="楷体"/>
+              </a:rPr>
+              <a:t>基础 · 提高 · 拓展</a:t>
+            </a:r>
+          </a:p>
+        </p:txBody>
+      </p:sp>
+      <p:sp>
+        <p:nvSpPr>
+          <p:cNvPr id="6" name="Rounded Rectangle 5"/>
           <p:cNvSpPr/>
           <p:nvPr/>
         </p:nvSpPr>
         <p:spPr>
           <a:xfrm>
-            <a:off x="640080" y="1417320"/>
-            <a:ext cx="10911535" cy="1417320"/>
+            <a:off x="640080" y="2194560"/>
+            <a:ext cx="3393338" cy="3383280"/>
           </a:xfrm>
           <a:prstGeom prst="roundRect">
             <a:avLst/>
@@ -7882,7 +8545,7 @@
           <a:solidFill>
             <a:srgbClr val="FFFFFF"/>
           </a:solidFill>
-          <a:ln w="22860">
+          <a:ln w="20320">
             <a:solidFill>
               <a:srgbClr val="2E7D6B"/>
             </a:solidFill>
@@ -7913,107 +8576,23 @@
       </p:sp>
       <p:sp>
         <p:nvSpPr>
-          <p:cNvPr id="6" name="TextBox 5"/>
-          <p:cNvSpPr txBox="1"/>
-          <p:nvPr/>
-        </p:nvSpPr>
-        <p:spPr>
-          <a:xfrm>
-            <a:off x="1371600" y="1527048"/>
-            <a:ext cx="9997135" cy="457200"/>
-          </a:xfrm>
-          <a:prstGeom prst="rect">
-            <a:avLst/>
-          </a:prstGeom>
-          <a:noFill/>
-        </p:spPr>
-        <p:txBody>
-          <a:bodyPr wrap="square" anchor="t" lIns="0" rIns="0" tIns="0" bIns="0">
-            <a:spAutoFit/>
-          </a:bodyPr>
-          <a:lstStyle/>
-          <a:p>
-            <a:pPr algn="l">
-              <a:lnSpc>
-                <a:spcPct val="110000"/>
-              </a:lnSpc>
-            </a:pPr>
-            <a:r>
-              <a:rPr sz="1600" b="1">
-                <a:solidFill>
-                  <a:srgbClr val="1C2A33"/>
-                </a:solidFill>
-                <a:latin typeface="微软雅黑"/>
-                <a:ea typeface="微软雅黑"/>
-                <a:cs typeface="微软雅黑"/>
-              </a:rPr>
-              <a:t/>
-            </a:r>
-          </a:p>
-        </p:txBody>
-      </p:sp>
-      <p:sp>
-        <p:nvSpPr>
-          <p:cNvPr id="7" name="TextBox 6"/>
-          <p:cNvSpPr txBox="1"/>
-          <p:nvPr/>
-        </p:nvSpPr>
-        <p:spPr>
-          <a:xfrm>
-            <a:off x="1371600" y="1965960"/>
-            <a:ext cx="9997135" cy="777240"/>
-          </a:xfrm>
-          <a:prstGeom prst="rect">
-            <a:avLst/>
-          </a:prstGeom>
-          <a:noFill/>
-        </p:spPr>
-        <p:txBody>
-          <a:bodyPr wrap="square" anchor="t" lIns="0" rIns="0" tIns="0" bIns="0">
-            <a:spAutoFit/>
-          </a:bodyPr>
-          <a:lstStyle/>
-          <a:p>
-            <a:pPr algn="l">
-              <a:lnSpc>
-                <a:spcPct val="128000"/>
-              </a:lnSpc>
-            </a:pPr>
-            <a:r>
-              <a:rPr sz="1100" b="0">
-                <a:solidFill>
-                  <a:srgbClr val="1C2A33"/>
-                </a:solidFill>
-                <a:latin typeface="楷体"/>
-                <a:ea typeface="楷体"/>
-                <a:cs typeface="楷体"/>
-              </a:rPr>
-              <a:t>【基础作业】1. 蛋白质的"合成车间"是____。2. 下列动物细胞有而高等植物细胞无的是( )A.线粒体 B.中心体 C.核糖体。</a:t>
-            </a:r>
-          </a:p>
-        </p:txBody>
-      </p:sp>
-      <p:sp>
-        <p:nvSpPr>
-          <p:cNvPr id="8" name="Rounded Rectangle 7"/>
+          <p:cNvPr id="7" name="Rectangle 6"/>
           <p:cNvSpPr/>
           <p:nvPr/>
         </p:nvSpPr>
         <p:spPr>
           <a:xfrm>
-            <a:off x="640080" y="2971800"/>
-            <a:ext cx="10911535" cy="1417320"/>
-          </a:xfrm>
-          <a:prstGeom prst="roundRect">
+            <a:off x="640080" y="2194560"/>
+            <a:ext cx="3393338" cy="548640"/>
+          </a:xfrm>
+          <a:prstGeom prst="rect">
             <a:avLst/>
           </a:prstGeom>
           <a:solidFill>
-            <a:srgbClr val="FFFFFF"/>
+            <a:srgbClr val="2E7D6B"/>
           </a:solidFill>
-          <a:ln w="22860">
-            <a:solidFill>
-              <a:srgbClr val="2E7D6B"/>
-            </a:solidFill>
+          <a:ln>
+            <a:noFill/>
           </a:ln>
           <a:effectLst/>
         </p:spPr>
@@ -8041,14 +8620,14 @@
       </p:sp>
       <p:sp>
         <p:nvSpPr>
-          <p:cNvPr id="9" name="TextBox 8"/>
+          <p:cNvPr id="8" name="TextBox 7"/>
           <p:cNvSpPr txBox="1"/>
           <p:nvPr/>
         </p:nvSpPr>
         <p:spPr>
           <a:xfrm>
-            <a:off x="1371600" y="3081528"/>
-            <a:ext cx="9997135" cy="457200"/>
+            <a:off x="640080" y="2304288"/>
+            <a:ext cx="3393338" cy="365760"/>
           </a:xfrm>
           <a:prstGeom prst="rect">
             <a:avLst/>
@@ -8061,35 +8640,31 @@
           </a:bodyPr>
           <a:lstStyle/>
           <a:p>
-            <a:pPr algn="l">
-              <a:lnSpc>
-                <a:spcPct val="110000"/>
-              </a:lnSpc>
-            </a:pPr>
+            <a:pPr algn="ctr"/>
             <a:r>
               <a:rPr sz="1600" b="1">
                 <a:solidFill>
-                  <a:srgbClr val="1C2A33"/>
+                  <a:srgbClr val="FFFFFF"/>
                 </a:solidFill>
                 <a:latin typeface="微软雅黑"/>
                 <a:ea typeface="微软雅黑"/>
                 <a:cs typeface="微软雅黑"/>
               </a:rPr>
-              <a:t/>
-            </a:r>
-          </a:p>
-        </p:txBody>
-      </p:sp>
-      <p:sp>
-        <p:nvSpPr>
-          <p:cNvPr id="10" name="TextBox 9"/>
+              <a:t>基础 · 必做</a:t>
+            </a:r>
+          </a:p>
+        </p:txBody>
+      </p:sp>
+      <p:sp>
+        <p:nvSpPr>
+          <p:cNvPr id="9" name="TextBox 8"/>
           <p:cNvSpPr txBox="1"/>
           <p:nvPr/>
         </p:nvSpPr>
         <p:spPr>
           <a:xfrm>
-            <a:off x="1371600" y="3520440"/>
-            <a:ext cx="9997135" cy="777240"/>
+            <a:off x="914400" y="2971800"/>
+            <a:ext cx="2844698" cy="2468880"/>
           </a:xfrm>
           <a:prstGeom prst="rect">
             <a:avLst/>
@@ -8104,11 +8679,11 @@
           <a:p>
             <a:pPr algn="l">
               <a:lnSpc>
-                <a:spcPct val="128000"/>
+                <a:spcPct val="155000"/>
               </a:lnSpc>
             </a:pPr>
             <a:r>
-              <a:rPr sz="1400" b="0">
+              <a:rPr sz="1350" b="0">
                 <a:solidFill>
                   <a:srgbClr val="1C2A33"/>
                 </a:solidFill>
@@ -8116,14 +8691,350 @@
                 <a:ea typeface="楷体"/>
                 <a:cs typeface="楷体"/>
               </a:rPr>
-              <a:t>【提高作业】列表比较线粒体与叶绿体的结构与功能。</a:t>
-            </a:r>
-          </a:p>
-        </p:txBody>
-      </p:sp>
-      <p:sp>
-        <p:nvSpPr>
-          <p:cNvPr id="11" name="TextBox 10"/>
+              <a:t>1. 蛋白质的"合成车间"是____。2. 下列动物细胞有而高等植物细胞无的是( )A.线粒体 B.中心体 C.核糖体</a:t>
+            </a:r>
+          </a:p>
+        </p:txBody>
+      </p:sp>
+      <p:sp>
+        <p:nvSpPr>
+          <p:cNvPr id="10" name="Rounded Rectangle 9"/>
+          <p:cNvSpPr/>
+          <p:nvPr/>
+        </p:nvSpPr>
+        <p:spPr>
+          <a:xfrm>
+            <a:off x="4399178" y="2194560"/>
+            <a:ext cx="3393338" cy="3383280"/>
+          </a:xfrm>
+          <a:prstGeom prst="roundRect">
+            <a:avLst/>
+          </a:prstGeom>
+          <a:solidFill>
+            <a:srgbClr val="FFFFFF"/>
+          </a:solidFill>
+          <a:ln w="20320">
+            <a:solidFill>
+              <a:srgbClr val="B23A2A"/>
+            </a:solidFill>
+          </a:ln>
+          <a:effectLst/>
+        </p:spPr>
+        <p:style>
+          <a:lnRef idx="1">
+            <a:schemeClr val="accent1"/>
+          </a:lnRef>
+          <a:fillRef idx="3">
+            <a:schemeClr val="accent1"/>
+          </a:fillRef>
+          <a:effectRef idx="2">
+            <a:schemeClr val="accent1"/>
+          </a:effectRef>
+          <a:fontRef idx="minor">
+            <a:schemeClr val="lt1"/>
+          </a:fontRef>
+        </p:style>
+        <p:txBody>
+          <a:bodyPr rtlCol="0" anchor="ctr"/>
+          <a:lstStyle/>
+          <a:p>
+            <a:pPr algn="ctr"/>
+          </a:p>
+        </p:txBody>
+      </p:sp>
+      <p:sp>
+        <p:nvSpPr>
+          <p:cNvPr id="11" name="Rectangle 10"/>
+          <p:cNvSpPr/>
+          <p:nvPr/>
+        </p:nvSpPr>
+        <p:spPr>
+          <a:xfrm>
+            <a:off x="4399178" y="2194560"/>
+            <a:ext cx="3393338" cy="548640"/>
+          </a:xfrm>
+          <a:prstGeom prst="rect">
+            <a:avLst/>
+          </a:prstGeom>
+          <a:solidFill>
+            <a:srgbClr val="B23A2A"/>
+          </a:solidFill>
+          <a:ln>
+            <a:noFill/>
+          </a:ln>
+          <a:effectLst/>
+        </p:spPr>
+        <p:style>
+          <a:lnRef idx="1">
+            <a:schemeClr val="accent1"/>
+          </a:lnRef>
+          <a:fillRef idx="3">
+            <a:schemeClr val="accent1"/>
+          </a:fillRef>
+          <a:effectRef idx="2">
+            <a:schemeClr val="accent1"/>
+          </a:effectRef>
+          <a:fontRef idx="minor">
+            <a:schemeClr val="lt1"/>
+          </a:fontRef>
+        </p:style>
+        <p:txBody>
+          <a:bodyPr rtlCol="0" anchor="ctr"/>
+          <a:lstStyle/>
+          <a:p>
+            <a:pPr algn="ctr"/>
+          </a:p>
+        </p:txBody>
+      </p:sp>
+      <p:sp>
+        <p:nvSpPr>
+          <p:cNvPr id="12" name="TextBox 11"/>
+          <p:cNvSpPr txBox="1"/>
+          <p:nvPr/>
+        </p:nvSpPr>
+        <p:spPr>
+          <a:xfrm>
+            <a:off x="4399178" y="2304288"/>
+            <a:ext cx="3393338" cy="365760"/>
+          </a:xfrm>
+          <a:prstGeom prst="rect">
+            <a:avLst/>
+          </a:prstGeom>
+          <a:noFill/>
+        </p:spPr>
+        <p:txBody>
+          <a:bodyPr wrap="square" anchor="t" lIns="0" rIns="0" tIns="0" bIns="0">
+            <a:spAutoFit/>
+          </a:bodyPr>
+          <a:lstStyle/>
+          <a:p>
+            <a:pPr algn="ctr"/>
+            <a:r>
+              <a:rPr sz="1600" b="1">
+                <a:solidFill>
+                  <a:srgbClr val="FFFFFF"/>
+                </a:solidFill>
+                <a:latin typeface="微软雅黑"/>
+                <a:ea typeface="微软雅黑"/>
+                <a:cs typeface="微软雅黑"/>
+              </a:rPr>
+              <a:t>提高 · 选做</a:t>
+            </a:r>
+          </a:p>
+        </p:txBody>
+      </p:sp>
+      <p:sp>
+        <p:nvSpPr>
+          <p:cNvPr id="13" name="TextBox 12"/>
+          <p:cNvSpPr txBox="1"/>
+          <p:nvPr/>
+        </p:nvSpPr>
+        <p:spPr>
+          <a:xfrm>
+            <a:off x="4673498" y="2971800"/>
+            <a:ext cx="2844698" cy="2468880"/>
+          </a:xfrm>
+          <a:prstGeom prst="rect">
+            <a:avLst/>
+          </a:prstGeom>
+          <a:noFill/>
+        </p:spPr>
+        <p:txBody>
+          <a:bodyPr wrap="square" anchor="t" lIns="0" rIns="0" tIns="0" bIns="0">
+            <a:spAutoFit/>
+          </a:bodyPr>
+          <a:lstStyle/>
+          <a:p>
+            <a:pPr algn="l">
+              <a:lnSpc>
+                <a:spcPct val="155000"/>
+              </a:lnSpc>
+            </a:pPr>
+            <a:r>
+              <a:rPr sz="1350" b="0">
+                <a:solidFill>
+                  <a:srgbClr val="1C2A33"/>
+                </a:solidFill>
+                <a:latin typeface="楷体"/>
+                <a:ea typeface="楷体"/>
+                <a:cs typeface="楷体"/>
+              </a:rPr>
+              <a:t>列表比较线粒体与叶绿体的结构与功能</a:t>
+            </a:r>
+          </a:p>
+        </p:txBody>
+      </p:sp>
+      <p:sp>
+        <p:nvSpPr>
+          <p:cNvPr id="14" name="Rounded Rectangle 13"/>
+          <p:cNvSpPr/>
+          <p:nvPr/>
+        </p:nvSpPr>
+        <p:spPr>
+          <a:xfrm>
+            <a:off x="8158276" y="2194560"/>
+            <a:ext cx="3393338" cy="3383280"/>
+          </a:xfrm>
+          <a:prstGeom prst="roundRect">
+            <a:avLst/>
+          </a:prstGeom>
+          <a:solidFill>
+            <a:srgbClr val="FFFFFF"/>
+          </a:solidFill>
+          <a:ln w="20320">
+            <a:solidFill>
+              <a:srgbClr val="C8A86B"/>
+            </a:solidFill>
+          </a:ln>
+          <a:effectLst/>
+        </p:spPr>
+        <p:style>
+          <a:lnRef idx="1">
+            <a:schemeClr val="accent1"/>
+          </a:lnRef>
+          <a:fillRef idx="3">
+            <a:schemeClr val="accent1"/>
+          </a:fillRef>
+          <a:effectRef idx="2">
+            <a:schemeClr val="accent1"/>
+          </a:effectRef>
+          <a:fontRef idx="minor">
+            <a:schemeClr val="lt1"/>
+          </a:fontRef>
+        </p:style>
+        <p:txBody>
+          <a:bodyPr rtlCol="0" anchor="ctr"/>
+          <a:lstStyle/>
+          <a:p>
+            <a:pPr algn="ctr"/>
+          </a:p>
+        </p:txBody>
+      </p:sp>
+      <p:sp>
+        <p:nvSpPr>
+          <p:cNvPr id="15" name="Rectangle 14"/>
+          <p:cNvSpPr/>
+          <p:nvPr/>
+        </p:nvSpPr>
+        <p:spPr>
+          <a:xfrm>
+            <a:off x="8158276" y="2194560"/>
+            <a:ext cx="3393338" cy="548640"/>
+          </a:xfrm>
+          <a:prstGeom prst="rect">
+            <a:avLst/>
+          </a:prstGeom>
+          <a:solidFill>
+            <a:srgbClr val="C8A86B"/>
+          </a:solidFill>
+          <a:ln>
+            <a:noFill/>
+          </a:ln>
+          <a:effectLst/>
+        </p:spPr>
+        <p:style>
+          <a:lnRef idx="1">
+            <a:schemeClr val="accent1"/>
+          </a:lnRef>
+          <a:fillRef idx="3">
+            <a:schemeClr val="accent1"/>
+          </a:fillRef>
+          <a:effectRef idx="2">
+            <a:schemeClr val="accent1"/>
+          </a:effectRef>
+          <a:fontRef idx="minor">
+            <a:schemeClr val="lt1"/>
+          </a:fontRef>
+        </p:style>
+        <p:txBody>
+          <a:bodyPr rtlCol="0" anchor="ctr"/>
+          <a:lstStyle/>
+          <a:p>
+            <a:pPr algn="ctr"/>
+          </a:p>
+        </p:txBody>
+      </p:sp>
+      <p:sp>
+        <p:nvSpPr>
+          <p:cNvPr id="16" name="TextBox 15"/>
+          <p:cNvSpPr txBox="1"/>
+          <p:nvPr/>
+        </p:nvSpPr>
+        <p:spPr>
+          <a:xfrm>
+            <a:off x="8158276" y="2304288"/>
+            <a:ext cx="3393338" cy="365760"/>
+          </a:xfrm>
+          <a:prstGeom prst="rect">
+            <a:avLst/>
+          </a:prstGeom>
+          <a:noFill/>
+        </p:spPr>
+        <p:txBody>
+          <a:bodyPr wrap="square" anchor="t" lIns="0" rIns="0" tIns="0" bIns="0">
+            <a:spAutoFit/>
+          </a:bodyPr>
+          <a:lstStyle/>
+          <a:p>
+            <a:pPr algn="ctr"/>
+            <a:r>
+              <a:rPr sz="1600" b="1">
+                <a:solidFill>
+                  <a:srgbClr val="FFFFFF"/>
+                </a:solidFill>
+                <a:latin typeface="微软雅黑"/>
+                <a:ea typeface="微软雅黑"/>
+                <a:cs typeface="微软雅黑"/>
+              </a:rPr>
+              <a:t>拓展 · 探究</a:t>
+            </a:r>
+          </a:p>
+        </p:txBody>
+      </p:sp>
+      <p:sp>
+        <p:nvSpPr>
+          <p:cNvPr id="17" name="TextBox 16"/>
+          <p:cNvSpPr txBox="1"/>
+          <p:nvPr/>
+        </p:nvSpPr>
+        <p:spPr>
+          <a:xfrm>
+            <a:off x="8432596" y="2971800"/>
+            <a:ext cx="2844698" cy="2468880"/>
+          </a:xfrm>
+          <a:prstGeom prst="rect">
+            <a:avLst/>
+          </a:prstGeom>
+          <a:noFill/>
+        </p:spPr>
+        <p:txBody>
+          <a:bodyPr wrap="square" anchor="t" lIns="0" rIns="0" tIns="0" bIns="0">
+            <a:spAutoFit/>
+          </a:bodyPr>
+          <a:lstStyle/>
+          <a:p>
+            <a:pPr algn="l">
+              <a:lnSpc>
+                <a:spcPct val="155000"/>
+              </a:lnSpc>
+            </a:pPr>
+            <a:r>
+              <a:rPr sz="1350" b="0">
+                <a:solidFill>
+                  <a:srgbClr val="1C2A33"/>
+                </a:solidFill>
+                <a:latin typeface="楷体"/>
+                <a:ea typeface="楷体"/>
+                <a:cs typeface="楷体"/>
+              </a:rPr>
+              <a:t>把本课要点讲给家人听，或找一处生活中的例子印证。</a:t>
+            </a:r>
+          </a:p>
+        </p:txBody>
+      </p:sp>
+      <p:sp>
+        <p:nvSpPr>
+          <p:cNvPr id="18" name="TextBox 17"/>
           <p:cNvSpPr txBox="1"/>
           <p:nvPr/>
         </p:nvSpPr>
@@ -8250,13 +9161,13 @@
             <a:r>
               <a:rPr sz="1300" b="1">
                 <a:solidFill>
-                  <a:srgbClr val="C8A86B"/>
+                  <a:srgbClr val="2E7D6B"/>
                 </a:solidFill>
                 <a:latin typeface="微软雅黑"/>
                 <a:ea typeface="微软雅黑"/>
                 <a:cs typeface="微软雅黑"/>
               </a:rPr>
-              <a:t>本课小结</a:t>
+              <a:t>单元小结</a:t>
             </a:r>
           </a:p>
         </p:txBody>
@@ -8276,7 +9187,7 @@
             <a:avLst/>
           </a:prstGeom>
           <a:solidFill>
-            <a:srgbClr val="C8A86B"/>
+            <a:srgbClr val="2E7D6B"/>
           </a:solidFill>
           <a:ln>
             <a:noFill/>
@@ -8307,24 +9218,206 @@
       </p:sp>
       <p:sp>
         <p:nvSpPr>
-          <p:cNvPr id="5" name="Rectangle 4"/>
+          <p:cNvPr id="5" name="TextBox 4"/>
+          <p:cNvSpPr txBox="1"/>
+          <p:nvPr/>
+        </p:nvSpPr>
+        <p:spPr>
+          <a:xfrm>
+            <a:off x="640080" y="1325880"/>
+            <a:ext cx="10058400" cy="548640"/>
+          </a:xfrm>
+          <a:prstGeom prst="rect">
+            <a:avLst/>
+          </a:prstGeom>
+          <a:noFill/>
+        </p:spPr>
+        <p:txBody>
+          <a:bodyPr wrap="square" anchor="t" lIns="0" rIns="0" tIns="0" bIns="0">
+            <a:spAutoFit/>
+          </a:bodyPr>
+          <a:lstStyle/>
+          <a:p>
+            <a:pPr algn="l"/>
+            <a:r>
+              <a:rPr sz="2600" b="1">
+                <a:solidFill>
+                  <a:srgbClr val="1C2A33"/>
+                </a:solidFill>
+                <a:latin typeface="楷体"/>
+                <a:ea typeface="楷体"/>
+                <a:cs typeface="楷体"/>
+              </a:rPr>
+              <a:t>本课小结与单元定位</a:t>
+            </a:r>
+          </a:p>
+        </p:txBody>
+      </p:sp>
+      <p:sp>
+        <p:nvSpPr>
+          <p:cNvPr id="6" name="TextBox 5"/>
+          <p:cNvSpPr txBox="1"/>
+          <p:nvPr/>
+        </p:nvSpPr>
+        <p:spPr>
+          <a:xfrm>
+            <a:off x="640080" y="1828800"/>
+            <a:ext cx="5227167" cy="457200"/>
+          </a:xfrm>
+          <a:prstGeom prst="rect">
+            <a:avLst/>
+          </a:prstGeom>
+          <a:noFill/>
+        </p:spPr>
+        <p:txBody>
+          <a:bodyPr wrap="square" anchor="t" lIns="0" rIns="0" tIns="0" bIns="0">
+            <a:spAutoFit/>
+          </a:bodyPr>
+          <a:lstStyle/>
+          <a:p>
+            <a:pPr algn="l">
+              <a:spcAft>
+                <a:spcPts val="600"/>
+              </a:spcAft>
+            </a:pPr>
+            <a:r>
+              <a:rPr sz="1800" b="1">
+                <a:solidFill>
+                  <a:srgbClr val="2E7D6B"/>
+                </a:solidFill>
+                <a:latin typeface="楷体"/>
+                <a:ea typeface="楷体"/>
+                <a:cs typeface="楷体"/>
+              </a:rPr>
+              <a:t>本课小结</a:t>
+            </a:r>
+          </a:p>
+        </p:txBody>
+      </p:sp>
+      <p:sp>
+        <p:nvSpPr>
+          <p:cNvPr id="7" name="TextBox 6"/>
+          <p:cNvSpPr txBox="1"/>
+          <p:nvPr/>
+        </p:nvSpPr>
+        <p:spPr>
+          <a:xfrm>
+            <a:off x="640080" y="2331720"/>
+            <a:ext cx="5227167" cy="3657600"/>
+          </a:xfrm>
+          <a:prstGeom prst="rect">
+            <a:avLst/>
+          </a:prstGeom>
+          <a:noFill/>
+        </p:spPr>
+        <p:txBody>
+          <a:bodyPr wrap="square" anchor="t" lIns="0" rIns="0" tIns="0" bIns="0">
+            <a:spAutoFit/>
+          </a:bodyPr>
+          <a:lstStyle/>
+          <a:p>
+            <a:pPr algn="l">
+              <a:lnSpc>
+                <a:spcPct val="145000"/>
+              </a:lnSpc>
+              <a:spcAft>
+                <a:spcPts val="700"/>
+              </a:spcAft>
+            </a:pPr>
+            <a:r>
+              <a:rPr sz="1350" b="0">
+                <a:solidFill>
+                  <a:srgbClr val="1C2A33"/>
+                </a:solidFill>
+                <a:latin typeface="楷体"/>
+                <a:ea typeface="楷体"/>
+                <a:cs typeface="楷体"/>
+              </a:rPr>
+              <a:t>· 双层膜：线粒体(呼吸)、叶绿体(光合)。</a:t>
+            </a:r>
+          </a:p>
+          <a:p>
+            <a:pPr algn="l">
+              <a:lnSpc>
+                <a:spcPct val="145000"/>
+              </a:lnSpc>
+              <a:spcAft>
+                <a:spcPts val="700"/>
+              </a:spcAft>
+            </a:pPr>
+            <a:r>
+              <a:rPr sz="1350" b="0">
+                <a:solidFill>
+                  <a:srgbClr val="1C2A33"/>
+                </a:solidFill>
+                <a:latin typeface="楷体"/>
+                <a:ea typeface="楷体"/>
+                <a:cs typeface="楷体"/>
+              </a:rPr>
+              <a:t>· 单层膜：内质网(加工运输)、高尔基体(加工分类)、溶酶体(水解)、液泡。</a:t>
+            </a:r>
+          </a:p>
+          <a:p>
+            <a:pPr algn="l">
+              <a:lnSpc>
+                <a:spcPct val="145000"/>
+              </a:lnSpc>
+              <a:spcAft>
+                <a:spcPts val="700"/>
+              </a:spcAft>
+            </a:pPr>
+            <a:r>
+              <a:rPr sz="1350" b="0">
+                <a:solidFill>
+                  <a:srgbClr val="1C2A33"/>
+                </a:solidFill>
+                <a:latin typeface="楷体"/>
+                <a:ea typeface="楷体"/>
+                <a:cs typeface="楷体"/>
+              </a:rPr>
+              <a:t>· 无膜：核糖体(合成蛋白)、中心体(分裂)。</a:t>
+            </a:r>
+          </a:p>
+          <a:p>
+            <a:pPr algn="l">
+              <a:lnSpc>
+                <a:spcPct val="145000"/>
+              </a:lnSpc>
+              <a:spcAft>
+                <a:spcPts val="700"/>
+              </a:spcAft>
+            </a:pPr>
+            <a:r>
+              <a:rPr sz="1350" b="0">
+                <a:solidFill>
+                  <a:srgbClr val="1C2A33"/>
+                </a:solidFill>
+                <a:latin typeface="楷体"/>
+                <a:ea typeface="楷体"/>
+                <a:cs typeface="楷体"/>
+              </a:rPr>
+              <a:t>· 动植物差异：中心体（动物低等植物有）、叶绿体液泡（植物有）。</a:t>
+            </a:r>
+          </a:p>
+        </p:txBody>
+      </p:sp>
+      <p:sp>
+        <p:nvSpPr>
+          <p:cNvPr id="8" name="Rounded Rectangle 7"/>
           <p:cNvSpPr/>
           <p:nvPr/>
         </p:nvSpPr>
         <p:spPr>
           <a:xfrm>
-            <a:off x="640080" y="1737360"/>
-            <a:ext cx="54864" cy="431800"/>
-          </a:xfrm>
-          <a:prstGeom prst="rect">
+            <a:off x="6324447" y="1828800"/>
+            <a:ext cx="5227167" cy="3657600"/>
+          </a:xfrm>
+          <a:prstGeom prst="roundRect">
             <a:avLst/>
           </a:prstGeom>
           <a:solidFill>
-            <a:srgbClr val="C8A86B"/>
+            <a:srgbClr val="1C2A33"/>
           </a:solidFill>
-          <a:ln>
-            <a:noFill/>
-          </a:ln>
           <a:effectLst/>
         </p:spPr>
         <p:style>
@@ -8351,14 +9444,14 @@
       </p:sp>
       <p:sp>
         <p:nvSpPr>
-          <p:cNvPr id="6" name="TextBox 5"/>
+          <p:cNvPr id="9" name="TextBox 8"/>
           <p:cNvSpPr txBox="1"/>
           <p:nvPr/>
         </p:nvSpPr>
         <p:spPr>
           <a:xfrm>
-            <a:off x="868680" y="1645920"/>
-            <a:ext cx="10682935" cy="2194560"/>
+            <a:off x="6598767" y="2011680"/>
+            <a:ext cx="4678527" cy="457200"/>
           </a:xfrm>
           <a:prstGeom prst="rect">
             <a:avLst/>
@@ -8371,45 +9464,131 @@
           </a:bodyPr>
           <a:lstStyle/>
           <a:p>
-            <a:pPr algn="l">
-              <a:lnSpc>
-                <a:spcPct val="150000"/>
-              </a:lnSpc>
-              <a:spcAft>
-                <a:spcPts val="1000"/>
-              </a:spcAft>
-            </a:pPr>
-            <a:r>
-              <a:rPr sz="2200" b="0">
-                <a:solidFill>
-                  <a:srgbClr val="1C2A33"/>
+            <a:pPr algn="l"/>
+            <a:r>
+              <a:rPr sz="1700" b="1">
+                <a:solidFill>
+                  <a:srgbClr val="C8A86B"/>
                 </a:solidFill>
                 <a:latin typeface="楷体"/>
                 <a:ea typeface="楷体"/>
                 <a:cs typeface="楷体"/>
               </a:rPr>
-              <a:t>本单元主题：细胞的基本结构。把今天学到的方法带进下一篇——自己读、自己想、自己写。</a:t>
-            </a:r>
-          </a:p>
-          <a:p>
-            <a:pPr algn="l"/>
-            <a:r>
-              <a:rPr sz="1600" b="1">
-                <a:solidFill>
-                  <a:srgbClr val="B23A2A"/>
-                </a:solidFill>
-                <a:latin typeface="微软雅黑"/>
-                <a:ea typeface="微软雅黑"/>
-                <a:cs typeface="微软雅黑"/>
+              <a:t>单元坐标</a:t>
+            </a:r>
+          </a:p>
+        </p:txBody>
+      </p:sp>
+      <p:sp>
+        <p:nvSpPr>
+          <p:cNvPr id="10" name="TextBox 9"/>
+          <p:cNvSpPr txBox="1"/>
+          <p:nvPr/>
+        </p:nvSpPr>
+        <p:spPr>
+          <a:xfrm>
+            <a:off x="6598767" y="2514599"/>
+            <a:ext cx="4678527" cy="2743200"/>
+          </a:xfrm>
+          <a:prstGeom prst="rect">
+            <a:avLst/>
+          </a:prstGeom>
+          <a:noFill/>
+        </p:spPr>
+        <p:txBody>
+          <a:bodyPr wrap="square" anchor="t" lIns="0" rIns="0" tIns="0" bIns="0">
+            <a:spAutoFit/>
+          </a:bodyPr>
+          <a:lstStyle/>
+          <a:p>
+            <a:pPr algn="l">
+              <a:lnSpc>
+                <a:spcPct val="145000"/>
+              </a:lnSpc>
+              <a:spcAft>
+                <a:spcPts val="600"/>
+              </a:spcAft>
+            </a:pPr>
+            <a:r>
+              <a:rPr sz="1350" b="0">
+                <a:solidFill>
+                  <a:srgbClr val="FFFFFF"/>
+                </a:solidFill>
+                <a:latin typeface="楷体"/>
+                <a:ea typeface="楷体"/>
+                <a:cs typeface="楷体"/>
               </a:rPr>
-              <a:t>方法迁移：圈关键信息 → 理事件脉络 → 析人物精神</a:t>
-            </a:r>
-          </a:p>
-        </p:txBody>
-      </p:sp>
-      <p:sp>
-        <p:nvSpPr>
-          <p:cNvPr id="7" name="TextBox 6"/>
+              <a:t>教材：必修1 分子与细胞</a:t>
+            </a:r>
+          </a:p>
+          <a:p>
+            <a:pPr algn="l">
+              <a:lnSpc>
+                <a:spcPct val="145000"/>
+              </a:lnSpc>
+              <a:spcAft>
+                <a:spcPts val="600"/>
+              </a:spcAft>
+            </a:pPr>
+            <a:r>
+              <a:rPr sz="1350" b="0">
+                <a:solidFill>
+                  <a:srgbClr val="FFFFFF"/>
+                </a:solidFill>
+                <a:latin typeface="楷体"/>
+                <a:ea typeface="楷体"/>
+                <a:cs typeface="楷体"/>
+              </a:rPr>
+              <a:t>单元：细胞的基本结构</a:t>
+            </a:r>
+          </a:p>
+          <a:p>
+            <a:pPr algn="l">
+              <a:lnSpc>
+                <a:spcPct val="145000"/>
+              </a:lnSpc>
+              <a:spcAft>
+                <a:spcPts val="600"/>
+              </a:spcAft>
+            </a:pPr>
+            <a:r>
+              <a:rPr sz="1300" b="0">
+                <a:solidFill>
+                  <a:srgbClr val="E7DFD2"/>
+                </a:solidFill>
+                <a:latin typeface="楷体"/>
+                <a:ea typeface="楷体"/>
+                <a:cs typeface="楷体"/>
+              </a:rPr>
+              <a:t>衔接：下节课：生物膜系统与细胞的协调配合——追踪分泌蛋白的旅程。</a:t>
+            </a:r>
+          </a:p>
+          <a:p>
+            <a:pPr algn="l">
+              <a:lnSpc>
+                <a:spcPct val="145000"/>
+              </a:lnSpc>
+              <a:spcBef>
+                <a:spcPts val="600"/>
+              </a:spcBef>
+            </a:pPr>
+            <a:r>
+              <a:rPr sz="1350" b="1">
+                <a:solidFill>
+                  <a:srgbClr val="C8A86B"/>
+                </a:solidFill>
+                <a:latin typeface="楷体"/>
+                <a:ea typeface="楷体"/>
+                <a:cs typeface="楷体"/>
+              </a:rPr>
+              <a:t>口诀：双层线叶、单层网高溶泡、无膜糖中；动物有中心体、植物有叶绿液泡。</a:t>
+            </a:r>
+          </a:p>
+        </p:txBody>
+      </p:sp>
+      <p:sp>
+        <p:nvSpPr>
+          <p:cNvPr id="11" name="TextBox 10"/>
           <p:cNvSpPr txBox="1"/>
           <p:nvPr/>
         </p:nvSpPr>
